--- a/slides/odmr_473nm_talk.pptx
+++ b/slides/odmr_473nm_talk.pptx
@@ -9312,7 +9312,7 @@
           <a:lstStyle/>
           <a:p>
             <a:r>
-              <a:rPr sz="1700" b="0">
+              <a:rPr sz="1800" b="0">
                 <a:latin typeface="Yu Gothic"/>
                 <a:ea typeface="Yu Gothic"/>
                 <a:cs typeface="Yu Gothic"/>
@@ -9338,7 +9338,7 @@
           <a:lstStyle/>
           <a:p>
             <a:r>
-              <a:rPr sz="1500">
+              <a:rPr sz="1800">
                 <a:latin typeface="Yu Gothic"/>
                 <a:ea typeface="Yu Gothic"/>
                 <a:cs typeface="Yu Gothic"/>
@@ -9364,7 +9364,7 @@
           <a:lstStyle/>
           <a:p>
             <a:r>
-              <a:rPr sz="1200">
+              <a:rPr sz="1800">
                 <a:solidFill>
                   <a:srgbClr val="1C3177"/>
                 </a:solidFill>
@@ -9440,8 +9440,8 @@
         </p:blipFill>
         <p:spPr>
           <a:xfrm>
-            <a:off x="651340" y="1325880"/>
-            <a:ext cx="6561159" cy="3914071"/>
+            <a:off x="411480" y="1325880"/>
+            <a:ext cx="7040880" cy="3931920"/>
           </a:xfrm>
           <a:prstGeom prst="rect">
             <a:avLst/>
@@ -9479,7 +9479,7 @@
               </a:spcAft>
             </a:pPr>
             <a:r>
-              <a:rPr sz="1700" b="0">
+              <a:rPr sz="1800" b="0">
                 <a:solidFill>
                   <a:srgbClr val="101426"/>
                 </a:solidFill>
@@ -9500,7 +9500,7 @@
               </a:spcAft>
             </a:pPr>
             <a:r>
-              <a:rPr sz="1700" b="0">
+              <a:rPr sz="1800" b="0">
                 <a:solidFill>
                   <a:srgbClr val="101426"/>
                 </a:solidFill>
@@ -9511,7 +9511,7 @@
               <a:t>473 nm 固定のコストは u = 0.2 で ×1.22、u = 0.3 で ×1.51。</a:t>
             </a:r>
             <a:r>
-              <a:rPr sz="1700" b="1">
+              <a:rPr sz="1800" b="1">
                 <a:solidFill>
                   <a:srgbClr val="101426"/>
                 </a:solidFill>
@@ -9532,7 +9532,7 @@
               </a:spcAft>
             </a:pPr>
             <a:r>
-              <a:rPr sz="1700" b="0">
+              <a:rPr sz="1800" b="0">
                 <a:solidFill>
                   <a:srgbClr val="101426"/>
                 </a:solidFill>
@@ -9540,10 +9540,10 @@
                 <a:ea typeface="Yu Gothic"/>
                 <a:cs typeface="Yu Gothic"/>
               </a:rPr>
-              <a:t>Dai 2022 の線形 PL は既存の高圧実験を u ≲ 0.3 に置く。移動の</a:t>
-            </a:r>
-            <a:r>
-              <a:rPr sz="1700" b="1">
+              <a:t>Dai 2022 の線形 PL は既存実験を u ≲ 0.3 に置く。移動の</a:t>
+            </a:r>
+            <a:r>
+              <a:rPr sz="1800" b="1">
                 <a:solidFill>
                   <a:srgbClr val="101426"/>
                 </a:solidFill>
@@ -9554,7 +9554,7 @@
               <a:t>向き</a:t>
             </a:r>
             <a:r>
-              <a:rPr sz="1700" b="0">
+              <a:rPr sz="1800" b="0">
                 <a:solidFill>
                   <a:srgbClr val="101426"/>
                 </a:solidFill>
@@ -9565,7 +9565,7 @@
               <a:t>は全ドローで一致するが、</a:t>
             </a:r>
             <a:r>
-              <a:rPr sz="1700" b="1">
+              <a:rPr sz="1800" b="1">
                 <a:solidFill>
                   <a:srgbClr val="101426"/>
                 </a:solidFill>
@@ -9576,7 +9576,7 @@
               <a:t>量は校正前のシナリオである</a:t>
             </a:r>
             <a:r>
-              <a:rPr sz="1700" b="0">
+              <a:rPr sz="1800" b="0">
                 <a:solidFill>
                   <a:srgbClr val="101426"/>
                 </a:solidFill>
@@ -9597,7 +9597,7 @@
               </a:spcAft>
             </a:pPr>
             <a:r>
-              <a:rPr sz="1700" b="1">
+              <a:rPr sz="1800" b="1">
                 <a:solidFill>
                   <a:srgbClr val="1C3177"/>
                 </a:solidFill>
@@ -9608,7 +9608,7 @@
               <a:t>次の一手：473 nm 単色でパワー掃引 1 本。</a:t>
             </a:r>
             <a:r>
-              <a:rPr sz="1700" b="0">
+              <a:rPr sz="1800" b="0">
                 <a:solidFill>
                   <a:srgbClr val="101426"/>
                 </a:solidFill>
@@ -9616,7 +9616,7 @@
                 <a:ea typeface="Yu Gothic"/>
                 <a:cs typeface="Yu Gothic"/>
               </a:rPr>
-              <a:t>R(I) の線形離脱点が「低励起」を実パワーに換算する。波長比較より先にやる。</a:t>
+              <a:t>R(I) の線形離脱点が「低励起」を実パワーに換算する。</a:t>
             </a:r>
           </a:p>
         </p:txBody>
@@ -9629,8 +9629,8 @@
         </p:nvSpPr>
         <p:spPr>
           <a:xfrm>
-            <a:off x="502920" y="6327648"/>
-            <a:ext cx="8686800" cy="274320"/>
+            <a:off x="502920" y="6172200"/>
+            <a:ext cx="8686800" cy="566928"/>
           </a:xfrm>
           <a:prstGeom prst="rect">
             <a:avLst/>
@@ -9652,7 +9652,7 @@
               </a:spcAft>
             </a:pPr>
             <a:r>
-              <a:rPr sz="900" b="0">
+              <a:rPr sz="1800" b="0">
                 <a:solidFill>
                   <a:srgbClr val="6E7488"/>
                 </a:solidFill>
@@ -9660,7 +9660,7 @@
                 <a:ea typeface="Yu Gothic"/>
                 <a:cs typeface="Yu Gothic"/>
               </a:rPr>
-              <a:t>u = 1 は λopt における NV⁻ 遷移の半飽和強度。未校正の量は docs/next_step_power_dependence_experiment.md の Stage 1–3 で決める。</a:t>
+              <a:t>u = 1 は λopt における NV⁻ 遷移の半飽和強度。未校正の量は docs/next_step_power_dependence_experiment.md で決める。</a:t>
             </a:r>
           </a:p>
         </p:txBody>
@@ -9729,7 +9729,7 @@
         <p:spPr>
           <a:xfrm>
             <a:off x="822960" y="1188720"/>
-            <a:ext cx="2331720" cy="4309019"/>
+            <a:ext cx="2130552" cy="3931920"/>
           </a:xfrm>
           <a:prstGeom prst="rect">
             <a:avLst/>
@@ -9744,8 +9744,8 @@
         </p:nvSpPr>
         <p:spPr>
           <a:xfrm>
-            <a:off x="502920" y="5532120"/>
-            <a:ext cx="3200400" cy="731520"/>
+            <a:off x="502920" y="5257800"/>
+            <a:ext cx="3200400" cy="566928"/>
           </a:xfrm>
           <a:prstGeom prst="rect">
             <a:avLst/>
@@ -9767,7 +9767,7 @@
               </a:spcAft>
             </a:pPr>
             <a:r>
-              <a:rPr sz="1400" b="0">
+              <a:rPr sz="1800" b="0">
                 <a:solidFill>
                   <a:srgbClr val="6E7488"/>
                 </a:solidFill>
@@ -9790,7 +9790,7 @@
         </p:nvGraphicFramePr>
         <p:xfrm>
           <a:off x="4069080" y="1188720"/>
-          <a:ext cx="3977640" cy="2103120"/>
+          <a:ext cx="4206240" cy="2103120"/>
         </p:xfrm>
         <a:graphic>
           <a:graphicData uri="http://schemas.openxmlformats.org/drawingml/2006/table">
@@ -9799,9 +9799,9 @@
                 <a:tableStyleId>{5C22544A-7EE6-4342-B048-85BDC9FD1C3A}</a:tableStyleId>
               </a:tblPr>
               <a:tblGrid>
-                <a:gridCol w="1508760"/>
-                <a:gridCol w="1234440"/>
-                <a:gridCol w="1234440"/>
+                <a:gridCol w="1460500"/>
+                <a:gridCol w="1308100"/>
+                <a:gridCol w="1435100"/>
               </a:tblGrid>
               <a:tr h="420624">
                 <a:tc>
@@ -9810,7 +9810,7 @@
                     <a:lstStyle/>
                     <a:p>
                       <a:r>
-                        <a:rPr sz="1300" b="1">
+                        <a:rPr sz="1800" b="1">
                           <a:solidFill>
                             <a:srgbClr val="FFFFFF"/>
                           </a:solidFill>
@@ -9834,7 +9834,7 @@
                     <a:lstStyle/>
                     <a:p>
                       <a:r>
-                        <a:rPr sz="1300" b="1">
+                        <a:rPr sz="1800" b="1">
                           <a:solidFill>
                             <a:srgbClr val="FFFFFF"/>
                           </a:solidFill>
@@ -9858,7 +9858,7 @@
                     <a:lstStyle/>
                     <a:p>
                       <a:r>
-                        <a:rPr sz="1300" b="1">
+                        <a:rPr sz="1800" b="1">
                           <a:solidFill>
                             <a:srgbClr val="FFFFFF"/>
                           </a:solidFill>
@@ -9884,7 +9884,7 @@
                     <a:lstStyle/>
                     <a:p>
                       <a:r>
-                        <a:rPr sz="1300" b="0">
+                        <a:rPr sz="1800" b="0">
                           <a:solidFill>
                             <a:srgbClr val="101426"/>
                           </a:solidFill>
@@ -9906,7 +9906,7 @@
                     <a:lstStyle/>
                     <a:p>
                       <a:r>
-                        <a:rPr sz="1300" b="0">
+                        <a:rPr sz="1800" b="0">
                           <a:solidFill>
                             <a:srgbClr val="101426"/>
                           </a:solidFill>
@@ -9928,7 +9928,7 @@
                     <a:lstStyle/>
                     <a:p>
                       <a:r>
-                        <a:rPr sz="1300" b="0">
+                        <a:rPr sz="1800" b="0">
                           <a:solidFill>
                             <a:srgbClr val="101426"/>
                           </a:solidFill>
@@ -9952,7 +9952,7 @@
                     <a:lstStyle/>
                     <a:p>
                       <a:r>
-                        <a:rPr sz="1300" b="0">
+                        <a:rPr sz="1800" b="0">
                           <a:solidFill>
                             <a:srgbClr val="101426"/>
                           </a:solidFill>
@@ -9974,7 +9974,7 @@
                     <a:lstStyle/>
                     <a:p>
                       <a:r>
-                        <a:rPr sz="1300" b="0">
+                        <a:rPr sz="1800" b="0">
                           <a:solidFill>
                             <a:srgbClr val="101426"/>
                           </a:solidFill>
@@ -9996,7 +9996,7 @@
                     <a:lstStyle/>
                     <a:p>
                       <a:r>
-                        <a:rPr sz="1300" b="0">
+                        <a:rPr sz="1800" b="0">
                           <a:solidFill>
                             <a:srgbClr val="101426"/>
                           </a:solidFill>
@@ -10020,7 +10020,7 @@
                     <a:lstStyle/>
                     <a:p>
                       <a:r>
-                        <a:rPr sz="1300" b="0">
+                        <a:rPr sz="1800" b="0">
                           <a:solidFill>
                             <a:srgbClr val="101426"/>
                           </a:solidFill>
@@ -10042,7 +10042,7 @@
                     <a:lstStyle/>
                     <a:p>
                       <a:r>
-                        <a:rPr sz="1300" b="0">
+                        <a:rPr sz="1800" b="0">
                           <a:solidFill>
                             <a:srgbClr val="101426"/>
                           </a:solidFill>
@@ -10064,7 +10064,7 @@
                     <a:lstStyle/>
                     <a:p>
                       <a:r>
-                        <a:rPr sz="1300" b="0">
+                        <a:rPr sz="1800" b="0">
                           <a:solidFill>
                             <a:srgbClr val="101426"/>
                           </a:solidFill>
@@ -10088,7 +10088,7 @@
                     <a:lstStyle/>
                     <a:p>
                       <a:r>
-                        <a:rPr sz="1300" b="1">
+                        <a:rPr sz="1800" b="1">
                           <a:solidFill>
                             <a:srgbClr val="101426"/>
                           </a:solidFill>
@@ -10112,7 +10112,7 @@
                     <a:lstStyle/>
                     <a:p>
                       <a:r>
-                        <a:rPr sz="1300" b="1">
+                        <a:rPr sz="1800" b="1">
                           <a:solidFill>
                             <a:srgbClr val="101426"/>
                           </a:solidFill>
@@ -10136,7 +10136,7 @@
                     <a:lstStyle/>
                     <a:p>
                       <a:r>
-                        <a:rPr sz="1300" b="1">
+                        <a:rPr sz="1800" b="1">
                           <a:solidFill>
                             <a:srgbClr val="101426"/>
                           </a:solidFill>
@@ -10190,7 +10190,7 @@
               </a:spcAft>
             </a:pPr>
             <a:r>
-              <a:rPr sz="1600" b="0">
+              <a:rPr sz="1800" b="0">
                 <a:solidFill>
                   <a:srgbClr val="101426"/>
                 </a:solidFill>
@@ -10201,7 +10201,7 @@
               <a:t>最高の T</a:t>
             </a:r>
             <a:r>
-              <a:rPr sz="1600" b="0" baseline="-25000">
+              <a:rPr sz="1800" b="0" baseline="-25000">
                 <a:solidFill>
                   <a:srgbClr val="101426"/>
                 </a:solidFill>
@@ -10212,7 +10212,7 @@
               <a:t>c</a:t>
             </a:r>
             <a:r>
-              <a:rPr sz="1600" b="1">
+              <a:rPr sz="1800" b="1">
                 <a:solidFill>
                   <a:srgbClr val="101426"/>
                 </a:solidFill>
@@ -10233,7 +10233,7 @@
               </a:spcAft>
             </a:pPr>
             <a:r>
-              <a:rPr sz="1600" b="0">
+              <a:rPr sz="1800" b="0">
                 <a:solidFill>
                   <a:srgbClr val="101426"/>
                 </a:solidFill>
@@ -10277,7 +10277,7 @@
               </a:spcAft>
             </a:pPr>
             <a:r>
-              <a:rPr sz="1600" b="1">
+              <a:rPr sz="1800" b="1">
                 <a:solidFill>
                   <a:srgbClr val="101426"/>
                 </a:solidFill>
@@ -10288,7 +10288,7 @@
               <a:t>試料が小さすぎる。</a:t>
             </a:r>
             <a:r>
-              <a:rPr sz="1600" b="0">
+              <a:rPr sz="1800" b="0">
                 <a:solidFill>
                   <a:srgbClr val="101426"/>
                 </a:solidFill>
@@ -10309,7 +10309,7 @@
               </a:spcAft>
             </a:pPr>
             <a:r>
-              <a:rPr sz="1600" b="1">
+              <a:rPr sz="1800" b="1">
                 <a:solidFill>
                   <a:srgbClr val="101426"/>
                 </a:solidFill>
@@ -10320,7 +10320,7 @@
               <a:t>抵抗の落下だけでは決着しない。</a:t>
             </a:r>
             <a:r>
-              <a:rPr sz="1600" b="0">
+              <a:rPr sz="1800" b="0">
                 <a:solidFill>
                   <a:srgbClr val="101426"/>
                 </a:solidFill>
@@ -10341,7 +10341,7 @@
               </a:spcAft>
             </a:pPr>
             <a:r>
-              <a:rPr sz="1600" b="0">
+              <a:rPr sz="1800" b="0">
                 <a:solidFill>
                   <a:srgbClr val="101426"/>
                 </a:solidFill>
@@ -10352,7 +10352,7 @@
               <a:t>だから決着をつける測定は、</a:t>
             </a:r>
             <a:r>
-              <a:rPr sz="1600" b="1">
+              <a:rPr sz="1800" b="1">
                 <a:solidFill>
                   <a:srgbClr val="101426"/>
                 </a:solidFill>
@@ -10363,7 +10363,7 @@
               <a:t>局所・空間分解された磁気測定</a:t>
             </a:r>
             <a:r>
-              <a:rPr sz="1600" b="0">
+              <a:rPr sz="1800" b="0">
                 <a:solidFill>
                   <a:srgbClr val="101426"/>
                 </a:solidFill>
@@ -10384,8 +10384,8 @@
         </p:nvSpPr>
         <p:spPr>
           <a:xfrm>
-            <a:off x="502920" y="6327648"/>
-            <a:ext cx="8686800" cy="274320"/>
+            <a:off x="502920" y="5897880"/>
+            <a:ext cx="8686800" cy="859536"/>
           </a:xfrm>
           <a:prstGeom prst="rect">
             <a:avLst/>
@@ -10407,7 +10407,7 @@
               </a:spcAft>
             </a:pPr>
             <a:r>
-              <a:rPr sz="900" b="0">
+              <a:rPr sz="1800" b="0">
                 <a:solidFill>
                   <a:srgbClr val="6E7488"/>
                 </a:solidFill>
@@ -10415,7 +10415,7 @@
                 <a:ea typeface="Yu Gothic"/>
                 <a:cs typeface="Yu Gothic"/>
               </a:rPr>
-              <a:t>図: P. Bhattacharyya, PhD thesis, UC Berkeley (2022), Fig. 2.2.  データ: A. P. Drozdov et al., Nature 525, 73 (2015) / 569, 528 (2019);  N. P. Salke et al., Nat. Commun. 10, 4453 (2019);  J. Bi et al., Nat. Commun. 13, 5952 (2022).</a:t>
+              <a:t>図: Bhattacharyya, PhD thesis, UC Berkeley (2022) Fig. 2.2。データ: Drozdov, Nature 525, 73 (2015) / 569, 528 (2019); Salke, Nat. Commun. 10, 4453 (2019); Bi, ibid. 13, 5952 (2022)。</a:t>
             </a:r>
           </a:p>
         </p:txBody>
@@ -10524,7 +10524,7 @@
         <p:spPr>
           <a:xfrm>
             <a:off x="502920" y="3520440"/>
-            <a:ext cx="7406640" cy="548640"/>
+            <a:ext cx="7406640" cy="868680"/>
           </a:xfrm>
           <a:prstGeom prst="rect">
             <a:avLst/>
@@ -10546,7 +10546,7 @@
               </a:spcAft>
             </a:pPr>
             <a:r>
-              <a:rPr sz="1400" b="0">
+              <a:rPr sz="1800" b="0">
                 <a:solidFill>
                   <a:srgbClr val="6E7488"/>
                 </a:solidFill>
@@ -10554,29 +10554,7 @@
                 <a:ea typeface="Yu Gothic"/>
                 <a:cs typeface="Yu Gothic"/>
               </a:rPr>
-              <a:t>先行研究の実測。(左) NV はキュレット表面の 50 nm 下に注入され、試料から µm の距離で同じ圧力を経験する。(中央・右) CeH</a:t>
-            </a:r>
-            <a:r>
-              <a:rPr sz="1400" b="0" baseline="-25000">
-                <a:solidFill>
-                  <a:srgbClr val="6E7488"/>
-                </a:solidFill>
-                <a:latin typeface="Yu Gothic"/>
-                <a:ea typeface="Yu Gothic"/>
-                <a:cs typeface="Yu Gothic"/>
-              </a:rPr>
-              <a:t>9</a:t>
-            </a:r>
-            <a:r>
-              <a:rPr sz="1400" b="0">
-                <a:solidFill>
-                  <a:srgbClr val="6E7488"/>
-                </a:solidFill>
-                <a:latin typeface="Yu Gothic"/>
-                <a:ea typeface="Yu Gothic"/>
-                <a:cs typeface="Yu Gothic"/>
-              </a:rPr>
-              <a:t> 上で磁場比 B/H が 0.67 まで落ちる = 局所の磁束排除。しかも ~10 µm で不均一。</a:t>
+              <a:t>先行研究の実測。(左) NV はキュレット表面の 50 nm 下に注入され、試料から µm の距離で同じ圧力を経験する。(中央・右) CeH₉ 上で B/H が 0.67 まで落ちる = 局所の磁束排除、しかも ~10 µm で不均一。</a:t>
             </a:r>
           </a:p>
         </p:txBody>
@@ -10689,7 +10667,7 @@
               </a:spcAft>
             </a:pPr>
             <a:r>
-              <a:rPr sz="1500" b="0">
+              <a:rPr sz="1800" b="0">
                 <a:solidFill>
                   <a:srgbClr val="101426"/>
                 </a:solidFill>
@@ -10733,7 +10711,7 @@
               </a:spcAft>
             </a:pPr>
             <a:r>
-              <a:rPr sz="1600" b="1">
+              <a:rPr sz="1800" b="1">
                 <a:solidFill>
                   <a:srgbClr val="101426"/>
                 </a:solidFill>
@@ -10744,7 +10722,7 @@
               <a:t>科学的な中身はマップにある。</a:t>
             </a:r>
             <a:r>
-              <a:rPr sz="1600" b="0">
+              <a:rPr sz="1800" b="0">
                 <a:solidFill>
                   <a:srgbClr val="101426"/>
                 </a:solidFill>
@@ -10755,7 +10733,7 @@
               <a:t>遮蔽場のテクスチャ、捕捉磁束の幾何、そしてその T</a:t>
             </a:r>
             <a:r>
-              <a:rPr sz="1600" b="0" baseline="-25000">
+              <a:rPr sz="1800" b="0" baseline="-25000">
                 <a:solidFill>
                   <a:srgbClr val="101426"/>
                 </a:solidFill>
@@ -10766,7 +10744,7 @@
               <a:t>c</a:t>
             </a:r>
             <a:r>
-              <a:rPr sz="1600" b="0">
+              <a:rPr sz="1800" b="0">
                 <a:solidFill>
                   <a:srgbClr val="101426"/>
                 </a:solidFill>
@@ -10787,7 +10765,7 @@
               </a:spcAft>
             </a:pPr>
             <a:r>
-              <a:rPr sz="1600" b="0">
+              <a:rPr sz="1800" b="0">
                 <a:solidFill>
                   <a:srgbClr val="101426"/>
                 </a:solidFill>
@@ -10798,7 +10776,7 @@
               <a:t>1 回のロードに数週間、1 回のアンビル破損で全損する領域では、</a:t>
             </a:r>
             <a:r>
-              <a:rPr sz="1600" b="1">
+              <a:rPr sz="1800" b="1">
                 <a:solidFill>
                   <a:srgbClr val="101426"/>
                 </a:solidFill>
@@ -10809,7 +10787,7 @@
               <a:t>感度は空間分解能・視野・到達できる (P, T) 点数を買う通貨</a:t>
             </a:r>
             <a:r>
-              <a:rPr sz="1600" b="0">
+              <a:rPr sz="1800" b="0">
                 <a:solidFill>
                   <a:srgbClr val="101426"/>
                 </a:solidFill>
@@ -10841,7 +10819,7 @@
               <a:t>×2.5</a:t>
             </a:r>
             <a:r>
-              <a:rPr sz="1500" b="0">
+              <a:rPr sz="1800" b="0">
                 <a:solidFill>
                   <a:srgbClr val="6E7488"/>
                 </a:solidFill>
@@ -10873,7 +10851,7 @@
               <a:t>×6</a:t>
             </a:r>
             <a:r>
-              <a:rPr sz="1500" b="0">
+              <a:rPr sz="1800" b="0">
                 <a:solidFill>
                   <a:srgbClr val="6E7488"/>
                 </a:solidFill>
@@ -10894,8 +10872,8 @@
         </p:nvSpPr>
         <p:spPr>
           <a:xfrm>
-            <a:off x="502920" y="6327648"/>
-            <a:ext cx="8686800" cy="274320"/>
+            <a:off x="502920" y="6172200"/>
+            <a:ext cx="8686800" cy="566928"/>
           </a:xfrm>
           <a:prstGeom prst="rect">
             <a:avLst/>
@@ -10917,7 +10895,7 @@
               </a:spcAft>
             </a:pPr>
             <a:r>
-              <a:rPr sz="900" b="0">
+              <a:rPr sz="1800" b="0">
                 <a:solidFill>
                   <a:srgbClr val="6E7488"/>
                 </a:solidFill>
@@ -10925,7 +10903,7 @@
                 <a:ea typeface="Yu Gothic"/>
                 <a:cs typeface="Yu Gothic"/>
               </a:rPr>
-              <a:t>図: P. Bhattacharyya, PhD thesis, UC Berkeley (2022), Fig. 7.2(a), 7.8(b,c);  同グループの成果は P. Bhattacharyya et al., Nature 627, 73 (2024).  J. F. Barry et al., Rev. Mod. Phys. 92, 015004 (2020).</a:t>
+              <a:t>図: Bhattacharyya, PhD thesis (2022) Fig. 7.2, 7.8; 同グループの成果は Nature 627, 73 (2024)。η の定義は Barry et al., RMP 92, 015004 (2020)。</a:t>
             </a:r>
           </a:p>
         </p:txBody>
@@ -10993,8 +10971,8 @@
         </p:blipFill>
         <p:spPr>
           <a:xfrm>
-            <a:off x="411480" y="1411020"/>
-            <a:ext cx="7040880" cy="3841743"/>
+            <a:off x="411480" y="1325880"/>
+            <a:ext cx="7040880" cy="3931920"/>
           </a:xfrm>
           <a:prstGeom prst="rect">
             <a:avLst/>
@@ -11032,7 +11010,7 @@
               </a:spcAft>
             </a:pPr>
             <a:r>
-              <a:rPr sz="1700" b="0">
+              <a:rPr sz="1800" b="0">
                 <a:solidFill>
                   <a:srgbClr val="101426"/>
                 </a:solidFill>
@@ -11053,7 +11031,7 @@
               </a:spcAft>
             </a:pPr>
             <a:r>
-              <a:rPr sz="1700" b="0">
+              <a:rPr sz="1800" b="0">
                 <a:solidFill>
                   <a:srgbClr val="101426"/>
                 </a:solidFill>
@@ -11074,7 +11052,7 @@
               </a:spcAft>
             </a:pPr>
             <a:r>
-              <a:rPr sz="1700" b="0">
+              <a:rPr sz="1800" b="0">
                 <a:solidFill>
                   <a:srgbClr val="101426"/>
                 </a:solidFill>
@@ -11085,7 +11063,7 @@
               <a:t xml:space="preserve">120 GPa では σ(473) は σ(532) の </a:t>
             </a:r>
             <a:r>
-              <a:rPr sz="1700" b="1">
+              <a:rPr sz="1800" b="1">
                 <a:solidFill>
                   <a:srgbClr val="101426"/>
                 </a:solidFill>
@@ -11096,7 +11074,7 @@
               <a:t>10 倍</a:t>
             </a:r>
             <a:r>
-              <a:rPr sz="1700" b="0">
+              <a:rPr sz="1800" b="0">
                 <a:solidFill>
                   <a:srgbClr val="101426"/>
                 </a:solidFill>
@@ -11117,7 +11095,7 @@
               </a:spcAft>
             </a:pPr>
             <a:r>
-              <a:rPr sz="1700" b="0">
+              <a:rPr sz="1800" b="0">
                 <a:solidFill>
                   <a:srgbClr val="101426"/>
                 </a:solidFill>
@@ -11125,7 +11103,7 @@
                 <a:ea typeface="Yu Gothic"/>
                 <a:cs typeface="Yu Gothic"/>
               </a:rPr>
-              <a:t>η ∝ Δν/(C√R) はコントラストに線形、光子レートに √ で効く。釣り合いの位置は量的問題である。</a:t>
+              <a:t>η ∝ Δν/(C√R) は C に線形、光子レートに √ で効く。釣り合いの位置は量的問題である。</a:t>
             </a:r>
           </a:p>
         </p:txBody>
@@ -11138,8 +11116,8 @@
         </p:nvSpPr>
         <p:spPr>
           <a:xfrm>
-            <a:off x="502920" y="6327648"/>
-            <a:ext cx="8686800" cy="274320"/>
+            <a:off x="502920" y="6172200"/>
+            <a:ext cx="8686800" cy="566928"/>
           </a:xfrm>
           <a:prstGeom prst="rect">
             <a:avLst/>
@@ -11161,7 +11139,7 @@
               </a:spcAft>
             </a:pPr>
             <a:r>
-              <a:rPr sz="900" b="0">
+              <a:rPr sz="1800" b="0">
                 <a:solidFill>
                   <a:srgbClr val="6E7488"/>
                 </a:solidFill>
@@ -11237,8 +11215,8 @@
         </p:blipFill>
         <p:spPr>
           <a:xfrm>
-            <a:off x="411480" y="1330726"/>
-            <a:ext cx="7040880" cy="3765661"/>
+            <a:off x="411480" y="1325880"/>
+            <a:ext cx="7040880" cy="3931920"/>
           </a:xfrm>
           <a:prstGeom prst="rect">
             <a:avLst/>
@@ -11275,7 +11253,7 @@
                     <a:lstStyle/>
                     <a:p>
                       <a:r>
-                        <a:rPr sz="1500" b="1">
+                        <a:rPr sz="1800" b="1">
                           <a:solidFill>
                             <a:srgbClr val="FFFFFF"/>
                           </a:solidFill>
@@ -11299,7 +11277,7 @@
                     <a:lstStyle/>
                     <a:p>
                       <a:r>
-                        <a:rPr sz="1500" b="1">
+                        <a:rPr sz="1800" b="0">
                           <a:solidFill>
                             <a:srgbClr val="FFFFFF"/>
                           </a:solidFill>
@@ -11307,7 +11285,7 @@
                           <a:ea typeface="Yu Gothic"/>
                           <a:cs typeface="Yu Gothic"/>
                         </a:rPr>
-                        <a:t>η/η（最適）</a:t>
+                        <a:t>感度比</a:t>
                       </a:r>
                     </a:p>
                   </a:txBody>
@@ -11323,7 +11301,7 @@
                     <a:lstStyle/>
                     <a:p>
                       <a:r>
-                        <a:rPr sz="1500" b="1">
+                        <a:rPr sz="1800" b="1">
                           <a:solidFill>
                             <a:srgbClr val="FFFFFF"/>
                           </a:solidFill>
@@ -11349,7 +11327,7 @@
                     <a:lstStyle/>
                     <a:p>
                       <a:r>
-                        <a:rPr sz="1500" b="0">
+                        <a:rPr sz="1800" b="0">
                           <a:solidFill>
                             <a:srgbClr val="101426"/>
                           </a:solidFill>
@@ -11371,7 +11349,7 @@
                     <a:lstStyle/>
                     <a:p>
                       <a:r>
-                        <a:rPr sz="1500" b="0">
+                        <a:rPr sz="1800" b="0">
                           <a:solidFill>
                             <a:srgbClr val="101426"/>
                           </a:solidFill>
@@ -11393,7 +11371,7 @@
                     <a:lstStyle/>
                     <a:p>
                       <a:r>
-                        <a:rPr sz="1500" b="0">
+                        <a:rPr sz="1800" b="0">
                           <a:solidFill>
                             <a:srgbClr val="101426"/>
                           </a:solidFill>
@@ -11417,7 +11395,7 @@
                     <a:lstStyle/>
                     <a:p>
                       <a:r>
-                        <a:rPr sz="1500" b="1">
+                        <a:rPr sz="1800" b="1">
                           <a:solidFill>
                             <a:srgbClr val="101426"/>
                           </a:solidFill>
@@ -11441,7 +11419,7 @@
                     <a:lstStyle/>
                     <a:p>
                       <a:r>
-                        <a:rPr sz="1500" b="0">
+                        <a:rPr sz="1800" b="0">
                           <a:solidFill>
                             <a:srgbClr val="101426"/>
                           </a:solidFill>
@@ -11465,7 +11443,7 @@
                     <a:lstStyle/>
                     <a:p>
                       <a:r>
-                        <a:rPr sz="1500" b="0">
+                        <a:rPr sz="1800" b="0">
                           <a:solidFill>
                             <a:srgbClr val="101426"/>
                           </a:solidFill>
@@ -11473,7 +11451,7 @@
                           <a:ea typeface="Yu Gothic"/>
                           <a:cs typeface="Yu Gothic"/>
                         </a:rPr>
-                        <a:t>市販 DPSS — 窓の中</a:t>
+                        <a:t>市販 DPSS</a:t>
                       </a:r>
                     </a:p>
                   </a:txBody>
@@ -11491,7 +11469,7 @@
                     <a:lstStyle/>
                     <a:p>
                       <a:r>
-                        <a:rPr sz="1500" b="0">
+                        <a:rPr sz="1800" b="0">
                           <a:solidFill>
                             <a:srgbClr val="101426"/>
                           </a:solidFill>
@@ -11513,7 +11491,7 @@
                     <a:lstStyle/>
                     <a:p>
                       <a:r>
-                        <a:rPr sz="1500" b="0">
+                        <a:rPr sz="1800" b="0">
                           <a:solidFill>
                             <a:srgbClr val="101426"/>
                           </a:solidFill>
@@ -11535,7 +11513,7 @@
                     <a:lstStyle/>
                     <a:p>
                       <a:r>
-                        <a:rPr sz="1500" b="0">
+                        <a:rPr sz="1800" b="0">
                           <a:solidFill>
                             <a:srgbClr val="101426"/>
                           </a:solidFill>
@@ -11587,7 +11565,7 @@
               </a:spcAft>
             </a:pPr>
             <a:r>
-              <a:rPr sz="1700" b="1">
+              <a:rPr sz="1800" b="1">
                 <a:solidFill>
                   <a:srgbClr val="101426"/>
                 </a:solidFill>
@@ -11595,10 +11573,10 @@
                 <a:ea typeface="Yu Gothic"/>
                 <a:cs typeface="Yu Gothic"/>
               </a:rPr>
-              <a:t>473 nm DPSS は最適の 0.2% 落ち</a:t>
-            </a:r>
-            <a:r>
-              <a:rPr sz="1700" b="0">
+              <a:t>473 nm DPSS は最適の 0.2% 落ち。</a:t>
+            </a:r>
+            <a:r>
+              <a:rPr sz="1800" b="0">
                 <a:solidFill>
                   <a:srgbClr val="101426"/>
                 </a:solidFill>
@@ -11606,7 +11584,7 @@
                 <a:ea typeface="Yu Gothic"/>
                 <a:cs typeface="Yu Gothic"/>
               </a:rPr>
-              <a:t xml:space="preserve"> — 窓の中に市販線がある。457 nm で ×1.11、488 nm で ×1.05。</a:t>
+              <a:t>457 nm ×1.11、488 nm ×1.05。</a:t>
             </a:r>
           </a:p>
           <a:p>
@@ -11619,7 +11597,7 @@
               </a:spcAft>
             </a:pPr>
             <a:r>
-              <a:rPr sz="1700" b="0">
+              <a:rPr sz="1800" b="0">
                 <a:solidFill>
                   <a:srgbClr val="101426"/>
                 </a:solidFill>
@@ -11630,7 +11608,7 @@
               <a:t>λ</a:t>
             </a:r>
             <a:r>
-              <a:rPr sz="1700" b="0" baseline="-25000">
+              <a:rPr sz="1800" b="0" baseline="-25000">
                 <a:solidFill>
                   <a:srgbClr val="101426"/>
                 </a:solidFill>
@@ -11641,7 +11619,7 @@
               <a:t>opt</a:t>
             </a:r>
             <a:r>
-              <a:rPr sz="1700" b="0">
+              <a:rPr sz="1800" b="0">
                 <a:solidFill>
                   <a:srgbClr val="101426"/>
                 </a:solidFill>
@@ -11649,7 +11627,7 @@
                 <a:ea typeface="Yu Gothic"/>
                 <a:cs typeface="Yu Gothic"/>
               </a:rPr>
-              <a:t xml:space="preserve"> は ZPL に追随して 0.4–0.6 nm/GPa で動く。100 GPa では 486 nm。</a:t>
+              <a:t xml:space="preserve"> は ZPL に追随して 0.4–0.6 nm/GPa。100 GPa では 486 nm。</a:t>
             </a:r>
           </a:p>
           <a:p>
@@ -11662,7 +11640,7 @@
               </a:spcAft>
             </a:pPr>
             <a:r>
-              <a:rPr sz="1700" b="0">
+              <a:rPr sz="1800" b="0">
                 <a:solidFill>
                   <a:srgbClr val="101426"/>
                 </a:solidFill>
@@ -11670,7 +11648,7 @@
                 <a:ea typeface="Yu Gothic"/>
                 <a:cs typeface="Yu Gothic"/>
               </a:rPr>
-              <a:t>97–172 GPa を通す実験なら 488 nm と 473 nm の 2 本立てが有利。</a:t>
+              <a:t>97–172 GPa を通すなら 488 nm と 473 nm の 2 本立て。</a:t>
             </a:r>
           </a:p>
         </p:txBody>
@@ -11683,8 +11661,8 @@
         </p:nvSpPr>
         <p:spPr>
           <a:xfrm>
-            <a:off x="502920" y="6327648"/>
-            <a:ext cx="8686800" cy="274320"/>
+            <a:off x="502920" y="6172200"/>
+            <a:ext cx="8686800" cy="566928"/>
           </a:xfrm>
           <a:prstGeom prst="rect">
             <a:avLst/>
@@ -11706,7 +11684,7 @@
               </a:spcAft>
             </a:pPr>
             <a:r>
-              <a:rPr sz="900" b="0">
+              <a:rPr sz="1800" b="0">
                 <a:solidFill>
                   <a:srgbClr val="6E7488"/>
                 </a:solidFill>
@@ -11714,7 +11692,7 @@
                 <a:ea typeface="Yu Gothic"/>
                 <a:cs typeface="Yu Gothic"/>
               </a:rPr>
-              <a:t>帯は入力のモンテカルロ 16–84%。λopt = 475.5 +5.6 / −5.3 nm。単一有効フォノン近似の ±15% を含む。</a:t>
+              <a:t>感度比は最適 η に対する比。帯は入力の MC 16–84%。λopt = 475.5 +5.6 / −5.3 nm（単一有効フォノン近似の ±15% を含む）。</a:t>
             </a:r>
           </a:p>
         </p:txBody>
@@ -11782,8 +11760,8 @@
         </p:blipFill>
         <p:spPr>
           <a:xfrm>
-            <a:off x="411480" y="1476168"/>
-            <a:ext cx="7040880" cy="3169724"/>
+            <a:off x="411480" y="1234440"/>
+            <a:ext cx="7040880" cy="4069080"/>
           </a:xfrm>
           <a:prstGeom prst="rect">
             <a:avLst/>
@@ -11821,7 +11799,7 @@
               </a:spcAft>
             </a:pPr>
             <a:r>
-              <a:rPr sz="1700" b="0">
+              <a:rPr sz="1800" b="0">
                 <a:solidFill>
                   <a:srgbClr val="101426"/>
                 </a:solidFill>
@@ -11832,7 +11810,7 @@
               <a:t>励起状態イオン化と再結合はどちらも σ</a:t>
             </a:r>
             <a:r>
-              <a:rPr sz="1700" b="0" baseline="-25000">
+              <a:rPr sz="1800" b="0" baseline="-25000">
                 <a:solidFill>
                   <a:srgbClr val="101426"/>
                 </a:solidFill>
@@ -11843,7 +11821,7 @@
               <a:t>abs</a:t>
             </a:r>
             <a:r>
-              <a:rPr sz="1700" b="0">
+              <a:rPr sz="1800" b="0">
                 <a:solidFill>
                   <a:srgbClr val="101426"/>
                 </a:solidFill>
@@ -11851,10 +11829,10 @@
                 <a:ea typeface="Yu Gothic"/>
                 <a:cs typeface="Yu Gothic"/>
               </a:rPr>
-              <a:t xml:space="preserve"> に比例するので、定常 NV⁻ 分率 f₋ から相殺する。f₋ は 463–488 nm で 0.582–0.583、</a:t>
-            </a:r>
-            <a:r>
-              <a:rPr sz="1700" b="1">
+              <a:t xml:space="preserve"> に比例するので、定常 NV⁻ 分率 f₋ から相殺する。f₋ は窓の中で </a:t>
+            </a:r>
+            <a:r>
+              <a:rPr sz="1800" b="1">
                 <a:solidFill>
                   <a:srgbClr val="101426"/>
                 </a:solidFill>
@@ -11865,7 +11843,7 @@
               <a:t>0.2% しか動かない</a:t>
             </a:r>
             <a:r>
-              <a:rPr sz="1700" b="0">
+              <a:rPr sz="1800" b="0">
                 <a:solidFill>
                   <a:srgbClr val="101426"/>
                 </a:solidFill>
@@ -11886,7 +11864,7 @@
               </a:spcAft>
             </a:pPr>
             <a:r>
-              <a:rPr sz="1700" b="0">
+              <a:rPr sz="1800" b="0">
                 <a:solidFill>
                   <a:srgbClr val="101426"/>
                 </a:solidFill>
@@ -11897,7 +11875,7 @@
               <a:t xml:space="preserve">校正でフィットする現象論定数は </a:t>
             </a:r>
             <a:r>
-              <a:rPr sz="1700" b="1">
+              <a:rPr sz="1800" b="1">
                 <a:solidFill>
                   <a:srgbClr val="101426"/>
                 </a:solidFill>
@@ -11908,7 +11886,7 @@
               <a:t>1 つも λ</a:t>
             </a:r>
             <a:r>
-              <a:rPr sz="1700" b="1" baseline="-25000">
+              <a:rPr sz="1800" b="1" baseline="-25000">
                 <a:solidFill>
                   <a:srgbClr val="101426"/>
                 </a:solidFill>
@@ -11919,7 +11897,7 @@
               <a:t>opt</a:t>
             </a:r>
             <a:r>
-              <a:rPr sz="1700" b="1">
+              <a:rPr sz="1800" b="1">
                 <a:solidFill>
                   <a:srgbClr val="101426"/>
                 </a:solidFill>
@@ -11930,7 +11908,7 @@
               <a:t xml:space="preserve"> を動かさない</a:t>
             </a:r>
             <a:r>
-              <a:rPr sz="1700" b="0">
+              <a:rPr sz="1800" b="0">
                 <a:solidFill>
                   <a:srgbClr val="101426"/>
                 </a:solidFill>
@@ -11951,7 +11929,7 @@
               </a:spcAft>
             </a:pPr>
             <a:r>
-              <a:rPr sz="1700" b="0">
+              <a:rPr sz="1800" b="0">
                 <a:solidFill>
                   <a:srgbClr val="101426"/>
                 </a:solidFill>
@@ -11962,7 +11940,7 @@
               <a:t>効くのは 3 つだけ — ZPL 位置、電子格子結合、そして</a:t>
             </a:r>
             <a:r>
-              <a:rPr sz="1700" b="1">
+              <a:rPr sz="1800" b="1">
                 <a:solidFill>
                   <a:srgbClr val="101426"/>
                 </a:solidFill>
@@ -11973,7 +11951,7 @@
               <a:t>単一有効フォノン近似そのもの</a:t>
             </a:r>
             <a:r>
-              <a:rPr sz="1700" b="0">
+              <a:rPr sz="1800" b="0">
                 <a:solidFill>
                   <a:srgbClr val="101426"/>
                 </a:solidFill>
@@ -11994,7 +11972,7 @@
               </a:spcAft>
             </a:pPr>
             <a:r>
-              <a:rPr sz="1700" b="1">
+              <a:rPr sz="1800" b="1">
                 <a:solidFill>
                   <a:srgbClr val="1C3177"/>
                 </a:solidFill>
@@ -12015,8 +11993,8 @@
         </p:nvSpPr>
         <p:spPr>
           <a:xfrm>
-            <a:off x="502920" y="6327648"/>
-            <a:ext cx="8686800" cy="274320"/>
+            <a:off x="502920" y="6172200"/>
+            <a:ext cx="8686800" cy="566928"/>
           </a:xfrm>
           <a:prstGeom prst="rect">
             <a:avLst/>
@@ -12038,7 +12016,7 @@
               </a:spcAft>
             </a:pPr>
             <a:r>
-              <a:rPr sz="900" b="0">
+              <a:rPr sz="1800" b="0">
                 <a:solidFill>
                   <a:srgbClr val="6E7488"/>
                 </a:solidFill>
@@ -12046,7 +12024,7 @@
                 <a:ea typeface="Yu Gothic"/>
                 <a:cs typeface="Yu Gothic"/>
               </a:rPr>
-              <a:t>各入力をモンテカルロ範囲の端に振り、他を公称値に固定したときの λopt の変化。等パワー比較では光子束が λ に比例するので、最適は σabs 極大 474.0 nm ではなく λσabs 極大 475.5 nm。</a:t>
+              <a:t>各入力を MC 範囲の端に振ったときの λopt の変化。等パワー比較では光子束 ∝ λ なので、最適は σabs 極大 474.0 nm ではなく λσabs 極大 475.5 nm。</a:t>
             </a:r>
           </a:p>
         </p:txBody>
@@ -12114,8 +12092,8 @@
         </p:blipFill>
         <p:spPr>
           <a:xfrm>
-            <a:off x="411480" y="1382861"/>
-            <a:ext cx="7040880" cy="3800109"/>
+            <a:off x="411480" y="1325880"/>
+            <a:ext cx="7040880" cy="3931920"/>
           </a:xfrm>
           <a:prstGeom prst="rect">
             <a:avLst/>
@@ -12153,7 +12131,7 @@
               </a:spcAft>
             </a:pPr>
             <a:r>
-              <a:rPr sz="1700" b="0">
+              <a:rPr sz="1800" b="0">
                 <a:solidFill>
                   <a:srgbClr val="101426"/>
                 </a:solidFill>
@@ -12161,10 +12139,10 @@
                 <a:ea typeface="Yu Gothic"/>
                 <a:cs typeface="Yu Gothic"/>
               </a:rPr>
-              <a:t xml:space="preserve">較正に使ったのは Dai 2022 の 3 点だけ（定数 2 個）。その上で 0–150 GPa・4 波長の文献値を </a:t>
-            </a:r>
-            <a:r>
-              <a:rPr sz="1700" b="1">
+              <a:t xml:space="preserve">較正は Dai 2022 の 3 点だけ（定数 2 個）。その上で 0–150 GPa・4 波長を </a:t>
+            </a:r>
+            <a:r>
+              <a:rPr sz="1800" b="1">
                 <a:solidFill>
                   <a:srgbClr val="101426"/>
                 </a:solidFill>
@@ -12175,7 +12153,7 @@
               <a:t>26/26 再現</a:t>
             </a:r>
             <a:r>
-              <a:rPr sz="1700" b="0">
+              <a:rPr sz="1800" b="0">
                 <a:solidFill>
                   <a:srgbClr val="101426"/>
                 </a:solidFill>
@@ -12196,7 +12174,7 @@
               </a:spcAft>
             </a:pPr>
             <a:r>
-              <a:rPr sz="1700" b="0">
+              <a:rPr sz="1800" b="0">
                 <a:solidFill>
                   <a:srgbClr val="101426"/>
                 </a:solidFill>
@@ -12204,10 +12182,10 @@
                 <a:ea typeface="Yu Gothic"/>
                 <a:cs typeface="Yu Gothic"/>
               </a:rPr>
-              <a:t>50 GPa で青と緑を比較した既報は、</a:t>
-            </a:r>
-            <a:r>
-              <a:rPr sz="1700" b="1">
+              <a:t>50 GPa の既報は</a:t>
+            </a:r>
+            <a:r>
+              <a:rPr sz="1800" b="1">
                 <a:solidFill>
                   <a:srgbClr val="101426"/>
                 </a:solidFill>
@@ -12215,10 +12193,10 @@
                 <a:ea typeface="Yu Gothic"/>
                 <a:cs typeface="Yu Gothic"/>
               </a:rPr>
-              <a:t>青の明確な優位を見つけなかった</a:t>
-            </a:r>
-            <a:r>
-              <a:rPr sz="1700" b="0">
+              <a:t>青の優位を見つけなかった</a:t>
+            </a:r>
+            <a:r>
+              <a:rPr sz="1800" b="0">
                 <a:solidFill>
                   <a:srgbClr val="101426"/>
                 </a:solidFill>
@@ -12226,7 +12204,7 @@
                 <a:ea typeface="Yu Gothic"/>
                 <a:cs typeface="Yu Gothic"/>
               </a:rPr>
-              <a:t>。モデルはそこで 0.56、つまり緑が有利と答える。見つからなかったことが再現になっている。</a:t>
+              <a:t>。モデルはそこで 0.56、緑が有利と答える。見つからなかったことが再現になっている。</a:t>
             </a:r>
           </a:p>
           <a:p>
@@ -12239,7 +12217,7 @@
               </a:spcAft>
             </a:pPr>
             <a:r>
-              <a:rPr sz="1700" b="0">
+              <a:rPr sz="1800" b="0">
                 <a:solidFill>
                   <a:srgbClr val="101426"/>
                 </a:solidFill>
@@ -12247,7 +12225,7 @@
                 <a:ea typeface="Yu Gothic"/>
                 <a:cs typeface="Yu Gothic"/>
               </a:rPr>
-              <a:t>単一圧力の比較に乗る波長依存の系統誤差は圧力に依らないので、比が 1 を横切る位置を作ることも動かすこともできない。</a:t>
+              <a:t>波長依存の系統誤差は圧力に依らないので、比が 1 を横切る位置を作ることも動かすこともできない。</a:t>
             </a:r>
           </a:p>
           <a:p>
@@ -12260,7 +12238,7 @@
               </a:spcAft>
             </a:pPr>
             <a:r>
-              <a:rPr sz="1700" b="1">
+              <a:rPr sz="1800" b="1">
                 <a:solidFill>
                   <a:srgbClr val="1C3177"/>
                 </a:solidFill>
@@ -12281,8 +12259,8 @@
         </p:nvSpPr>
         <p:spPr>
           <a:xfrm>
-            <a:off x="502920" y="6327648"/>
-            <a:ext cx="8686800" cy="274320"/>
+            <a:off x="502920" y="6172200"/>
+            <a:ext cx="8686800" cy="566928"/>
           </a:xfrm>
           <a:prstGeom prst="rect">
             <a:avLst/>
@@ -12304,7 +12282,7 @@
               </a:spcAft>
             </a:pPr>
             <a:r>
-              <a:rPr sz="900" b="0">
+              <a:rPr sz="1800" b="0">
                 <a:solidFill>
                   <a:srgbClr val="6E7488"/>
                 </a:solidFill>
@@ -12312,7 +12290,7 @@
                 <a:ea typeface="Yu Gothic"/>
                 <a:cs typeface="Yu Gothic"/>
               </a:rPr>
-              <a:t>P. Bhattacharyya, PhD thesis, UC Berkeley (2022), Sec. 6.3;  J.-H. Dai et al., Chin. Phys. Lett. 39, 117601 (2022);  A. Hilberer et al., PRB 107, L220102 (2023).</a:t>
+              <a:t>Bhattacharyya, PhD thesis (2022) Sec. 6.3; Dai et al., CPL 39, 117601 (2022); Hilberer et al., PRB 107, L220102 (2023)。</a:t>
             </a:r>
           </a:p>
         </p:txBody>
@@ -12394,7 +12372,7 @@
                     <a:lstStyle/>
                     <a:p>
                       <a:r>
-                        <a:rPr sz="1400" b="1">
+                        <a:rPr sz="1800" b="1">
                           <a:solidFill>
                             <a:srgbClr val="FFFFFF"/>
                           </a:solidFill>
@@ -12418,7 +12396,7 @@
                     <a:lstStyle/>
                     <a:p>
                       <a:r>
-                        <a:rPr sz="1400" b="1">
+                        <a:rPr sz="1800" b="1">
                           <a:solidFill>
                             <a:srgbClr val="FFFFFF"/>
                           </a:solidFill>
@@ -12442,7 +12420,7 @@
                     <a:lstStyle/>
                     <a:p>
                       <a:r>
-                        <a:rPr sz="1400" b="1">
+                        <a:rPr sz="1800" b="1">
                           <a:solidFill>
                             <a:srgbClr val="FFFFFF"/>
                           </a:solidFill>
@@ -12468,7 +12446,7 @@
                     <a:lstStyle/>
                     <a:p>
                       <a:r>
-                        <a:rPr sz="1400" b="0">
+                        <a:rPr sz="1800" b="0">
                           <a:solidFill>
                             <a:srgbClr val="101426"/>
                           </a:solidFill>
@@ -12490,7 +12468,7 @@
                     <a:lstStyle/>
                     <a:p>
                       <a:r>
-                        <a:rPr sz="1400" b="0">
+                        <a:rPr sz="1800" b="0">
                           <a:solidFill>
                             <a:srgbClr val="101426"/>
                           </a:solidFill>
@@ -12512,7 +12490,7 @@
                     <a:lstStyle/>
                     <a:p>
                       <a:r>
-                        <a:rPr sz="1400" b="0">
+                        <a:rPr sz="1800" b="0">
                           <a:solidFill>
                             <a:srgbClr val="101426"/>
                           </a:solidFill>
@@ -12536,7 +12514,7 @@
                     <a:lstStyle/>
                     <a:p>
                       <a:r>
-                        <a:rPr sz="1400" b="0">
+                        <a:rPr sz="1800" b="0">
                           <a:solidFill>
                             <a:srgbClr val="101426"/>
                           </a:solidFill>
@@ -12558,7 +12536,7 @@
                     <a:lstStyle/>
                     <a:p>
                       <a:r>
-                        <a:rPr sz="1400" b="0">
+                        <a:rPr sz="1800" b="0">
                           <a:solidFill>
                             <a:srgbClr val="101426"/>
                           </a:solidFill>
@@ -12580,7 +12558,7 @@
                     <a:lstStyle/>
                     <a:p>
                       <a:r>
-                        <a:rPr sz="1400" b="0">
+                        <a:rPr sz="1800" b="0">
                           <a:solidFill>
                             <a:srgbClr val="101426"/>
                           </a:solidFill>
@@ -12604,7 +12582,7 @@
                     <a:lstStyle/>
                     <a:p>
                       <a:r>
-                        <a:rPr sz="1400" b="0">
+                        <a:rPr sz="1800" b="0">
                           <a:solidFill>
                             <a:srgbClr val="101426"/>
                           </a:solidFill>
@@ -12626,7 +12604,7 @@
                     <a:lstStyle/>
                     <a:p>
                       <a:r>
-                        <a:rPr sz="1400" b="0">
+                        <a:rPr sz="1800" b="0">
                           <a:solidFill>
                             <a:srgbClr val="101426"/>
                           </a:solidFill>
@@ -12648,7 +12626,7 @@
                     <a:lstStyle/>
                     <a:p>
                       <a:r>
-                        <a:rPr sz="1400" b="0">
+                        <a:rPr sz="1800" b="0">
                           <a:solidFill>
                             <a:srgbClr val="101426"/>
                           </a:solidFill>
@@ -12672,7 +12650,7 @@
                     <a:lstStyle/>
                     <a:p>
                       <a:r>
-                        <a:rPr sz="1400" b="0">
+                        <a:rPr sz="1800" b="0">
                           <a:solidFill>
                             <a:srgbClr val="101426"/>
                           </a:solidFill>
@@ -12694,7 +12672,7 @@
                     <a:lstStyle/>
                     <a:p>
                       <a:r>
-                        <a:rPr sz="1400" b="0">
+                        <a:rPr sz="1800" b="0">
                           <a:solidFill>
                             <a:srgbClr val="101426"/>
                           </a:solidFill>
@@ -12716,7 +12694,7 @@
                     <a:lstStyle/>
                     <a:p>
                       <a:r>
-                        <a:rPr sz="1400" b="0">
+                        <a:rPr sz="1800" b="0">
                           <a:solidFill>
                             <a:srgbClr val="101426"/>
                           </a:solidFill>
@@ -12768,7 +12746,7 @@
               </a:spcAft>
             </a:pPr>
             <a:r>
-              <a:rPr sz="1600" b="0">
+              <a:rPr sz="1800" b="0">
                 <a:solidFill>
                   <a:srgbClr val="101426"/>
                 </a:solidFill>
@@ -12776,7 +12754,7 @@
                 <a:ea typeface="Yu Gothic"/>
                 <a:cs typeface="Yu Gothic"/>
               </a:rPr>
-              <a:t>検出帯も ZPL とともに青へ動く。常圧で選んだパスバンドは 120 GPa で発光の 26% しか拾わない。青励起にして初めて検出カットオンも動かせ、×1.6 が上乗せされる — 合計 ×4。</a:t>
+              <a:t>検出帯も ZPL とともに動く。常圧のパスバンドは 120 GPa で発光の 26% しか拾わない。青励起にして初めてカットオンも動かせ、×1.6 が上乗せされる — 合計 ×4。</a:t>
             </a:r>
           </a:p>
           <a:p>
@@ -12789,7 +12767,7 @@
               </a:spcAft>
             </a:pPr>
             <a:r>
-              <a:rPr sz="1600" b="1">
+              <a:rPr sz="1800" b="1">
                 <a:solidFill>
                   <a:srgbClr val="1C3177"/>
                 </a:solidFill>

--- a/slides/odmr_473nm_talk.pptx
+++ b/slides/odmr_473nm_talk.pptx
@@ -9440,7 +9440,7 @@
         </p:blipFill>
         <p:spPr>
           <a:xfrm>
-            <a:off x="411480" y="1325880"/>
+            <a:off x="411480" y="1298448"/>
             <a:ext cx="7040880" cy="3931920"/>
           </a:xfrm>
           <a:prstGeom prst="rect">
@@ -9456,8 +9456,8 @@
         </p:nvSpPr>
         <p:spPr>
           <a:xfrm>
-            <a:off x="7726679" y="1417320"/>
-            <a:ext cx="3977639" cy="4206240"/>
+            <a:off x="7726679" y="1371600"/>
+            <a:ext cx="3977639" cy="3840480"/>
           </a:xfrm>
           <a:prstGeom prst="rect">
             <a:avLst/>
@@ -9487,7 +9487,51 @@
                 <a:ea typeface="Yu Gothic"/>
                 <a:cs typeface="Yu Gothic"/>
               </a:rPr>
-              <a:t>稜線は 475.5 nm (u→0) → 465 nm (u = 0.1) → 447 nm (u = 0.3)。405 nm のイオン化端で止まる。</a:t>
+              <a:t>移動の</a:t>
+            </a:r>
+            <a:r>
+              <a:rPr sz="1800" b="1">
+                <a:solidFill>
+                  <a:srgbClr val="101426"/>
+                </a:solidFill>
+                <a:latin typeface="Yu Gothic"/>
+                <a:ea typeface="Yu Gothic"/>
+                <a:cs typeface="Yu Gothic"/>
+              </a:rPr>
+              <a:t>向き</a:t>
+            </a:r>
+            <a:r>
+              <a:rPr sz="1800" b="0">
+                <a:solidFill>
+                  <a:srgbClr val="101426"/>
+                </a:solidFill>
+                <a:latin typeface="Yu Gothic"/>
+                <a:ea typeface="Yu Gothic"/>
+                <a:cs typeface="Yu Gothic"/>
+              </a:rPr>
+              <a:t>は 250 ドロー全部で一致する。しかし</a:t>
+            </a:r>
+            <a:r>
+              <a:rPr sz="1800" b="1">
+                <a:solidFill>
+                  <a:srgbClr val="101426"/>
+                </a:solidFill>
+                <a:latin typeface="Yu Gothic"/>
+                <a:ea typeface="Yu Gothic"/>
+                <a:cs typeface="Yu Gothic"/>
+              </a:rPr>
+              <a:t>量は校正前のシナリオであって結果ではない</a:t>
+            </a:r>
+            <a:r>
+              <a:rPr sz="1800" b="0">
+                <a:solidFill>
+                  <a:srgbClr val="101426"/>
+                </a:solidFill>
+                <a:latin typeface="Yu Gothic"/>
+                <a:ea typeface="Yu Gothic"/>
+                <a:cs typeface="Yu Gothic"/>
+              </a:rPr>
+              <a:t>。</a:t>
             </a:r>
           </a:p>
           <a:p>
@@ -9500,103 +9544,6 @@
               </a:spcAft>
             </a:pPr>
             <a:r>
-              <a:rPr sz="1800" b="0">
-                <a:solidFill>
-                  <a:srgbClr val="101426"/>
-                </a:solidFill>
-                <a:latin typeface="Yu Gothic"/>
-                <a:ea typeface="Yu Gothic"/>
-                <a:cs typeface="Yu Gothic"/>
-              </a:rPr>
-              <a:t>473 nm 固定のコストは u = 0.2 で ×1.22、u = 0.3 で ×1.51。</a:t>
-            </a:r>
-            <a:r>
-              <a:rPr sz="1800" b="1">
-                <a:solidFill>
-                  <a:srgbClr val="101426"/>
-                </a:solidFill>
-                <a:latin typeface="Yu Gothic"/>
-                <a:ea typeface="Yu Gothic"/>
-                <a:cs typeface="Yu Gothic"/>
-              </a:rPr>
-              <a:t>緑に対する ×2.5 の大半を食う。</a:t>
-            </a:r>
-          </a:p>
-          <a:p>
-            <a:pPr>
-              <a:lnSpc>
-                <a:spcPct val="125000"/>
-              </a:lnSpc>
-              <a:spcAft>
-                <a:spcPts val="1000"/>
-              </a:spcAft>
-            </a:pPr>
-            <a:r>
-              <a:rPr sz="1800" b="0">
-                <a:solidFill>
-                  <a:srgbClr val="101426"/>
-                </a:solidFill>
-                <a:latin typeface="Yu Gothic"/>
-                <a:ea typeface="Yu Gothic"/>
-                <a:cs typeface="Yu Gothic"/>
-              </a:rPr>
-              <a:t>Dai 2022 の線形 PL は既存実験を u ≲ 0.3 に置く。移動の</a:t>
-            </a:r>
-            <a:r>
-              <a:rPr sz="1800" b="1">
-                <a:solidFill>
-                  <a:srgbClr val="101426"/>
-                </a:solidFill>
-                <a:latin typeface="Yu Gothic"/>
-                <a:ea typeface="Yu Gothic"/>
-                <a:cs typeface="Yu Gothic"/>
-              </a:rPr>
-              <a:t>向き</a:t>
-            </a:r>
-            <a:r>
-              <a:rPr sz="1800" b="0">
-                <a:solidFill>
-                  <a:srgbClr val="101426"/>
-                </a:solidFill>
-                <a:latin typeface="Yu Gothic"/>
-                <a:ea typeface="Yu Gothic"/>
-                <a:cs typeface="Yu Gothic"/>
-              </a:rPr>
-              <a:t>は全ドローで一致するが、</a:t>
-            </a:r>
-            <a:r>
-              <a:rPr sz="1800" b="1">
-                <a:solidFill>
-                  <a:srgbClr val="101426"/>
-                </a:solidFill>
-                <a:latin typeface="Yu Gothic"/>
-                <a:ea typeface="Yu Gothic"/>
-                <a:cs typeface="Yu Gothic"/>
-              </a:rPr>
-              <a:t>量は校正前のシナリオである</a:t>
-            </a:r>
-            <a:r>
-              <a:rPr sz="1800" b="0">
-                <a:solidFill>
-                  <a:srgbClr val="101426"/>
-                </a:solidFill>
-                <a:latin typeface="Yu Gothic"/>
-                <a:ea typeface="Yu Gothic"/>
-                <a:cs typeface="Yu Gothic"/>
-              </a:rPr>
-              <a:t>。</a:t>
-            </a:r>
-          </a:p>
-          <a:p>
-            <a:pPr>
-              <a:lnSpc>
-                <a:spcPct val="125000"/>
-              </a:lnSpc>
-              <a:spcAft>
-                <a:spcPts val="1000"/>
-              </a:spcAft>
-            </a:pPr>
-            <a:r>
               <a:rPr sz="1800" b="1">
                 <a:solidFill>
                   <a:srgbClr val="1C3177"/>
@@ -9616,7 +9563,7 @@
                 <a:ea typeface="Yu Gothic"/>
                 <a:cs typeface="Yu Gothic"/>
               </a:rPr>
-              <a:t>R(I) の線形離脱点が「低励起」を実パワーに換算する。</a:t>
+              <a:t>R(I) の線形離脱点が「低励起」を実パワーに換算する。2 ビーム掃引よりずっと安く、波長比較より先にやる。</a:t>
             </a:r>
           </a:p>
         </p:txBody>
@@ -9629,8 +9576,8 @@
         </p:nvSpPr>
         <p:spPr>
           <a:xfrm>
-            <a:off x="502920" y="6172200"/>
-            <a:ext cx="8686800" cy="566928"/>
+            <a:off x="502920" y="6327648"/>
+            <a:ext cx="11192256" cy="411480"/>
           </a:xfrm>
           <a:prstGeom prst="rect">
             <a:avLst/>
@@ -9652,7 +9599,7 @@
               </a:spcAft>
             </a:pPr>
             <a:r>
-              <a:rPr sz="1800" b="0">
+              <a:rPr sz="1200" b="0">
                 <a:solidFill>
                   <a:srgbClr val="6E7488"/>
                 </a:solidFill>
@@ -9660,7 +9607,62 @@
                 <a:ea typeface="Yu Gothic"/>
                 <a:cs typeface="Yu Gothic"/>
               </a:rPr>
-              <a:t>u = 1 は λopt における NV⁻ 遷移の半飽和強度。未校正の量は docs/next_step_power_dependence_experiment.md で決める。</a:t>
+              <a:t>未校正の量は docs/next_step_power_dependence_experiment.md の Stage 1–3 で決める。</a:t>
+            </a:r>
+          </a:p>
+        </p:txBody>
+      </p:sp>
+      <p:sp>
+        <p:nvSpPr>
+          <p:cNvPr id="90" name="BottomNote"/>
+          <p:cNvSpPr txBox="1"/>
+          <p:nvPr/>
+        </p:nvSpPr>
+        <p:spPr>
+          <a:xfrm>
+            <a:off x="502920" y="5358384"/>
+            <a:ext cx="11192256" cy="868680"/>
+          </a:xfrm>
+          <a:prstGeom prst="rect">
+            <a:avLst/>
+          </a:prstGeom>
+          <a:noFill/>
+        </p:spPr>
+        <p:txBody>
+          <a:bodyPr wrap="square" lIns="0" rIns="0" tIns="0" bIns="0">
+            <a:spAutoFit/>
+          </a:bodyPr>
+          <a:lstStyle/>
+          <a:p>
+            <a:pPr>
+              <a:lnSpc>
+                <a:spcPct val="125000"/>
+              </a:lnSpc>
+              <a:spcAft>
+                <a:spcPts val="0"/>
+              </a:spcAft>
+            </a:pPr>
+            <a:r>
+              <a:rPr sz="1800" b="0">
+                <a:solidFill>
+                  <a:srgbClr val="101426"/>
+                </a:solidFill>
+                <a:latin typeface="Yu Gothic"/>
+                <a:ea typeface="Yu Gothic"/>
+                <a:cs typeface="Yu Gothic"/>
+              </a:rPr>
+              <a:t>図: u = 1 は λopt での NV⁻ 遷移の半飽和強度。稜線は 475.5 nm (u→0) から 405 nm のイオン化端まで走る。Dai 2022 の線形 PL が置く u ≲ 0.3 では 473 nm 固定のコストが ×1.51 に達し、</a:t>
+            </a:r>
+            <a:r>
+              <a:rPr sz="1800" b="1">
+                <a:solidFill>
+                  <a:srgbClr val="101426"/>
+                </a:solidFill>
+                <a:latin typeface="Yu Gothic"/>
+                <a:ea typeface="Yu Gothic"/>
+                <a:cs typeface="Yu Gothic"/>
+              </a:rPr>
+              <a:t>緑に対する ×2.5 の大半を食う。</a:t>
             </a:r>
           </a:p>
         </p:txBody>
@@ -9729,7 +9731,7 @@
         <p:spPr>
           <a:xfrm>
             <a:off x="822960" y="1188720"/>
-            <a:ext cx="2130552" cy="3931920"/>
+            <a:ext cx="2331720" cy="4309019"/>
           </a:xfrm>
           <a:prstGeom prst="rect">
             <a:avLst/>
@@ -9744,7 +9746,7 @@
         </p:nvSpPr>
         <p:spPr>
           <a:xfrm>
-            <a:off x="502920" y="5257800"/>
+            <a:off x="502920" y="5532120"/>
             <a:ext cx="3200400" cy="566928"/>
           </a:xfrm>
           <a:prstGeom prst="rect">
@@ -10384,8 +10386,8 @@
         </p:nvSpPr>
         <p:spPr>
           <a:xfrm>
-            <a:off x="502920" y="5897880"/>
-            <a:ext cx="8686800" cy="859536"/>
+            <a:off x="502920" y="6327648"/>
+            <a:ext cx="11192256" cy="411480"/>
           </a:xfrm>
           <a:prstGeom prst="rect">
             <a:avLst/>
@@ -10407,7 +10409,7 @@
               </a:spcAft>
             </a:pPr>
             <a:r>
-              <a:rPr sz="1800" b="0">
+              <a:rPr sz="1200" b="0">
                 <a:solidFill>
                   <a:srgbClr val="6E7488"/>
                 </a:solidFill>
@@ -10872,8 +10874,8 @@
         </p:nvSpPr>
         <p:spPr>
           <a:xfrm>
-            <a:off x="502920" y="6172200"/>
-            <a:ext cx="8686800" cy="566928"/>
+            <a:off x="502920" y="6327648"/>
+            <a:ext cx="11192256" cy="411480"/>
           </a:xfrm>
           <a:prstGeom prst="rect">
             <a:avLst/>
@@ -10895,7 +10897,7 @@
               </a:spcAft>
             </a:pPr>
             <a:r>
-              <a:rPr sz="1800" b="0">
+              <a:rPr sz="1200" b="0">
                 <a:solidFill>
                   <a:srgbClr val="6E7488"/>
                 </a:solidFill>
@@ -10971,7 +10973,7 @@
         </p:blipFill>
         <p:spPr>
           <a:xfrm>
-            <a:off x="411480" y="1325880"/>
+            <a:off x="411480" y="1298448"/>
             <a:ext cx="7040880" cy="3931920"/>
           </a:xfrm>
           <a:prstGeom prst="rect">
@@ -10987,8 +10989,8 @@
         </p:nvSpPr>
         <p:spPr>
           <a:xfrm>
-            <a:off x="7726679" y="1417320"/>
-            <a:ext cx="3977639" cy="4206240"/>
+            <a:off x="7726679" y="1371600"/>
+            <a:ext cx="3977639" cy="3840480"/>
           </a:xfrm>
           <a:prstGeom prst="rect">
             <a:avLst/>
@@ -11018,7 +11020,29 @@
                 <a:ea typeface="Yu Gothic"/>
                 <a:cs typeface="Yu Gothic"/>
               </a:rPr>
-              <a:t>ZPL が +0.40 eV 青方偏移し、Huang–Rhys 因子が 3.08 → 4.61 に増える。吸収極大は 586 → 474 nm。</a:t>
+              <a:t xml:space="preserve">ZPL が </a:t>
+            </a:r>
+            <a:r>
+              <a:rPr sz="1800" b="1">
+                <a:solidFill>
+                  <a:srgbClr val="101426"/>
+                </a:solidFill>
+                <a:latin typeface="Yu Gothic"/>
+                <a:ea typeface="Yu Gothic"/>
+                <a:cs typeface="Yu Gothic"/>
+              </a:rPr>
+              <a:t>+0.40 eV</a:t>
+            </a:r>
+            <a:r>
+              <a:rPr sz="1800" b="0">
+                <a:solidFill>
+                  <a:srgbClr val="101426"/>
+                </a:solidFill>
+                <a:latin typeface="Yu Gothic"/>
+                <a:ea typeface="Yu Gothic"/>
+                <a:cs typeface="Yu Gothic"/>
+              </a:rPr>
+              <a:t xml:space="preserve"> 青方偏移し、Huang–Rhys 因子が 3.08 → 4.61 に増える。</a:t>
             </a:r>
           </a:p>
           <a:p>
@@ -11039,7 +11063,29 @@
                 <a:ea typeface="Yu Gothic"/>
                 <a:cs typeface="Yu Gothic"/>
               </a:rPr>
-              <a:t>同時に IP(³A₂) が 2.68 → 3.06 eV に上がる。3.06 eV = 405 nm。これより青は NV⁻ を直接 NV⁰ に変える。</a:t>
+              <a:t xml:space="preserve">IP(³A₂) は 2.68 → </a:t>
+            </a:r>
+            <a:r>
+              <a:rPr sz="1800" b="1">
+                <a:solidFill>
+                  <a:srgbClr val="101426"/>
+                </a:solidFill>
+                <a:latin typeface="Yu Gothic"/>
+                <a:ea typeface="Yu Gothic"/>
+                <a:cs typeface="Yu Gothic"/>
+              </a:rPr>
+              <a:t>3.06 eV = 405 nm</a:t>
+            </a:r>
+            <a:r>
+              <a:rPr sz="1800" b="0">
+                <a:solidFill>
+                  <a:srgbClr val="101426"/>
+                </a:solidFill>
+                <a:latin typeface="Yu Gothic"/>
+                <a:ea typeface="Yu Gothic"/>
+                <a:cs typeface="Yu Gothic"/>
+              </a:rPr>
+              <a:t>。これより青は NV⁻ を直接 NV⁰ に変える。</a:t>
             </a:r>
           </a:p>
           <a:p>
@@ -11060,49 +11106,6 @@
                 <a:ea typeface="Yu Gothic"/>
                 <a:cs typeface="Yu Gothic"/>
               </a:rPr>
-              <a:t xml:space="preserve">120 GPa では σ(473) は σ(532) の </a:t>
-            </a:r>
-            <a:r>
-              <a:rPr sz="1800" b="1">
-                <a:solidFill>
-                  <a:srgbClr val="101426"/>
-                </a:solidFill>
-                <a:latin typeface="Yu Gothic"/>
-                <a:ea typeface="Yu Gothic"/>
-                <a:cs typeface="Yu Gothic"/>
-              </a:rPr>
-              <a:t>10 倍</a:t>
-            </a:r>
-            <a:r>
-              <a:rPr sz="1800" b="0">
-                <a:solidFill>
-                  <a:srgbClr val="101426"/>
-                </a:solidFill>
-                <a:latin typeface="Yu Gothic"/>
-                <a:ea typeface="Yu Gothic"/>
-                <a:cs typeface="Yu Gothic"/>
-              </a:rPr>
-              <a:t>。</a:t>
-            </a:r>
-          </a:p>
-          <a:p>
-            <a:pPr>
-              <a:lnSpc>
-                <a:spcPct val="125000"/>
-              </a:lnSpc>
-              <a:spcAft>
-                <a:spcPts val="1000"/>
-              </a:spcAft>
-            </a:pPr>
-            <a:r>
-              <a:rPr sz="1800" b="0">
-                <a:solidFill>
-                  <a:srgbClr val="101426"/>
-                </a:solidFill>
-                <a:latin typeface="Yu Gothic"/>
-                <a:ea typeface="Yu Gothic"/>
-                <a:cs typeface="Yu Gothic"/>
-              </a:rPr>
               <a:t>η ∝ Δν/(C√R) は C に線形、光子レートに √ で効く。釣り合いの位置は量的問題である。</a:t>
             </a:r>
           </a:p>
@@ -11116,8 +11119,8 @@
         </p:nvSpPr>
         <p:spPr>
           <a:xfrm>
-            <a:off x="502920" y="6172200"/>
-            <a:ext cx="8686800" cy="566928"/>
+            <a:off x="502920" y="6327648"/>
+            <a:ext cx="11192256" cy="411480"/>
           </a:xfrm>
           <a:prstGeom prst="rect">
             <a:avLst/>
@@ -11139,7 +11142,7 @@
               </a:spcAft>
             </a:pPr>
             <a:r>
-              <a:rPr sz="1800" b="0">
+              <a:rPr sz="1200" b="0">
                 <a:solidFill>
                   <a:srgbClr val="6E7488"/>
                 </a:solidFill>
@@ -11147,7 +11150,73 @@
                 <a:ea typeface="Yu Gothic"/>
                 <a:cs typeface="Yu Gothic"/>
               </a:rPr>
-              <a:t>K. O. Ho, C. Dailledouze et al., arXiv:2606.02399 (2026) — DFT + DAC。灰色の常圧曲線は単一有効フォノン近似（50 GPa 以下では粗い）。</a:t>
+              <a:t>K. O. Ho, C. Dailledouze et al., arXiv:2606.02399 (2026) — DFT + DAC。</a:t>
+            </a:r>
+          </a:p>
+        </p:txBody>
+      </p:sp>
+      <p:sp>
+        <p:nvSpPr>
+          <p:cNvPr id="90" name="BottomNote"/>
+          <p:cNvSpPr txBox="1"/>
+          <p:nvPr/>
+        </p:nvSpPr>
+        <p:spPr>
+          <a:xfrm>
+            <a:off x="502920" y="5358384"/>
+            <a:ext cx="11192256" cy="868680"/>
+          </a:xfrm>
+          <a:prstGeom prst="rect">
+            <a:avLst/>
+          </a:prstGeom>
+          <a:noFill/>
+        </p:spPr>
+        <p:txBody>
+          <a:bodyPr wrap="square" lIns="0" rIns="0" tIns="0" bIns="0">
+            <a:spAutoFit/>
+          </a:bodyPr>
+          <a:lstStyle/>
+          <a:p>
+            <a:pPr>
+              <a:lnSpc>
+                <a:spcPct val="125000"/>
+              </a:lnSpc>
+              <a:spcAft>
+                <a:spcPts val="0"/>
+              </a:spcAft>
+            </a:pPr>
+            <a:r>
+              <a:rPr sz="1800" b="0">
+                <a:solidFill>
+                  <a:srgbClr val="101426"/>
+                </a:solidFill>
+                <a:latin typeface="Yu Gothic"/>
+                <a:ea typeface="Yu Gothic"/>
+                <a:cs typeface="Yu Gothic"/>
+              </a:rPr>
+              <a:t xml:space="preserve">図: 常圧（灰）と 120 GPa（紺）の吸収帯。吸収極大とイオン化端が同時に青へ動き、120 GPa では σ(473) が σ(532) の </a:t>
+            </a:r>
+            <a:r>
+              <a:rPr sz="1800" b="1">
+                <a:solidFill>
+                  <a:srgbClr val="101426"/>
+                </a:solidFill>
+                <a:latin typeface="Yu Gothic"/>
+                <a:ea typeface="Yu Gothic"/>
+                <a:cs typeface="Yu Gothic"/>
+              </a:rPr>
+              <a:t>10 倍</a:t>
+            </a:r>
+            <a:r>
+              <a:rPr sz="1800" b="0">
+                <a:solidFill>
+                  <a:srgbClr val="101426"/>
+                </a:solidFill>
+                <a:latin typeface="Yu Gothic"/>
+                <a:ea typeface="Yu Gothic"/>
+                <a:cs typeface="Yu Gothic"/>
+              </a:rPr>
+              <a:t>になる。常圧曲線は単一有効フォノン近似で、50 GPa 以下では粗い。</a:t>
             </a:r>
           </a:p>
         </p:txBody>
@@ -11215,7 +11284,7 @@
         </p:blipFill>
         <p:spPr>
           <a:xfrm>
-            <a:off x="411480" y="1325880"/>
+            <a:off x="411480" y="1298448"/>
             <a:ext cx="7040880" cy="3931920"/>
           </a:xfrm>
           <a:prstGeom prst="rect">
@@ -11232,7 +11301,7 @@
           <p:nvPr/>
         </p:nvGraphicFramePr>
         <p:xfrm>
-          <a:off x="7726679" y="1325880"/>
+          <a:off x="7726679" y="1298448"/>
           <a:ext cx="3977640" cy="1737360"/>
         </p:xfrm>
         <a:graphic>
@@ -11542,8 +11611,8 @@
         </p:nvSpPr>
         <p:spPr>
           <a:xfrm>
-            <a:off x="7726679" y="3429000"/>
-            <a:ext cx="3977639" cy="2194560"/>
+            <a:off x="7726679" y="3246120"/>
+            <a:ext cx="3977639" cy="1965960"/>
           </a:xfrm>
           <a:prstGeom prst="rect">
             <a:avLst/>
@@ -11565,7 +11634,7 @@
               </a:spcAft>
             </a:pPr>
             <a:r>
-              <a:rPr sz="1800" b="1">
+              <a:rPr sz="1800" b="0">
                 <a:solidFill>
                   <a:srgbClr val="101426"/>
                 </a:solidFill>
@@ -11573,18 +11642,7 @@
                 <a:ea typeface="Yu Gothic"/>
                 <a:cs typeface="Yu Gothic"/>
               </a:rPr>
-              <a:t>473 nm DPSS は最適の 0.2% 落ち。</a:t>
-            </a:r>
-            <a:r>
-              <a:rPr sz="1800" b="0">
-                <a:solidFill>
-                  <a:srgbClr val="101426"/>
-                </a:solidFill>
-                <a:latin typeface="Yu Gothic"/>
-                <a:ea typeface="Yu Gothic"/>
-                <a:cs typeface="Yu Gothic"/>
-              </a:rPr>
-              <a:t>457 nm ×1.11、488 nm ×1.05。</a:t>
+              <a:t>457 nm ×1.11、488 nm ×1.05 — 窓の中には市販線が 3 本ある。</a:t>
             </a:r>
           </a:p>
           <a:p>
@@ -11661,8 +11719,8 @@
         </p:nvSpPr>
         <p:spPr>
           <a:xfrm>
-            <a:off x="502920" y="6172200"/>
-            <a:ext cx="8686800" cy="566928"/>
+            <a:off x="502920" y="6327648"/>
+            <a:ext cx="11192256" cy="411480"/>
           </a:xfrm>
           <a:prstGeom prst="rect">
             <a:avLst/>
@@ -11684,7 +11742,7 @@
               </a:spcAft>
             </a:pPr>
             <a:r>
-              <a:rPr sz="1800" b="0">
+              <a:rPr sz="1200" b="0">
                 <a:solidFill>
                   <a:srgbClr val="6E7488"/>
                 </a:solidFill>
@@ -11692,7 +11750,62 @@
                 <a:ea typeface="Yu Gothic"/>
                 <a:cs typeface="Yu Gothic"/>
               </a:rPr>
-              <a:t>感度比は最適 η に対する比。帯は入力の MC 16–84%。λopt = 475.5 +5.6 / −5.3 nm（単一有効フォノン近似の ±15% を含む）。</a:t>
+              <a:t>表の感度比は最適 η に対する比。MC 帯は単一有効フォノン近似の ±15% を含む。</a:t>
+            </a:r>
+          </a:p>
+        </p:txBody>
+      </p:sp>
+      <p:sp>
+        <p:nvSpPr>
+          <p:cNvPr id="90" name="BottomNote"/>
+          <p:cNvSpPr txBox="1"/>
+          <p:nvPr/>
+        </p:nvSpPr>
+        <p:spPr>
+          <a:xfrm>
+            <a:off x="502920" y="5358384"/>
+            <a:ext cx="11192256" cy="868680"/>
+          </a:xfrm>
+          <a:prstGeom prst="rect">
+            <a:avLst/>
+          </a:prstGeom>
+          <a:noFill/>
+        </p:spPr>
+        <p:txBody>
+          <a:bodyPr wrap="square" lIns="0" rIns="0" tIns="0" bIns="0">
+            <a:spAutoFit/>
+          </a:bodyPr>
+          <a:lstStyle/>
+          <a:p>
+            <a:pPr>
+              <a:lnSpc>
+                <a:spcPct val="125000"/>
+              </a:lnSpc>
+              <a:spcAft>
+                <a:spcPts val="0"/>
+              </a:spcAft>
+            </a:pPr>
+            <a:r>
+              <a:rPr sz="1800" b="0">
+                <a:solidFill>
+                  <a:srgbClr val="101426"/>
+                </a:solidFill>
+                <a:latin typeface="Yu Gothic"/>
+                <a:ea typeface="Yu Gothic"/>
+                <a:cs typeface="Yu Gothic"/>
+              </a:rPr>
+              <a:t>図: 帯は入力の MC 16–84%。λopt = 475.5 +5.6 / −5.3 nm は 5% 許容窓 463–488 nm の半分を占める。</a:t>
+            </a:r>
+            <a:r>
+              <a:rPr sz="1800" b="1">
+                <a:solidFill>
+                  <a:srgbClr val="101426"/>
+                </a:solidFill>
+                <a:latin typeface="Yu Gothic"/>
+                <a:ea typeface="Yu Gothic"/>
+                <a:cs typeface="Yu Gothic"/>
+              </a:rPr>
+              <a:t>市販の 473 nm DPSS はその窓の中で、最適の 0.2% 落ちにすぎない。</a:t>
             </a:r>
           </a:p>
         </p:txBody>
@@ -11760,7 +11873,7 @@
         </p:blipFill>
         <p:spPr>
           <a:xfrm>
-            <a:off x="411480" y="1234440"/>
+            <a:off x="411480" y="1225296"/>
             <a:ext cx="7040880" cy="4069080"/>
           </a:xfrm>
           <a:prstGeom prst="rect">
@@ -11776,8 +11889,8 @@
         </p:nvSpPr>
         <p:spPr>
           <a:xfrm>
-            <a:off x="7726679" y="1417320"/>
-            <a:ext cx="3977639" cy="4206240"/>
+            <a:off x="7726679" y="1371600"/>
+            <a:ext cx="3977639" cy="3840480"/>
           </a:xfrm>
           <a:prstGeom prst="rect">
             <a:avLst/>
@@ -11829,7 +11942,7 @@
                 <a:ea typeface="Yu Gothic"/>
                 <a:cs typeface="Yu Gothic"/>
               </a:rPr>
-              <a:t xml:space="preserve"> に比例するので、定常 NV⁻ 分率 f₋ から相殺する。f₋ は窓の中で </a:t>
+              <a:t xml:space="preserve"> に比例し、f₋ から相殺する。f₋ は窓の中で </a:t>
             </a:r>
             <a:r>
               <a:rPr sz="1800" b="1">
@@ -11872,7 +11985,7 @@
                 <a:ea typeface="Yu Gothic"/>
                 <a:cs typeface="Yu Gothic"/>
               </a:rPr>
-              <a:t xml:space="preserve">校正でフィットする現象論定数は </a:t>
+              <a:t>最大の ±6.9 nm は他人の測定値ではなく、</a:t>
             </a:r>
             <a:r>
               <a:rPr sz="1800" b="1">
@@ -11883,10 +11996,10 @@
                 <a:ea typeface="Yu Gothic"/>
                 <a:cs typeface="Yu Gothic"/>
               </a:rPr>
-              <a:t>1 つも λ</a:t>
-            </a:r>
-            <a:r>
-              <a:rPr sz="1800" b="1" baseline="-25000">
+              <a:t>我々の単一有効フォノン近似そのもの</a:t>
+            </a:r>
+            <a:r>
+              <a:rPr sz="1800" b="0">
                 <a:solidFill>
                   <a:srgbClr val="101426"/>
                 </a:solidFill>
@@ -11894,29 +12007,7 @@
                 <a:ea typeface="Yu Gothic"/>
                 <a:cs typeface="Yu Gothic"/>
               </a:rPr>
-              <a:t>opt</a:t>
-            </a:r>
-            <a:r>
-              <a:rPr sz="1800" b="1">
-                <a:solidFill>
-                  <a:srgbClr val="101426"/>
-                </a:solidFill>
-                <a:latin typeface="Yu Gothic"/>
-                <a:ea typeface="Yu Gothic"/>
-                <a:cs typeface="Yu Gothic"/>
-              </a:rPr>
-              <a:t xml:space="preserve"> を動かさない</a:t>
-            </a:r>
-            <a:r>
-              <a:rPr sz="1800" b="0">
-                <a:solidFill>
-                  <a:srgbClr val="101426"/>
-                </a:solidFill>
-                <a:latin typeface="Yu Gothic"/>
-                <a:ea typeface="Yu Gothic"/>
-                <a:cs typeface="Yu Gothic"/>
-              </a:rPr>
-              <a:t>。</a:t>
+              <a:t>である。</a:t>
             </a:r>
           </a:p>
           <a:p>
@@ -11929,49 +12020,6 @@
               </a:spcAft>
             </a:pPr>
             <a:r>
-              <a:rPr sz="1800" b="0">
-                <a:solidFill>
-                  <a:srgbClr val="101426"/>
-                </a:solidFill>
-                <a:latin typeface="Yu Gothic"/>
-                <a:ea typeface="Yu Gothic"/>
-                <a:cs typeface="Yu Gothic"/>
-              </a:rPr>
-              <a:t>効くのは 3 つだけ — ZPL 位置、電子格子結合、そして</a:t>
-            </a:r>
-            <a:r>
-              <a:rPr sz="1800" b="1">
-                <a:solidFill>
-                  <a:srgbClr val="101426"/>
-                </a:solidFill>
-                <a:latin typeface="Yu Gothic"/>
-                <a:ea typeface="Yu Gothic"/>
-                <a:cs typeface="Yu Gothic"/>
-              </a:rPr>
-              <a:t>単一有効フォノン近似そのもの</a:t>
-            </a:r>
-            <a:r>
-              <a:rPr sz="1800" b="0">
-                <a:solidFill>
-                  <a:srgbClr val="101426"/>
-                </a:solidFill>
-                <a:latin typeface="Yu Gothic"/>
-                <a:ea typeface="Yu Gothic"/>
-                <a:cs typeface="Yu Gothic"/>
-              </a:rPr>
-              <a:t>。最大の ±6.9 nm は他人の測定値ではなく我々のモデル形である。</a:t>
-            </a:r>
-          </a:p>
-          <a:p>
-            <a:pPr>
-              <a:lnSpc>
-                <a:spcPct val="125000"/>
-              </a:lnSpc>
-              <a:spcAft>
-                <a:spcPts val="1000"/>
-              </a:spcAft>
-            </a:pPr>
-            <a:r>
               <a:rPr sz="1800" b="1">
                 <a:solidFill>
                   <a:srgbClr val="1C3177"/>
@@ -11993,8 +12041,8 @@
         </p:nvSpPr>
         <p:spPr>
           <a:xfrm>
-            <a:off x="502920" y="6172200"/>
-            <a:ext cx="8686800" cy="566928"/>
+            <a:off x="502920" y="6327648"/>
+            <a:ext cx="11192256" cy="411480"/>
           </a:xfrm>
           <a:prstGeom prst="rect">
             <a:avLst/>
@@ -12016,7 +12064,7 @@
               </a:spcAft>
             </a:pPr>
             <a:r>
-              <a:rPr sz="1800" b="0">
+              <a:rPr sz="1200" b="0">
                 <a:solidFill>
                   <a:srgbClr val="6E7488"/>
                 </a:solidFill>
@@ -12024,7 +12072,73 @@
                 <a:ea typeface="Yu Gothic"/>
                 <a:cs typeface="Yu Gothic"/>
               </a:rPr>
-              <a:t>各入力を MC 範囲の端に振ったときの λopt の変化。等パワー比較では光子束 ∝ λ なので、最適は σabs 極大 474.0 nm ではなく λσabs 極大 475.5 nm。</a:t>
+              <a:t>K. O. Ho, C. Dailledouze et al., arXiv:2606.02399 (2026)。</a:t>
+            </a:r>
+          </a:p>
+        </p:txBody>
+      </p:sp>
+      <p:sp>
+        <p:nvSpPr>
+          <p:cNvPr id="90" name="BottomNote"/>
+          <p:cNvSpPr txBox="1"/>
+          <p:nvPr/>
+        </p:nvSpPr>
+        <p:spPr>
+          <a:xfrm>
+            <a:off x="502920" y="5358384"/>
+            <a:ext cx="11192256" cy="868680"/>
+          </a:xfrm>
+          <a:prstGeom prst="rect">
+            <a:avLst/>
+          </a:prstGeom>
+          <a:noFill/>
+        </p:spPr>
+        <p:txBody>
+          <a:bodyPr wrap="square" lIns="0" rIns="0" tIns="0" bIns="0">
+            <a:spAutoFit/>
+          </a:bodyPr>
+          <a:lstStyle/>
+          <a:p>
+            <a:pPr>
+              <a:lnSpc>
+                <a:spcPct val="125000"/>
+              </a:lnSpc>
+              <a:spcAft>
+                <a:spcPts val="0"/>
+              </a:spcAft>
+            </a:pPr>
+            <a:r>
+              <a:rPr sz="1800" b="0">
+                <a:solidFill>
+                  <a:srgbClr val="101426"/>
+                </a:solidFill>
+                <a:latin typeface="Yu Gothic"/>
+                <a:ea typeface="Yu Gothic"/>
+                <a:cs typeface="Yu Gothic"/>
+              </a:rPr>
+              <a:t>図: 各入力を MC 範囲の端に振ったときの λopt の変化。動かすのは光学入力 3 つだけで、</a:t>
+            </a:r>
+            <a:r>
+              <a:rPr sz="1800" b="1">
+                <a:solidFill>
+                  <a:srgbClr val="101426"/>
+                </a:solidFill>
+                <a:latin typeface="Yu Gothic"/>
+                <a:ea typeface="Yu Gothic"/>
+                <a:cs typeface="Yu Gothic"/>
+              </a:rPr>
+              <a:t>校正でフィットする現象論定数は 1 つも動かさない</a:t>
+            </a:r>
+            <a:r>
+              <a:rPr sz="1800" b="0">
+                <a:solidFill>
+                  <a:srgbClr val="101426"/>
+                </a:solidFill>
+                <a:latin typeface="Yu Gothic"/>
+                <a:ea typeface="Yu Gothic"/>
+                <a:cs typeface="Yu Gothic"/>
+              </a:rPr>
+              <a:t>。等パワー比較では光子束 ∝ λ なので、最適は σabs 極大 474.0 nm ではなく λσabs 極大 475.5 nm。</a:t>
             </a:r>
           </a:p>
         </p:txBody>
@@ -12092,7 +12206,7 @@
         </p:blipFill>
         <p:spPr>
           <a:xfrm>
-            <a:off x="411480" y="1325880"/>
+            <a:off x="411480" y="1298448"/>
             <a:ext cx="7040880" cy="3931920"/>
           </a:xfrm>
           <a:prstGeom prst="rect">
@@ -12108,8 +12222,8 @@
         </p:nvSpPr>
         <p:spPr>
           <a:xfrm>
-            <a:off x="7726679" y="1417320"/>
-            <a:ext cx="3977639" cy="4206240"/>
+            <a:off x="7726679" y="1371600"/>
+            <a:ext cx="3977639" cy="3840480"/>
           </a:xfrm>
           <a:prstGeom prst="rect">
             <a:avLst/>
@@ -12182,29 +12296,7 @@
                 <a:ea typeface="Yu Gothic"/>
                 <a:cs typeface="Yu Gothic"/>
               </a:rPr>
-              <a:t>50 GPa の既報は</a:t>
-            </a:r>
-            <a:r>
-              <a:rPr sz="1800" b="1">
-                <a:solidFill>
-                  <a:srgbClr val="101426"/>
-                </a:solidFill>
-                <a:latin typeface="Yu Gothic"/>
-                <a:ea typeface="Yu Gothic"/>
-                <a:cs typeface="Yu Gothic"/>
-              </a:rPr>
-              <a:t>青の優位を見つけなかった</a:t>
-            </a:r>
-            <a:r>
-              <a:rPr sz="1800" b="0">
-                <a:solidFill>
-                  <a:srgbClr val="101426"/>
-                </a:solidFill>
-                <a:latin typeface="Yu Gothic"/>
-                <a:ea typeface="Yu Gothic"/>
-                <a:cs typeface="Yu Gothic"/>
-              </a:rPr>
-              <a:t>。モデルはそこで 0.56、緑が有利と答える。見つからなかったことが再現になっている。</a:t>
+              <a:t>波長依存の系統誤差は圧力に依らないので、比が 1 を横切る位置を作ることも動かすこともできない。</a:t>
             </a:r>
           </a:p>
           <a:p>
@@ -12217,27 +12309,6 @@
               </a:spcAft>
             </a:pPr>
             <a:r>
-              <a:rPr sz="1800" b="0">
-                <a:solidFill>
-                  <a:srgbClr val="101426"/>
-                </a:solidFill>
-                <a:latin typeface="Yu Gothic"/>
-                <a:ea typeface="Yu Gothic"/>
-                <a:cs typeface="Yu Gothic"/>
-              </a:rPr>
-              <a:t>波長依存の系統誤差は圧力に依らないので、比が 1 を横切る位置を作ることも動かすこともできない。</a:t>
-            </a:r>
-          </a:p>
-          <a:p>
-            <a:pPr>
-              <a:lnSpc>
-                <a:spcPct val="125000"/>
-              </a:lnSpc>
-              <a:spcAft>
-                <a:spcPts val="1000"/>
-              </a:spcAft>
-            </a:pPr>
-            <a:r>
               <a:rPr sz="1800" b="1">
                 <a:solidFill>
                   <a:srgbClr val="1C3177"/>
@@ -12259,8 +12330,8 @@
         </p:nvSpPr>
         <p:spPr>
           <a:xfrm>
-            <a:off x="502920" y="6172200"/>
-            <a:ext cx="8686800" cy="566928"/>
+            <a:off x="502920" y="6327648"/>
+            <a:ext cx="11192256" cy="411480"/>
           </a:xfrm>
           <a:prstGeom prst="rect">
             <a:avLst/>
@@ -12282,7 +12353,7 @@
               </a:spcAft>
             </a:pPr>
             <a:r>
-              <a:rPr sz="1800" b="0">
+              <a:rPr sz="1200" b="0">
                 <a:solidFill>
                   <a:srgbClr val="6E7488"/>
                 </a:solidFill>
@@ -12291,6 +12362,72 @@
                 <a:cs typeface="Yu Gothic"/>
               </a:rPr>
               <a:t>Bhattacharyya, PhD thesis (2022) Sec. 6.3; Dai et al., CPL 39, 117601 (2022); Hilberer et al., PRB 107, L220102 (2023)。</a:t>
+            </a:r>
+          </a:p>
+        </p:txBody>
+      </p:sp>
+      <p:sp>
+        <p:nvSpPr>
+          <p:cNvPr id="90" name="BottomNote"/>
+          <p:cNvSpPr txBox="1"/>
+          <p:nvPr/>
+        </p:nvSpPr>
+        <p:spPr>
+          <a:xfrm>
+            <a:off x="502920" y="5358384"/>
+            <a:ext cx="11192256" cy="868680"/>
+          </a:xfrm>
+          <a:prstGeom prst="rect">
+            <a:avLst/>
+          </a:prstGeom>
+          <a:noFill/>
+        </p:spPr>
+        <p:txBody>
+          <a:bodyPr wrap="square" lIns="0" rIns="0" tIns="0" bIns="0">
+            <a:spAutoFit/>
+          </a:bodyPr>
+          <a:lstStyle/>
+          <a:p>
+            <a:pPr>
+              <a:lnSpc>
+                <a:spcPct val="125000"/>
+              </a:lnSpc>
+              <a:spcAft>
+                <a:spcPts val="0"/>
+              </a:spcAft>
+            </a:pPr>
+            <a:r>
+              <a:rPr sz="1800" b="0">
+                <a:solidFill>
+                  <a:srgbClr val="101426"/>
+                </a:solidFill>
+                <a:latin typeface="Yu Gothic"/>
+                <a:ea typeface="Yu Gothic"/>
+                <a:cs typeface="Yu Gothic"/>
+              </a:rPr>
+              <a:t>図: 50 GPa の既報は</a:t>
+            </a:r>
+            <a:r>
+              <a:rPr sz="1800" b="1">
+                <a:solidFill>
+                  <a:srgbClr val="101426"/>
+                </a:solidFill>
+                <a:latin typeface="Yu Gothic"/>
+                <a:ea typeface="Yu Gothic"/>
+                <a:cs typeface="Yu Gothic"/>
+              </a:rPr>
+              <a:t>青の優位を見つけなかった</a:t>
+            </a:r>
+            <a:r>
+              <a:rPr sz="1800" b="0">
+                <a:solidFill>
+                  <a:srgbClr val="101426"/>
+                </a:solidFill>
+                <a:latin typeface="Yu Gothic"/>
+                <a:ea typeface="Yu Gothic"/>
+                <a:cs typeface="Yu Gothic"/>
+              </a:rPr>
+              <a:t>。モデルはそこで 0.56、緑が有利と答える。見つからなかったことが再現になっている。</a:t>
             </a:r>
           </a:p>
         </p:txBody>

--- a/slides/odmr_473nm_talk.pptx
+++ b/slides/odmr_473nm_talk.pptx
@@ -9457,7 +9457,7 @@
         <p:spPr>
           <a:xfrm>
             <a:off x="7726679" y="1371600"/>
-            <a:ext cx="3977639" cy="3840480"/>
+            <a:ext cx="3977639" cy="4160520"/>
           </a:xfrm>
           <a:prstGeom prst="rect">
             <a:avLst/>
@@ -9607,7 +9607,7 @@
                 <a:ea typeface="Yu Gothic"/>
                 <a:cs typeface="Yu Gothic"/>
               </a:rPr>
-              <a:t>未校正の量は docs/next_step_power_dependence_experiment.md の Stage 1–3 で決める。</a:t>
+              <a:t>u = 1 は λopt における NV⁻ 遷移の半飽和強度。未校正の量は docs/next_step_power_dependence_experiment.md の Stage 1–3 で決める。</a:t>
             </a:r>
           </a:p>
         </p:txBody>
@@ -9620,8 +9620,8 @@
         </p:nvSpPr>
         <p:spPr>
           <a:xfrm>
-            <a:off x="502920" y="5358384"/>
-            <a:ext cx="11192256" cy="868680"/>
+            <a:off x="502920" y="5715000"/>
+            <a:ext cx="11192256" cy="411480"/>
           </a:xfrm>
           <a:prstGeom prst="rect">
             <a:avLst/>
@@ -9643,7 +9643,7 @@
               </a:spcAft>
             </a:pPr>
             <a:r>
-              <a:rPr sz="1800" b="0">
+              <a:rPr sz="2000" b="0">
                 <a:solidFill>
                   <a:srgbClr val="101426"/>
                 </a:solidFill>
@@ -9651,10 +9651,10 @@
                 <a:ea typeface="Yu Gothic"/>
                 <a:cs typeface="Yu Gothic"/>
               </a:rPr>
-              <a:t>図: u = 1 は λopt での NV⁻ 遷移の半飽和強度。稜線は 475.5 nm (u→0) から 405 nm のイオン化端まで走る。Dai 2022 の線形 PL が置く u ≲ 0.3 では 473 nm 固定のコストが ×1.51 に達し、</a:t>
-            </a:r>
-            <a:r>
-              <a:rPr sz="1800" b="1">
+              <a:t>既存実験がいる u ≲ 0.3 では 473 nm 固定が ×1.51 になり、</a:t>
+            </a:r>
+            <a:r>
+              <a:rPr sz="2000" b="1">
                 <a:solidFill>
                   <a:srgbClr val="101426"/>
                 </a:solidFill>
@@ -9662,7 +9662,18 @@
                 <a:ea typeface="Yu Gothic"/>
                 <a:cs typeface="Yu Gothic"/>
               </a:rPr>
-              <a:t>緑に対する ×2.5 の大半を食う。</a:t>
+              <a:t>緑への ×2.5 の大半を食う</a:t>
+            </a:r>
+            <a:r>
+              <a:rPr sz="2000" b="0">
+                <a:solidFill>
+                  <a:srgbClr val="101426"/>
+                </a:solidFill>
+                <a:latin typeface="Yu Gothic"/>
+                <a:ea typeface="Yu Gothic"/>
+                <a:cs typeface="Yu Gothic"/>
+              </a:rPr>
+              <a:t>。</a:t>
             </a:r>
           </a:p>
         </p:txBody>
@@ -10990,7 +11001,7 @@
         <p:spPr>
           <a:xfrm>
             <a:off x="7726679" y="1371600"/>
-            <a:ext cx="3977639" cy="3840480"/>
+            <a:ext cx="3977639" cy="4160520"/>
           </a:xfrm>
           <a:prstGeom prst="rect">
             <a:avLst/>
@@ -11150,7 +11161,7 @@
                 <a:ea typeface="Yu Gothic"/>
                 <a:cs typeface="Yu Gothic"/>
               </a:rPr>
-              <a:t>K. O. Ho, C. Dailledouze et al., arXiv:2606.02399 (2026) — DFT + DAC。</a:t>
+              <a:t>K. O. Ho, C. Dailledouze et al., arXiv:2606.02399 (2026) — DFT + DAC。灰色の常圧曲線は単一有効フォノン近似（50 GPa 以下では粗い）。</a:t>
             </a:r>
           </a:p>
         </p:txBody>
@@ -11163,8 +11174,8 @@
         </p:nvSpPr>
         <p:spPr>
           <a:xfrm>
-            <a:off x="502920" y="5358384"/>
-            <a:ext cx="11192256" cy="868680"/>
+            <a:off x="502920" y="5715000"/>
+            <a:ext cx="11192256" cy="411480"/>
           </a:xfrm>
           <a:prstGeom prst="rect">
             <a:avLst/>
@@ -11186,7 +11197,7 @@
               </a:spcAft>
             </a:pPr>
             <a:r>
-              <a:rPr sz="1800" b="0">
+              <a:rPr sz="2000" b="0">
                 <a:solidFill>
                   <a:srgbClr val="101426"/>
                 </a:solidFill>
@@ -11194,10 +11205,10 @@
                 <a:ea typeface="Yu Gothic"/>
                 <a:cs typeface="Yu Gothic"/>
               </a:rPr>
-              <a:t xml:space="preserve">図: 常圧（灰）と 120 GPa（紺）の吸収帯。吸収極大とイオン化端が同時に青へ動き、120 GPa では σ(473) が σ(532) の </a:t>
-            </a:r>
-            <a:r>
-              <a:rPr sz="1800" b="1">
+              <a:t xml:space="preserve">吸収極大とイオン化端が同時に青へ動き、120 GPa では σ(473) が σ(532) の </a:t>
+            </a:r>
+            <a:r>
+              <a:rPr sz="2000" b="1">
                 <a:solidFill>
                   <a:srgbClr val="101426"/>
                 </a:solidFill>
@@ -11208,7 +11219,7 @@
               <a:t>10 倍</a:t>
             </a:r>
             <a:r>
-              <a:rPr sz="1800" b="0">
+              <a:rPr sz="2000" b="0">
                 <a:solidFill>
                   <a:srgbClr val="101426"/>
                 </a:solidFill>
@@ -11216,7 +11227,7 @@
                 <a:ea typeface="Yu Gothic"/>
                 <a:cs typeface="Yu Gothic"/>
               </a:rPr>
-              <a:t>になる。常圧曲線は単一有効フォノン近似で、50 GPa 以下では粗い。</a:t>
+              <a:t>になる。</a:t>
             </a:r>
           </a:p>
         </p:txBody>
@@ -11612,7 +11623,7 @@
         <p:spPr>
           <a:xfrm>
             <a:off x="7726679" y="3246120"/>
-            <a:ext cx="3977639" cy="1965960"/>
+            <a:ext cx="3977639" cy="2286000"/>
           </a:xfrm>
           <a:prstGeom prst="rect">
             <a:avLst/>
@@ -11763,8 +11774,8 @@
         </p:nvSpPr>
         <p:spPr>
           <a:xfrm>
-            <a:off x="502920" y="5358384"/>
-            <a:ext cx="11192256" cy="868680"/>
+            <a:off x="502920" y="5715000"/>
+            <a:ext cx="11192256" cy="411480"/>
           </a:xfrm>
           <a:prstGeom prst="rect">
             <a:avLst/>
@@ -11786,7 +11797,7 @@
               </a:spcAft>
             </a:pPr>
             <a:r>
-              <a:rPr sz="1800" b="0">
+              <a:rPr sz="2000" b="0">
                 <a:solidFill>
                   <a:srgbClr val="101426"/>
                 </a:solidFill>
@@ -11794,10 +11805,10 @@
                 <a:ea typeface="Yu Gothic"/>
                 <a:cs typeface="Yu Gothic"/>
               </a:rPr>
-              <a:t>図: 帯は入力の MC 16–84%。λopt = 475.5 +5.6 / −5.3 nm は 5% 許容窓 463–488 nm の半分を占める。</a:t>
-            </a:r>
-            <a:r>
-              <a:rPr sz="1800" b="1">
+              <a:t xml:space="preserve">λopt の不確かさ ±5.5 nm は 5% 許容窓の半分を占める — </a:t>
+            </a:r>
+            <a:r>
+              <a:rPr sz="2000" b="1">
                 <a:solidFill>
                   <a:srgbClr val="101426"/>
                 </a:solidFill>
@@ -11805,7 +11816,18 @@
                 <a:ea typeface="Yu Gothic"/>
                 <a:cs typeface="Yu Gothic"/>
               </a:rPr>
-              <a:t>市販の 473 nm DPSS はその窓の中で、最適の 0.2% 落ちにすぎない。</a:t>
+              <a:t>答えは点ではなく窓である</a:t>
+            </a:r>
+            <a:r>
+              <a:rPr sz="2000" b="0">
+                <a:solidFill>
+                  <a:srgbClr val="101426"/>
+                </a:solidFill>
+                <a:latin typeface="Yu Gothic"/>
+                <a:ea typeface="Yu Gothic"/>
+                <a:cs typeface="Yu Gothic"/>
+              </a:rPr>
+              <a:t>。</a:t>
             </a:r>
           </a:p>
         </p:txBody>
@@ -11890,7 +11912,7 @@
         <p:spPr>
           <a:xfrm>
             <a:off x="7726679" y="1371600"/>
-            <a:ext cx="3977639" cy="3840480"/>
+            <a:ext cx="3977639" cy="4160520"/>
           </a:xfrm>
           <a:prstGeom prst="rect">
             <a:avLst/>
@@ -12072,7 +12094,7 @@
                 <a:ea typeface="Yu Gothic"/>
                 <a:cs typeface="Yu Gothic"/>
               </a:rPr>
-              <a:t>K. O. Ho, C. Dailledouze et al., arXiv:2606.02399 (2026)。</a:t>
+              <a:t>K. O. Ho, C. Dailledouze et al., arXiv:2606.02399 (2026)。等パワー比較では光子束 ∝ λ なので、最適は σabs 極大 474.0 nm ではなく λσabs 極大 475.5 nm。</a:t>
             </a:r>
           </a:p>
         </p:txBody>
@@ -12085,8 +12107,8 @@
         </p:nvSpPr>
         <p:spPr>
           <a:xfrm>
-            <a:off x="502920" y="5358384"/>
-            <a:ext cx="11192256" cy="868680"/>
+            <a:off x="502920" y="5715000"/>
+            <a:ext cx="11192256" cy="411480"/>
           </a:xfrm>
           <a:prstGeom prst="rect">
             <a:avLst/>
@@ -12108,7 +12130,7 @@
               </a:spcAft>
             </a:pPr>
             <a:r>
-              <a:rPr sz="1800" b="0">
+              <a:rPr sz="2000" b="0">
                 <a:solidFill>
                   <a:srgbClr val="101426"/>
                 </a:solidFill>
@@ -12116,10 +12138,10 @@
                 <a:ea typeface="Yu Gothic"/>
                 <a:cs typeface="Yu Gothic"/>
               </a:rPr>
-              <a:t>図: 各入力を MC 範囲の端に振ったときの λopt の変化。動かすのは光学入力 3 つだけで、</a:t>
-            </a:r>
-            <a:r>
-              <a:rPr sz="1800" b="1">
+              <a:t>動かすのは光学入力 3 つだけで、</a:t>
+            </a:r>
+            <a:r>
+              <a:rPr sz="2000" b="1">
                 <a:solidFill>
                   <a:srgbClr val="101426"/>
                 </a:solidFill>
@@ -12127,10 +12149,10 @@
                 <a:ea typeface="Yu Gothic"/>
                 <a:cs typeface="Yu Gothic"/>
               </a:rPr>
-              <a:t>校正でフィットする現象論定数は 1 つも動かさない</a:t>
-            </a:r>
-            <a:r>
-              <a:rPr sz="1800" b="0">
+              <a:t>校正でフィットする現象論定数は 1 つも λopt を動かさない</a:t>
+            </a:r>
+            <a:r>
+              <a:rPr sz="2000" b="0">
                 <a:solidFill>
                   <a:srgbClr val="101426"/>
                 </a:solidFill>
@@ -12138,7 +12160,7 @@
                 <a:ea typeface="Yu Gothic"/>
                 <a:cs typeface="Yu Gothic"/>
               </a:rPr>
-              <a:t>。等パワー比較では光子束 ∝ λ なので、最適は σabs 極大 474.0 nm ではなく λσabs 極大 475.5 nm。</a:t>
+              <a:t>。</a:t>
             </a:r>
           </a:p>
         </p:txBody>
@@ -12223,7 +12245,7 @@
         <p:spPr>
           <a:xfrm>
             <a:off x="7726679" y="1371600"/>
-            <a:ext cx="3977639" cy="3840480"/>
+            <a:ext cx="3977639" cy="4160520"/>
           </a:xfrm>
           <a:prstGeom prst="rect">
             <a:avLst/>
@@ -12374,8 +12396,8 @@
         </p:nvSpPr>
         <p:spPr>
           <a:xfrm>
-            <a:off x="502920" y="5358384"/>
-            <a:ext cx="11192256" cy="868680"/>
+            <a:off x="502920" y="5715000"/>
+            <a:ext cx="11192256" cy="411480"/>
           </a:xfrm>
           <a:prstGeom prst="rect">
             <a:avLst/>
@@ -12397,7 +12419,7 @@
               </a:spcAft>
             </a:pPr>
             <a:r>
-              <a:rPr sz="1800" b="0">
+              <a:rPr sz="2000" b="0">
                 <a:solidFill>
                   <a:srgbClr val="101426"/>
                 </a:solidFill>
@@ -12405,10 +12427,10 @@
                 <a:ea typeface="Yu Gothic"/>
                 <a:cs typeface="Yu Gothic"/>
               </a:rPr>
-              <a:t>図: 50 GPa の既報は</a:t>
-            </a:r>
-            <a:r>
-              <a:rPr sz="1800" b="1">
+              <a:t>50 GPa の既報が</a:t>
+            </a:r>
+            <a:r>
+              <a:rPr sz="2000" b="1">
                 <a:solidFill>
                   <a:srgbClr val="101426"/>
                 </a:solidFill>
@@ -12416,10 +12438,10 @@
                 <a:ea typeface="Yu Gothic"/>
                 <a:cs typeface="Yu Gothic"/>
               </a:rPr>
-              <a:t>青の優位を見つけなかった</a:t>
-            </a:r>
-            <a:r>
-              <a:rPr sz="1800" b="0">
+              <a:t>青の優位を見つけなかったこと自体</a:t>
+            </a:r>
+            <a:r>
+              <a:rPr sz="2000" b="0">
                 <a:solidFill>
                   <a:srgbClr val="101426"/>
                 </a:solidFill>
@@ -12427,7 +12449,7 @@
                 <a:ea typeface="Yu Gothic"/>
                 <a:cs typeface="Yu Gothic"/>
               </a:rPr>
-              <a:t>。モデルはそこで 0.56、緑が有利と答える。見つからなかったことが再現になっている。</a:t>
+              <a:t>が、モデルの再現になっている。</a:t>
             </a:r>
           </a:p>
         </p:txBody>

--- a/slides/odmr_473nm_talk.pptx
+++ b/slides/odmr_473nm_talk.pptx
@@ -9479,20 +9479,9 @@
               </a:spcAft>
             </a:pPr>
             <a:r>
-              <a:rPr sz="1800" b="0">
-                <a:solidFill>
-                  <a:srgbClr val="101426"/>
-                </a:solidFill>
-                <a:latin typeface="Yu Gothic"/>
-                <a:ea typeface="Yu Gothic"/>
-                <a:cs typeface="Yu Gothic"/>
-              </a:rPr>
-              <a:t>移動の</a:t>
-            </a:r>
-            <a:r>
               <a:rPr sz="1800" b="1">
                 <a:solidFill>
-                  <a:srgbClr val="101426"/>
+                  <a:srgbClr val="1C3177"/>
                 </a:solidFill>
                 <a:latin typeface="Yu Gothic"/>
                 <a:ea typeface="Yu Gothic"/>
@@ -9503,29 +9492,29 @@
             <a:r>
               <a:rPr sz="1800" b="0">
                 <a:solidFill>
-                  <a:srgbClr val="101426"/>
+                  <a:srgbClr val="1C3177"/>
                 </a:solidFill>
                 <a:latin typeface="Yu Gothic"/>
                 <a:ea typeface="Yu Gothic"/>
                 <a:cs typeface="Yu Gothic"/>
               </a:rPr>
-              <a:t>は 250 ドロー全部で一致する。しかし</a:t>
+              <a:t>は 250 ドロー全部で一致するが、</a:t>
             </a:r>
             <a:r>
               <a:rPr sz="1800" b="1">
                 <a:solidFill>
-                  <a:srgbClr val="101426"/>
+                  <a:srgbClr val="1C3177"/>
                 </a:solidFill>
                 <a:latin typeface="Yu Gothic"/>
                 <a:ea typeface="Yu Gothic"/>
                 <a:cs typeface="Yu Gothic"/>
               </a:rPr>
-              <a:t>量は校正前のシナリオであって結果ではない</a:t>
+              <a:t>量は校正前のシナリオである</a:t>
             </a:r>
             <a:r>
               <a:rPr sz="1800" b="0">
                 <a:solidFill>
-                  <a:srgbClr val="101426"/>
+                  <a:srgbClr val="1C3177"/>
                 </a:solidFill>
                 <a:latin typeface="Yu Gothic"/>
                 <a:ea typeface="Yu Gothic"/>
@@ -9557,13 +9546,13 @@
             <a:r>
               <a:rPr sz="1800" b="0">
                 <a:solidFill>
-                  <a:srgbClr val="101426"/>
+                  <a:srgbClr val="1C3177"/>
                 </a:solidFill>
                 <a:latin typeface="Yu Gothic"/>
                 <a:ea typeface="Yu Gothic"/>
                 <a:cs typeface="Yu Gothic"/>
               </a:rPr>
-              <a:t>R(I) の線形離脱点が「低励起」を実パワーに換算する。2 ビーム掃引よりずっと安く、波長比較より先にやる。</a:t>
+              <a:t>R(I) の線形離脱点が「低励起」を実パワーに換算する。</a:t>
             </a:r>
           </a:p>
         </p:txBody>
@@ -9607,7 +9596,7 @@
                 <a:ea typeface="Yu Gothic"/>
                 <a:cs typeface="Yu Gothic"/>
               </a:rPr>
-              <a:t>u = 1 は λopt における NV⁻ 遷移の半飽和強度。未校正の量は docs/next_step_power_dependence_experiment.md の Stage 1–3 で決める。</a:t>
+              <a:t>J.-H. Dai et al., Chin. Phys. Lett. 39, 117601 (2022).</a:t>
             </a:r>
           </a:p>
         </p:txBody>
@@ -9620,16 +9609,18 @@
         </p:nvSpPr>
         <p:spPr>
           <a:xfrm>
-            <a:off x="502920" y="5715000"/>
-            <a:ext cx="11192256" cy="411480"/>
+            <a:off x="502920" y="5650992"/>
+            <a:ext cx="11192256" cy="566928"/>
           </a:xfrm>
           <a:prstGeom prst="rect">
             <a:avLst/>
           </a:prstGeom>
-          <a:noFill/>
+          <a:solidFill>
+            <a:srgbClr val="1C3177"/>
+          </a:solidFill>
         </p:spPr>
         <p:txBody>
-          <a:bodyPr wrap="square" lIns="0" rIns="0" tIns="0" bIns="0">
+          <a:bodyPr wrap="square" lIns="164592" rIns="164592" tIns="82296" bIns="82296" anchor="ctr">
             <a:spAutoFit/>
           </a:bodyPr>
           <a:lstStyle/>
@@ -9645,7 +9636,7 @@
             <a:r>
               <a:rPr sz="2000" b="0">
                 <a:solidFill>
-                  <a:srgbClr val="101426"/>
+                  <a:srgbClr val="FFFFFF"/>
                 </a:solidFill>
                 <a:latin typeface="Yu Gothic"/>
                 <a:ea typeface="Yu Gothic"/>
@@ -9656,7 +9647,7 @@
             <a:r>
               <a:rPr sz="2000" b="1">
                 <a:solidFill>
-                  <a:srgbClr val="101426"/>
+                  <a:srgbClr val="FFFFFF"/>
                 </a:solidFill>
                 <a:latin typeface="Yu Gothic"/>
                 <a:ea typeface="Yu Gothic"/>
@@ -9667,7 +9658,7 @@
             <a:r>
               <a:rPr sz="2000" b="0">
                 <a:solidFill>
-                  <a:srgbClr val="101426"/>
+                  <a:srgbClr val="FFFFFF"/>
                 </a:solidFill>
                 <a:latin typeface="Yu Gothic"/>
                 <a:ea typeface="Yu Gothic"/>
@@ -9782,7 +9773,7 @@
             <a:r>
               <a:rPr sz="1800" b="0">
                 <a:solidFill>
-                  <a:srgbClr val="6E7488"/>
+                  <a:srgbClr val="1C3177"/>
                 </a:solidFill>
                 <a:latin typeface="Yu Gothic"/>
                 <a:ea typeface="Yu Gothic"/>
@@ -9899,7 +9890,7 @@
                       <a:r>
                         <a:rPr sz="1800" b="0">
                           <a:solidFill>
-                            <a:srgbClr val="101426"/>
+                            <a:srgbClr val="1C3177"/>
                           </a:solidFill>
                           <a:latin typeface="Yu Gothic"/>
                           <a:ea typeface="Yu Gothic"/>
@@ -9921,7 +9912,7 @@
                       <a:r>
                         <a:rPr sz="1800" b="0">
                           <a:solidFill>
-                            <a:srgbClr val="101426"/>
+                            <a:srgbClr val="1C3177"/>
                           </a:solidFill>
                           <a:latin typeface="Yu Gothic"/>
                           <a:ea typeface="Yu Gothic"/>
@@ -9943,7 +9934,7 @@
                       <a:r>
                         <a:rPr sz="1800" b="0">
                           <a:solidFill>
-                            <a:srgbClr val="101426"/>
+                            <a:srgbClr val="1C3177"/>
                           </a:solidFill>
                           <a:latin typeface="Yu Gothic"/>
                           <a:ea typeface="Yu Gothic"/>
@@ -9967,7 +9958,7 @@
                       <a:r>
                         <a:rPr sz="1800" b="0">
                           <a:solidFill>
-                            <a:srgbClr val="101426"/>
+                            <a:srgbClr val="1C3177"/>
                           </a:solidFill>
                           <a:latin typeface="Yu Gothic"/>
                           <a:ea typeface="Yu Gothic"/>
@@ -9989,7 +9980,7 @@
                       <a:r>
                         <a:rPr sz="1800" b="0">
                           <a:solidFill>
-                            <a:srgbClr val="101426"/>
+                            <a:srgbClr val="1C3177"/>
                           </a:solidFill>
                           <a:latin typeface="Yu Gothic"/>
                           <a:ea typeface="Yu Gothic"/>
@@ -10011,7 +10002,7 @@
                       <a:r>
                         <a:rPr sz="1800" b="0">
                           <a:solidFill>
-                            <a:srgbClr val="101426"/>
+                            <a:srgbClr val="1C3177"/>
                           </a:solidFill>
                           <a:latin typeface="Yu Gothic"/>
                           <a:ea typeface="Yu Gothic"/>
@@ -10035,7 +10026,7 @@
                       <a:r>
                         <a:rPr sz="1800" b="0">
                           <a:solidFill>
-                            <a:srgbClr val="101426"/>
+                            <a:srgbClr val="1C3177"/>
                           </a:solidFill>
                           <a:latin typeface="Yu Gothic"/>
                           <a:ea typeface="Yu Gothic"/>
@@ -10057,7 +10048,7 @@
                       <a:r>
                         <a:rPr sz="1800" b="0">
                           <a:solidFill>
-                            <a:srgbClr val="101426"/>
+                            <a:srgbClr val="1C3177"/>
                           </a:solidFill>
                           <a:latin typeface="Yu Gothic"/>
                           <a:ea typeface="Yu Gothic"/>
@@ -10079,7 +10070,7 @@
                       <a:r>
                         <a:rPr sz="1800" b="0">
                           <a:solidFill>
-                            <a:srgbClr val="101426"/>
+                            <a:srgbClr val="1C3177"/>
                           </a:solidFill>
                           <a:latin typeface="Yu Gothic"/>
                           <a:ea typeface="Yu Gothic"/>
@@ -10103,7 +10094,7 @@
                       <a:r>
                         <a:rPr sz="1800" b="1">
                           <a:solidFill>
-                            <a:srgbClr val="101426"/>
+                            <a:srgbClr val="1C3177"/>
                           </a:solidFill>
                           <a:latin typeface="Yu Gothic"/>
                           <a:ea typeface="Yu Gothic"/>
@@ -10127,7 +10118,7 @@
                       <a:r>
                         <a:rPr sz="1800" b="1">
                           <a:solidFill>
-                            <a:srgbClr val="101426"/>
+                            <a:srgbClr val="1C3177"/>
                           </a:solidFill>
                           <a:latin typeface="Yu Gothic"/>
                           <a:ea typeface="Yu Gothic"/>
@@ -10151,7 +10142,7 @@
                       <a:r>
                         <a:rPr sz="1800" b="1">
                           <a:solidFill>
-                            <a:srgbClr val="101426"/>
+                            <a:srgbClr val="1C3177"/>
                           </a:solidFill>
                           <a:latin typeface="Yu Gothic"/>
                           <a:ea typeface="Yu Gothic"/>
@@ -10205,7 +10196,7 @@
             <a:r>
               <a:rPr sz="1800" b="0">
                 <a:solidFill>
-                  <a:srgbClr val="101426"/>
+                  <a:srgbClr val="1C3177"/>
                 </a:solidFill>
                 <a:latin typeface="Yu Gothic"/>
                 <a:ea typeface="Yu Gothic"/>
@@ -10216,7 +10207,7 @@
             <a:r>
               <a:rPr sz="1800" b="0" baseline="-25000">
                 <a:solidFill>
-                  <a:srgbClr val="101426"/>
+                  <a:srgbClr val="1C3177"/>
                 </a:solidFill>
                 <a:latin typeface="Yu Gothic"/>
                 <a:ea typeface="Yu Gothic"/>
@@ -10227,7 +10218,7 @@
             <a:r>
               <a:rPr sz="1800" b="1">
                 <a:solidFill>
-                  <a:srgbClr val="101426"/>
+                  <a:srgbClr val="1C3177"/>
                 </a:solidFill>
                 <a:latin typeface="Yu Gothic"/>
                 <a:ea typeface="Yu Gothic"/>
@@ -10248,7 +10239,7 @@
             <a:r>
               <a:rPr sz="1800" b="0">
                 <a:solidFill>
-                  <a:srgbClr val="101426"/>
+                  <a:srgbClr val="1C3177"/>
                 </a:solidFill>
                 <a:latin typeface="Yu Gothic"/>
                 <a:ea typeface="Yu Gothic"/>
@@ -10292,7 +10283,7 @@
             <a:r>
               <a:rPr sz="1800" b="1">
                 <a:solidFill>
-                  <a:srgbClr val="101426"/>
+                  <a:srgbClr val="1C3177"/>
                 </a:solidFill>
                 <a:latin typeface="Yu Gothic"/>
                 <a:ea typeface="Yu Gothic"/>
@@ -10303,7 +10294,7 @@
             <a:r>
               <a:rPr sz="1800" b="0">
                 <a:solidFill>
-                  <a:srgbClr val="101426"/>
+                  <a:srgbClr val="1C3177"/>
                 </a:solidFill>
                 <a:latin typeface="Yu Gothic"/>
                 <a:ea typeface="Yu Gothic"/>
@@ -10324,7 +10315,7 @@
             <a:r>
               <a:rPr sz="1800" b="1">
                 <a:solidFill>
-                  <a:srgbClr val="101426"/>
+                  <a:srgbClr val="1C3177"/>
                 </a:solidFill>
                 <a:latin typeface="Yu Gothic"/>
                 <a:ea typeface="Yu Gothic"/>
@@ -10335,7 +10326,7 @@
             <a:r>
               <a:rPr sz="1800" b="0">
                 <a:solidFill>
-                  <a:srgbClr val="101426"/>
+                  <a:srgbClr val="1C3177"/>
                 </a:solidFill>
                 <a:latin typeface="Yu Gothic"/>
                 <a:ea typeface="Yu Gothic"/>
@@ -10356,7 +10347,7 @@
             <a:r>
               <a:rPr sz="1800" b="0">
                 <a:solidFill>
-                  <a:srgbClr val="101426"/>
+                  <a:srgbClr val="1C3177"/>
                 </a:solidFill>
                 <a:latin typeface="Yu Gothic"/>
                 <a:ea typeface="Yu Gothic"/>
@@ -10367,7 +10358,7 @@
             <a:r>
               <a:rPr sz="1800" b="1">
                 <a:solidFill>
-                  <a:srgbClr val="101426"/>
+                  <a:srgbClr val="1C3177"/>
                 </a:solidFill>
                 <a:latin typeface="Yu Gothic"/>
                 <a:ea typeface="Yu Gothic"/>
@@ -10378,7 +10369,7 @@
             <a:r>
               <a:rPr sz="1800" b="0">
                 <a:solidFill>
-                  <a:srgbClr val="101426"/>
+                  <a:srgbClr val="1C3177"/>
                 </a:solidFill>
                 <a:latin typeface="Yu Gothic"/>
                 <a:ea typeface="Yu Gothic"/>
@@ -10428,7 +10419,7 @@
                 <a:ea typeface="Yu Gothic"/>
                 <a:cs typeface="Yu Gothic"/>
               </a:rPr>
-              <a:t>図: Bhattacharyya, PhD thesis, UC Berkeley (2022) Fig. 2.2。データ: Drozdov, Nature 525, 73 (2015) / 569, 528 (2019); Salke, Nat. Commun. 10, 4453 (2019); Bi, ibid. 13, 5952 (2022)。</a:t>
+              <a:t>Bhattacharyya, PhD thesis (2022) Fig. 2.2; Drozdov, Nature 525, 73 (2015); 569, 528 (2019); Salke, Nat. Commun. 10, 4453 (2019); Bi, ibid. 13, 5952 (2022).</a:t>
             </a:r>
           </a:p>
         </p:txBody>
@@ -10561,13 +10552,35 @@
             <a:r>
               <a:rPr sz="1800" b="0">
                 <a:solidFill>
-                  <a:srgbClr val="6E7488"/>
+                  <a:srgbClr val="1C3177"/>
                 </a:solidFill>
                 <a:latin typeface="Yu Gothic"/>
                 <a:ea typeface="Yu Gothic"/>
                 <a:cs typeface="Yu Gothic"/>
               </a:rPr>
-              <a:t>先行研究の実測。(左) NV はキュレット表面の 50 nm 下に注入され、試料から µm の距離で同じ圧力を経験する。(中央・右) CeH₉ 上で B/H が 0.67 まで落ちる = 局所の磁束排除、しかも ~10 µm で不均一。</a:t>
+              <a:t xml:space="preserve">キュレット面の 50 nm 下の NV が、CeH₉ 上で </a:t>
+            </a:r>
+            <a:r>
+              <a:rPr sz="1800" b="1">
+                <a:solidFill>
+                  <a:srgbClr val="1C3177"/>
+                </a:solidFill>
+                <a:latin typeface="Yu Gothic"/>
+                <a:ea typeface="Yu Gothic"/>
+                <a:cs typeface="Yu Gothic"/>
+              </a:rPr>
+              <a:t>B/H = 0.67</a:t>
+            </a:r>
+            <a:r>
+              <a:rPr sz="1800" b="0">
+                <a:solidFill>
+                  <a:srgbClr val="1C3177"/>
+                </a:solidFill>
+                <a:latin typeface="Yu Gothic"/>
+                <a:ea typeface="Yu Gothic"/>
+                <a:cs typeface="Yu Gothic"/>
+              </a:rPr>
+              <a:t xml:space="preserve"> の局所磁束排除を ~10 µm の不均一まで捉えている。</a:t>
             </a:r>
           </a:p>
         </p:txBody>
@@ -10616,7 +10629,7 @@
             <a:r>
               <a:rPr sz="2200" b="0">
                 <a:solidFill>
-                  <a:srgbClr val="101426"/>
+                  <a:srgbClr val="1C3177"/>
                 </a:solidFill>
                 <a:latin typeface="Yu Gothic"/>
                 <a:ea typeface="Yu Gothic"/>
@@ -10627,7 +10640,7 @@
             <a:r>
               <a:rPr sz="2200" b="0" baseline="-25000">
                 <a:solidFill>
-                  <a:srgbClr val="101426"/>
+                  <a:srgbClr val="1C3177"/>
                 </a:solidFill>
                 <a:latin typeface="Yu Gothic"/>
                 <a:ea typeface="Yu Gothic"/>
@@ -10638,7 +10651,7 @@
             <a:r>
               <a:rPr sz="2200" b="0" baseline="30000">
                 <a:solidFill>
-                  <a:srgbClr val="101426"/>
+                  <a:srgbClr val="1C3177"/>
                 </a:solidFill>
                 <a:latin typeface="Yu Gothic"/>
                 <a:ea typeface="Yu Gothic"/>
@@ -10682,7 +10695,7 @@
             <a:r>
               <a:rPr sz="1800" b="0">
                 <a:solidFill>
-                  <a:srgbClr val="101426"/>
+                  <a:srgbClr val="1C3177"/>
                 </a:solidFill>
                 <a:latin typeface="Yu Gothic"/>
                 <a:ea typeface="Yu Gothic"/>
@@ -10726,7 +10739,7 @@
             <a:r>
               <a:rPr sz="1800" b="1">
                 <a:solidFill>
-                  <a:srgbClr val="101426"/>
+                  <a:srgbClr val="1C3177"/>
                 </a:solidFill>
                 <a:latin typeface="Yu Gothic"/>
                 <a:ea typeface="Yu Gothic"/>
@@ -10737,7 +10750,7 @@
             <a:r>
               <a:rPr sz="1800" b="0">
                 <a:solidFill>
-                  <a:srgbClr val="101426"/>
+                  <a:srgbClr val="1C3177"/>
                 </a:solidFill>
                 <a:latin typeface="Yu Gothic"/>
                 <a:ea typeface="Yu Gothic"/>
@@ -10748,7 +10761,7 @@
             <a:r>
               <a:rPr sz="1800" b="0" baseline="-25000">
                 <a:solidFill>
-                  <a:srgbClr val="101426"/>
+                  <a:srgbClr val="1C3177"/>
                 </a:solidFill>
                 <a:latin typeface="Yu Gothic"/>
                 <a:ea typeface="Yu Gothic"/>
@@ -10759,7 +10772,7 @@
             <a:r>
               <a:rPr sz="1800" b="0">
                 <a:solidFill>
-                  <a:srgbClr val="101426"/>
+                  <a:srgbClr val="1C3177"/>
                 </a:solidFill>
                 <a:latin typeface="Yu Gothic"/>
                 <a:ea typeface="Yu Gothic"/>
@@ -10780,7 +10793,7 @@
             <a:r>
               <a:rPr sz="1800" b="0">
                 <a:solidFill>
-                  <a:srgbClr val="101426"/>
+                  <a:srgbClr val="1C3177"/>
                 </a:solidFill>
                 <a:latin typeface="Yu Gothic"/>
                 <a:ea typeface="Yu Gothic"/>
@@ -10791,7 +10804,7 @@
             <a:r>
               <a:rPr sz="1800" b="1">
                 <a:solidFill>
-                  <a:srgbClr val="101426"/>
+                  <a:srgbClr val="1C3177"/>
                 </a:solidFill>
                 <a:latin typeface="Yu Gothic"/>
                 <a:ea typeface="Yu Gothic"/>
@@ -10802,7 +10815,7 @@
             <a:r>
               <a:rPr sz="1800" b="0">
                 <a:solidFill>
-                  <a:srgbClr val="101426"/>
+                  <a:srgbClr val="1C3177"/>
                 </a:solidFill>
                 <a:latin typeface="Yu Gothic"/>
                 <a:ea typeface="Yu Gothic"/>
@@ -10834,7 +10847,7 @@
             <a:r>
               <a:rPr sz="1800" b="0">
                 <a:solidFill>
-                  <a:srgbClr val="6E7488"/>
+                  <a:srgbClr val="1C3177"/>
                 </a:solidFill>
                 <a:latin typeface="Yu Gothic"/>
                 <a:ea typeface="Yu Gothic"/>
@@ -10866,7 +10879,7 @@
             <a:r>
               <a:rPr sz="1800" b="0">
                 <a:solidFill>
-                  <a:srgbClr val="6E7488"/>
+                  <a:srgbClr val="1C3177"/>
                 </a:solidFill>
                 <a:latin typeface="Yu Gothic"/>
                 <a:ea typeface="Yu Gothic"/>
@@ -10916,7 +10929,7 @@
                 <a:ea typeface="Yu Gothic"/>
                 <a:cs typeface="Yu Gothic"/>
               </a:rPr>
-              <a:t>図: Bhattacharyya, PhD thesis (2022) Fig. 7.2, 7.8; 同グループの成果は Nature 627, 73 (2024)。η の定義は Barry et al., RMP 92, 015004 (2020)。</a:t>
+              <a:t>Bhattacharyya, PhD thesis (2022) Fig. 7.2, 7.8; Bhattacharyya et al., Nature 627, 73 (2024); Barry et al., Rev. Mod. Phys. 92, 015004 (2020).</a:t>
             </a:r>
           </a:p>
         </p:txBody>
@@ -11025,7 +11038,7 @@
             <a:r>
               <a:rPr sz="1800" b="0">
                 <a:solidFill>
-                  <a:srgbClr val="101426"/>
+                  <a:srgbClr val="1C3177"/>
                 </a:solidFill>
                 <a:latin typeface="Yu Gothic"/>
                 <a:ea typeface="Yu Gothic"/>
@@ -11036,7 +11049,7 @@
             <a:r>
               <a:rPr sz="1800" b="1">
                 <a:solidFill>
-                  <a:srgbClr val="101426"/>
+                  <a:srgbClr val="1C3177"/>
                 </a:solidFill>
                 <a:latin typeface="Yu Gothic"/>
                 <a:ea typeface="Yu Gothic"/>
@@ -11047,7 +11060,7 @@
             <a:r>
               <a:rPr sz="1800" b="0">
                 <a:solidFill>
-                  <a:srgbClr val="101426"/>
+                  <a:srgbClr val="1C3177"/>
                 </a:solidFill>
                 <a:latin typeface="Yu Gothic"/>
                 <a:ea typeface="Yu Gothic"/>
@@ -11068,18 +11081,18 @@
             <a:r>
               <a:rPr sz="1800" b="0">
                 <a:solidFill>
-                  <a:srgbClr val="101426"/>
+                  <a:srgbClr val="1C3177"/>
                 </a:solidFill>
                 <a:latin typeface="Yu Gothic"/>
                 <a:ea typeface="Yu Gothic"/>
                 <a:cs typeface="Yu Gothic"/>
               </a:rPr>
-              <a:t xml:space="preserve">IP(³A₂) は 2.68 → </a:t>
+              <a:t xml:space="preserve">IP(³A₂) は </a:t>
             </a:r>
             <a:r>
               <a:rPr sz="1800" b="1">
                 <a:solidFill>
-                  <a:srgbClr val="101426"/>
+                  <a:srgbClr val="1C3177"/>
                 </a:solidFill>
                 <a:latin typeface="Yu Gothic"/>
                 <a:ea typeface="Yu Gothic"/>
@@ -11090,13 +11103,13 @@
             <a:r>
               <a:rPr sz="1800" b="0">
                 <a:solidFill>
-                  <a:srgbClr val="101426"/>
+                  <a:srgbClr val="1C3177"/>
                 </a:solidFill>
                 <a:latin typeface="Yu Gothic"/>
                 <a:ea typeface="Yu Gothic"/>
                 <a:cs typeface="Yu Gothic"/>
               </a:rPr>
-              <a:t>。これより青は NV⁻ を直接 NV⁰ に変える。</a:t>
+              <a:t>。これより青は NV⁻ を NV⁰ に変える。</a:t>
             </a:r>
           </a:p>
           <a:p>
@@ -11111,13 +11124,13 @@
             <a:r>
               <a:rPr sz="1800" b="0">
                 <a:solidFill>
-                  <a:srgbClr val="101426"/>
+                  <a:srgbClr val="1C3177"/>
                 </a:solidFill>
                 <a:latin typeface="Yu Gothic"/>
                 <a:ea typeface="Yu Gothic"/>
                 <a:cs typeface="Yu Gothic"/>
               </a:rPr>
-              <a:t>η ∝ Δν/(C√R) は C に線形、光子レートに √ で効く。釣り合いの位置は量的問題である。</a:t>
+              <a:t>η ∝ Δν/(C√R)。C に線形、光子レートに √。</a:t>
             </a:r>
           </a:p>
         </p:txBody>
@@ -11161,7 +11174,7 @@
                 <a:ea typeface="Yu Gothic"/>
                 <a:cs typeface="Yu Gothic"/>
               </a:rPr>
-              <a:t>K. O. Ho, C. Dailledouze et al., arXiv:2606.02399 (2026) — DFT + DAC。灰色の常圧曲線は単一有効フォノン近似（50 GPa 以下では粗い）。</a:t>
+              <a:t>K. O. Ho, C. Dailledouze et al., arXiv:2606.02399 (2026).</a:t>
             </a:r>
           </a:p>
         </p:txBody>
@@ -11174,16 +11187,18 @@
         </p:nvSpPr>
         <p:spPr>
           <a:xfrm>
-            <a:off x="502920" y="5715000"/>
-            <a:ext cx="11192256" cy="411480"/>
+            <a:off x="502920" y="5650992"/>
+            <a:ext cx="11192256" cy="566928"/>
           </a:xfrm>
           <a:prstGeom prst="rect">
             <a:avLst/>
           </a:prstGeom>
-          <a:noFill/>
+          <a:solidFill>
+            <a:srgbClr val="1C3177"/>
+          </a:solidFill>
         </p:spPr>
         <p:txBody>
-          <a:bodyPr wrap="square" lIns="0" rIns="0" tIns="0" bIns="0">
+          <a:bodyPr wrap="square" lIns="164592" rIns="164592" tIns="82296" bIns="82296" anchor="ctr">
             <a:spAutoFit/>
           </a:bodyPr>
           <a:lstStyle/>
@@ -11199,7 +11214,7 @@
             <a:r>
               <a:rPr sz="2000" b="0">
                 <a:solidFill>
-                  <a:srgbClr val="101426"/>
+                  <a:srgbClr val="FFFFFF"/>
                 </a:solidFill>
                 <a:latin typeface="Yu Gothic"/>
                 <a:ea typeface="Yu Gothic"/>
@@ -11210,7 +11225,7 @@
             <a:r>
               <a:rPr sz="2000" b="1">
                 <a:solidFill>
-                  <a:srgbClr val="101426"/>
+                  <a:srgbClr val="FFFFFF"/>
                 </a:solidFill>
                 <a:latin typeface="Yu Gothic"/>
                 <a:ea typeface="Yu Gothic"/>
@@ -11221,7 +11236,7 @@
             <a:r>
               <a:rPr sz="2000" b="0">
                 <a:solidFill>
-                  <a:srgbClr val="101426"/>
+                  <a:srgbClr val="FFFFFF"/>
                 </a:solidFill>
                 <a:latin typeface="Yu Gothic"/>
                 <a:ea typeface="Yu Gothic"/>
@@ -11409,7 +11424,7 @@
                       <a:r>
                         <a:rPr sz="1800" b="0">
                           <a:solidFill>
-                            <a:srgbClr val="101426"/>
+                            <a:srgbClr val="1C3177"/>
                           </a:solidFill>
                           <a:latin typeface="Yu Gothic"/>
                           <a:ea typeface="Yu Gothic"/>
@@ -11431,7 +11446,7 @@
                       <a:r>
                         <a:rPr sz="1800" b="0">
                           <a:solidFill>
-                            <a:srgbClr val="101426"/>
+                            <a:srgbClr val="1C3177"/>
                           </a:solidFill>
                           <a:latin typeface="Yu Gothic"/>
                           <a:ea typeface="Yu Gothic"/>
@@ -11453,7 +11468,7 @@
                       <a:r>
                         <a:rPr sz="1800" b="0">
                           <a:solidFill>
-                            <a:srgbClr val="101426"/>
+                            <a:srgbClr val="1C3177"/>
                           </a:solidFill>
                           <a:latin typeface="Yu Gothic"/>
                           <a:ea typeface="Yu Gothic"/>
@@ -11477,7 +11492,7 @@
                       <a:r>
                         <a:rPr sz="1800" b="1">
                           <a:solidFill>
-                            <a:srgbClr val="101426"/>
+                            <a:srgbClr val="1C3177"/>
                           </a:solidFill>
                           <a:latin typeface="Yu Gothic"/>
                           <a:ea typeface="Yu Gothic"/>
@@ -11501,7 +11516,7 @@
                       <a:r>
                         <a:rPr sz="1800" b="0">
                           <a:solidFill>
-                            <a:srgbClr val="101426"/>
+                            <a:srgbClr val="1C3177"/>
                           </a:solidFill>
                           <a:latin typeface="Yu Gothic"/>
                           <a:ea typeface="Yu Gothic"/>
@@ -11525,7 +11540,7 @@
                       <a:r>
                         <a:rPr sz="1800" b="0">
                           <a:solidFill>
-                            <a:srgbClr val="101426"/>
+                            <a:srgbClr val="1C3177"/>
                           </a:solidFill>
                           <a:latin typeface="Yu Gothic"/>
                           <a:ea typeface="Yu Gothic"/>
@@ -11551,7 +11566,7 @@
                       <a:r>
                         <a:rPr sz="1800" b="0">
                           <a:solidFill>
-                            <a:srgbClr val="101426"/>
+                            <a:srgbClr val="1C3177"/>
                           </a:solidFill>
                           <a:latin typeface="Yu Gothic"/>
                           <a:ea typeface="Yu Gothic"/>
@@ -11573,7 +11588,7 @@
                       <a:r>
                         <a:rPr sz="1800" b="0">
                           <a:solidFill>
-                            <a:srgbClr val="101426"/>
+                            <a:srgbClr val="1C3177"/>
                           </a:solidFill>
                           <a:latin typeface="Yu Gothic"/>
                           <a:ea typeface="Yu Gothic"/>
@@ -11595,7 +11610,7 @@
                       <a:r>
                         <a:rPr sz="1800" b="0">
                           <a:solidFill>
-                            <a:srgbClr val="101426"/>
+                            <a:srgbClr val="1C3177"/>
                           </a:solidFill>
                           <a:latin typeface="Yu Gothic"/>
                           <a:ea typeface="Yu Gothic"/>
@@ -11647,13 +11662,13 @@
             <a:r>
               <a:rPr sz="1800" b="0">
                 <a:solidFill>
-                  <a:srgbClr val="101426"/>
+                  <a:srgbClr val="1C3177"/>
                 </a:solidFill>
                 <a:latin typeface="Yu Gothic"/>
                 <a:ea typeface="Yu Gothic"/>
                 <a:cs typeface="Yu Gothic"/>
               </a:rPr>
-              <a:t>457 nm ×1.11、488 nm ×1.05 — 窓の中には市販線が 3 本ある。</a:t>
+              <a:t>窓の中に市販線が 3 本 — 457 nm ×1.11、488 nm ×1.05。</a:t>
             </a:r>
           </a:p>
           <a:p>
@@ -11668,7 +11683,7 @@
             <a:r>
               <a:rPr sz="1800" b="0">
                 <a:solidFill>
-                  <a:srgbClr val="101426"/>
+                  <a:srgbClr val="1C3177"/>
                 </a:solidFill>
                 <a:latin typeface="Yu Gothic"/>
                 <a:ea typeface="Yu Gothic"/>
@@ -11679,7 +11694,7 @@
             <a:r>
               <a:rPr sz="1800" b="0" baseline="-25000">
                 <a:solidFill>
-                  <a:srgbClr val="101426"/>
+                  <a:srgbClr val="1C3177"/>
                 </a:solidFill>
                 <a:latin typeface="Yu Gothic"/>
                 <a:ea typeface="Yu Gothic"/>
@@ -11690,34 +11705,35 @@
             <a:r>
               <a:rPr sz="1800" b="0">
                 <a:solidFill>
-                  <a:srgbClr val="101426"/>
+                  <a:srgbClr val="1C3177"/>
                 </a:solidFill>
                 <a:latin typeface="Yu Gothic"/>
                 <a:ea typeface="Yu Gothic"/>
                 <a:cs typeface="Yu Gothic"/>
               </a:rPr>
-              <a:t xml:space="preserve"> は ZPL に追随して 0.4–0.6 nm/GPa。100 GPa では 486 nm。</a:t>
-            </a:r>
-          </a:p>
-          <a:p>
-            <a:pPr>
-              <a:lnSpc>
-                <a:spcPct val="125000"/>
-              </a:lnSpc>
-              <a:spcAft>
-                <a:spcPts val="1000"/>
-              </a:spcAft>
-            </a:pPr>
-            <a:r>
-              <a:rPr sz="1800" b="0">
-                <a:solidFill>
-                  <a:srgbClr val="101426"/>
+              <a:t xml:space="preserve"> は </a:t>
+            </a:r>
+            <a:r>
+              <a:rPr sz="1800" b="1">
+                <a:solidFill>
+                  <a:srgbClr val="1C3177"/>
                 </a:solidFill>
                 <a:latin typeface="Yu Gothic"/>
                 <a:ea typeface="Yu Gothic"/>
                 <a:cs typeface="Yu Gothic"/>
               </a:rPr>
-              <a:t>97–172 GPa を通すなら 488 nm と 473 nm の 2 本立て。</a:t>
+              <a:t>0.4–0.6 nm/GPa</a:t>
+            </a:r>
+            <a:r>
+              <a:rPr sz="1800" b="0">
+                <a:solidFill>
+                  <a:srgbClr val="1C3177"/>
+                </a:solidFill>
+                <a:latin typeface="Yu Gothic"/>
+                <a:ea typeface="Yu Gothic"/>
+                <a:cs typeface="Yu Gothic"/>
+              </a:rPr>
+              <a:t xml:space="preserve"> で動く。100 GPa では 486 nm。</a:t>
             </a:r>
           </a:p>
         </p:txBody>
@@ -11752,17 +11768,6 @@
                 <a:spcPts val="0"/>
               </a:spcAft>
             </a:pPr>
-            <a:r>
-              <a:rPr sz="1200" b="0">
-                <a:solidFill>
-                  <a:srgbClr val="6E7488"/>
-                </a:solidFill>
-                <a:latin typeface="Yu Gothic"/>
-                <a:ea typeface="Yu Gothic"/>
-                <a:cs typeface="Yu Gothic"/>
-              </a:rPr>
-              <a:t>表の感度比は最適 η に対する比。MC 帯は単一有効フォノン近似の ±15% を含む。</a:t>
-            </a:r>
           </a:p>
         </p:txBody>
       </p:sp>
@@ -11774,16 +11779,18 @@
         </p:nvSpPr>
         <p:spPr>
           <a:xfrm>
-            <a:off x="502920" y="5715000"/>
-            <a:ext cx="11192256" cy="411480"/>
+            <a:off x="502920" y="5650992"/>
+            <a:ext cx="11192256" cy="566928"/>
           </a:xfrm>
           <a:prstGeom prst="rect">
             <a:avLst/>
           </a:prstGeom>
-          <a:noFill/>
+          <a:solidFill>
+            <a:srgbClr val="1C3177"/>
+          </a:solidFill>
         </p:spPr>
         <p:txBody>
-          <a:bodyPr wrap="square" lIns="0" rIns="0" tIns="0" bIns="0">
+          <a:bodyPr wrap="square" lIns="164592" rIns="164592" tIns="82296" bIns="82296" anchor="ctr">
             <a:spAutoFit/>
           </a:bodyPr>
           <a:lstStyle/>
@@ -11797,36 +11804,12 @@
               </a:spcAft>
             </a:pPr>
             <a:r>
-              <a:rPr sz="2000" b="0">
-                <a:solidFill>
-                  <a:srgbClr val="101426"/>
-                </a:solidFill>
-                <a:latin typeface="Yu Gothic"/>
-                <a:ea typeface="Yu Gothic"/>
-                <a:cs typeface="Yu Gothic"/>
-              </a:rPr>
               <a:t xml:space="preserve">λopt の不確かさ ±5.5 nm は 5% 許容窓の半分を占める — </a:t>
             </a:r>
             <a:r>
-              <a:rPr sz="2000" b="1">
-                <a:solidFill>
-                  <a:srgbClr val="101426"/>
-                </a:solidFill>
-                <a:latin typeface="Yu Gothic"/>
-                <a:ea typeface="Yu Gothic"/>
-                <a:cs typeface="Yu Gothic"/>
-              </a:rPr>
               <a:t>答えは点ではなく窓である</a:t>
             </a:r>
             <a:r>
-              <a:rPr sz="2000" b="0">
-                <a:solidFill>
-                  <a:srgbClr val="101426"/>
-                </a:solidFill>
-                <a:latin typeface="Yu Gothic"/>
-                <a:ea typeface="Yu Gothic"/>
-                <a:cs typeface="Yu Gothic"/>
-              </a:rPr>
               <a:t>。</a:t>
             </a:r>
           </a:p>
@@ -11936,18 +11919,18 @@
             <a:r>
               <a:rPr sz="1800" b="0">
                 <a:solidFill>
-                  <a:srgbClr val="101426"/>
+                  <a:srgbClr val="1C3177"/>
                 </a:solidFill>
                 <a:latin typeface="Yu Gothic"/>
                 <a:ea typeface="Yu Gothic"/>
                 <a:cs typeface="Yu Gothic"/>
               </a:rPr>
-              <a:t>励起状態イオン化と再結合はどちらも σ</a:t>
+              <a:t>イオン化と再結合はどちらも σ</a:t>
             </a:r>
             <a:r>
               <a:rPr sz="1800" b="0" baseline="-25000">
                 <a:solidFill>
-                  <a:srgbClr val="101426"/>
+                  <a:srgbClr val="1C3177"/>
                 </a:solidFill>
                 <a:latin typeface="Yu Gothic"/>
                 <a:ea typeface="Yu Gothic"/>
@@ -11958,7 +11941,7 @@
             <a:r>
               <a:rPr sz="1800" b="0">
                 <a:solidFill>
-                  <a:srgbClr val="101426"/>
+                  <a:srgbClr val="1C3177"/>
                 </a:solidFill>
                 <a:latin typeface="Yu Gothic"/>
                 <a:ea typeface="Yu Gothic"/>
@@ -11969,7 +11952,7 @@
             <a:r>
               <a:rPr sz="1800" b="1">
                 <a:solidFill>
-                  <a:srgbClr val="101426"/>
+                  <a:srgbClr val="1C3177"/>
                 </a:solidFill>
                 <a:latin typeface="Yu Gothic"/>
                 <a:ea typeface="Yu Gothic"/>
@@ -11980,7 +11963,7 @@
             <a:r>
               <a:rPr sz="1800" b="0">
                 <a:solidFill>
-                  <a:srgbClr val="101426"/>
+                  <a:srgbClr val="1C3177"/>
                 </a:solidFill>
                 <a:latin typeface="Yu Gothic"/>
                 <a:ea typeface="Yu Gothic"/>
@@ -12001,18 +11984,18 @@
             <a:r>
               <a:rPr sz="1800" b="0">
                 <a:solidFill>
-                  <a:srgbClr val="101426"/>
+                  <a:srgbClr val="1C3177"/>
                 </a:solidFill>
                 <a:latin typeface="Yu Gothic"/>
                 <a:ea typeface="Yu Gothic"/>
                 <a:cs typeface="Yu Gothic"/>
               </a:rPr>
-              <a:t>最大の ±6.9 nm は他人の測定値ではなく、</a:t>
+              <a:t>最大の ±6.9 nm は測定値ではなく、</a:t>
             </a:r>
             <a:r>
               <a:rPr sz="1800" b="1">
                 <a:solidFill>
-                  <a:srgbClr val="101426"/>
+                  <a:srgbClr val="1C3177"/>
                 </a:solidFill>
                 <a:latin typeface="Yu Gothic"/>
                 <a:ea typeface="Yu Gothic"/>
@@ -12023,34 +12006,13 @@
             <a:r>
               <a:rPr sz="1800" b="0">
                 <a:solidFill>
-                  <a:srgbClr val="101426"/>
+                  <a:srgbClr val="1C3177"/>
                 </a:solidFill>
                 <a:latin typeface="Yu Gothic"/>
                 <a:ea typeface="Yu Gothic"/>
                 <a:cs typeface="Yu Gothic"/>
               </a:rPr>
               <a:t>である。</a:t>
-            </a:r>
-          </a:p>
-          <a:p>
-            <a:pPr>
-              <a:lnSpc>
-                <a:spcPct val="125000"/>
-              </a:lnSpc>
-              <a:spcAft>
-                <a:spcPts val="1000"/>
-              </a:spcAft>
-            </a:pPr>
-            <a:r>
-              <a:rPr sz="1800" b="1">
-                <a:solidFill>
-                  <a:srgbClr val="1C3177"/>
-                </a:solidFill>
-                <a:latin typeface="Yu Gothic"/>
-                <a:ea typeface="Yu Gothic"/>
-                <a:cs typeface="Yu Gothic"/>
-              </a:rPr>
-              <a:t>だから答えは一点ではなく窓で述べる。</a:t>
             </a:r>
           </a:p>
         </p:txBody>
@@ -12094,7 +12056,7 @@
                 <a:ea typeface="Yu Gothic"/>
                 <a:cs typeface="Yu Gothic"/>
               </a:rPr>
-              <a:t>K. O. Ho, C. Dailledouze et al., arXiv:2606.02399 (2026)。等パワー比較では光子束 ∝ λ なので、最適は σabs 極大 474.0 nm ではなく λσabs 極大 475.5 nm。</a:t>
+              <a:t>K. O. Ho, C. Dailledouze et al., arXiv:2606.02399 (2026).</a:t>
             </a:r>
           </a:p>
         </p:txBody>
@@ -12107,16 +12069,18 @@
         </p:nvSpPr>
         <p:spPr>
           <a:xfrm>
-            <a:off x="502920" y="5715000"/>
-            <a:ext cx="11192256" cy="411480"/>
+            <a:off x="502920" y="5650992"/>
+            <a:ext cx="11192256" cy="566928"/>
           </a:xfrm>
           <a:prstGeom prst="rect">
             <a:avLst/>
           </a:prstGeom>
-          <a:noFill/>
+          <a:solidFill>
+            <a:srgbClr val="1C3177"/>
+          </a:solidFill>
         </p:spPr>
         <p:txBody>
-          <a:bodyPr wrap="square" lIns="0" rIns="0" tIns="0" bIns="0">
+          <a:bodyPr wrap="square" lIns="164592" rIns="164592" tIns="82296" bIns="82296" anchor="ctr">
             <a:spAutoFit/>
           </a:bodyPr>
           <a:lstStyle/>
@@ -12132,7 +12096,7 @@
             <a:r>
               <a:rPr sz="2000" b="0">
                 <a:solidFill>
-                  <a:srgbClr val="101426"/>
+                  <a:srgbClr val="FFFFFF"/>
                 </a:solidFill>
                 <a:latin typeface="Yu Gothic"/>
                 <a:ea typeface="Yu Gothic"/>
@@ -12143,7 +12107,7 @@
             <a:r>
               <a:rPr sz="2000" b="1">
                 <a:solidFill>
-                  <a:srgbClr val="101426"/>
+                  <a:srgbClr val="FFFFFF"/>
                 </a:solidFill>
                 <a:latin typeface="Yu Gothic"/>
                 <a:ea typeface="Yu Gothic"/>
@@ -12154,7 +12118,7 @@
             <a:r>
               <a:rPr sz="2000" b="0">
                 <a:solidFill>
-                  <a:srgbClr val="101426"/>
+                  <a:srgbClr val="FFFFFF"/>
                 </a:solidFill>
                 <a:latin typeface="Yu Gothic"/>
                 <a:ea typeface="Yu Gothic"/>
@@ -12269,18 +12233,18 @@
             <a:r>
               <a:rPr sz="1800" b="0">
                 <a:solidFill>
-                  <a:srgbClr val="101426"/>
+                  <a:srgbClr val="1C3177"/>
                 </a:solidFill>
                 <a:latin typeface="Yu Gothic"/>
                 <a:ea typeface="Yu Gothic"/>
                 <a:cs typeface="Yu Gothic"/>
               </a:rPr>
-              <a:t xml:space="preserve">較正は Dai 2022 の 3 点だけ（定数 2 個）。その上で 0–150 GPa・4 波長を </a:t>
+              <a:t xml:space="preserve">較正は Dai 2022 の 3 点だけ。0–150 GPa・4 波長を </a:t>
             </a:r>
             <a:r>
               <a:rPr sz="1800" b="1">
                 <a:solidFill>
-                  <a:srgbClr val="101426"/>
+                  <a:srgbClr val="1C3177"/>
                 </a:solidFill>
                 <a:latin typeface="Yu Gothic"/>
                 <a:ea typeface="Yu Gothic"/>
@@ -12291,13 +12255,13 @@
             <a:r>
               <a:rPr sz="1800" b="0">
                 <a:solidFill>
-                  <a:srgbClr val="101426"/>
+                  <a:srgbClr val="1C3177"/>
                 </a:solidFill>
                 <a:latin typeface="Yu Gothic"/>
                 <a:ea typeface="Yu Gothic"/>
                 <a:cs typeface="Yu Gothic"/>
               </a:rPr>
-              <a:t>する（1 件は OPEN と申告）。</a:t>
+              <a:t>する。</a:t>
             </a:r>
           </a:p>
           <a:p>
@@ -12312,13 +12276,13 @@
             <a:r>
               <a:rPr sz="1800" b="0">
                 <a:solidFill>
-                  <a:srgbClr val="101426"/>
+                  <a:srgbClr val="1C3177"/>
                 </a:solidFill>
                 <a:latin typeface="Yu Gothic"/>
                 <a:ea typeface="Yu Gothic"/>
                 <a:cs typeface="Yu Gothic"/>
               </a:rPr>
-              <a:t>波長依存の系統誤差は圧力に依らないので、比が 1 を横切る位置を作ることも動かすこともできない。</a:t>
+              <a:t>波長依存の系統誤差は圧力に依らない。比が 1 を横切る位置は作れない。</a:t>
             </a:r>
           </a:p>
           <a:p>
@@ -12383,7 +12347,7 @@
                 <a:ea typeface="Yu Gothic"/>
                 <a:cs typeface="Yu Gothic"/>
               </a:rPr>
-              <a:t>Bhattacharyya, PhD thesis (2022) Sec. 6.3; Dai et al., CPL 39, 117601 (2022); Hilberer et al., PRB 107, L220102 (2023)。</a:t>
+              <a:t>Bhattacharyya, PhD thesis (2022) Sec. 6.3; Dai et al., CPL 39, 117601 (2022); Hilberer et al., PRB 107, L220102 (2023).</a:t>
             </a:r>
           </a:p>
         </p:txBody>
@@ -12396,16 +12360,18 @@
         </p:nvSpPr>
         <p:spPr>
           <a:xfrm>
-            <a:off x="502920" y="5715000"/>
-            <a:ext cx="11192256" cy="411480"/>
+            <a:off x="502920" y="5650992"/>
+            <a:ext cx="11192256" cy="566928"/>
           </a:xfrm>
           <a:prstGeom prst="rect">
             <a:avLst/>
           </a:prstGeom>
-          <a:noFill/>
+          <a:solidFill>
+            <a:srgbClr val="1C3177"/>
+          </a:solidFill>
         </p:spPr>
         <p:txBody>
-          <a:bodyPr wrap="square" lIns="0" rIns="0" tIns="0" bIns="0">
+          <a:bodyPr wrap="square" lIns="164592" rIns="164592" tIns="82296" bIns="82296" anchor="ctr">
             <a:spAutoFit/>
           </a:bodyPr>
           <a:lstStyle/>
@@ -12421,7 +12387,7 @@
             <a:r>
               <a:rPr sz="2000" b="0">
                 <a:solidFill>
-                  <a:srgbClr val="101426"/>
+                  <a:srgbClr val="FFFFFF"/>
                 </a:solidFill>
                 <a:latin typeface="Yu Gothic"/>
                 <a:ea typeface="Yu Gothic"/>
@@ -12432,7 +12398,7 @@
             <a:r>
               <a:rPr sz="2000" b="1">
                 <a:solidFill>
-                  <a:srgbClr val="101426"/>
+                  <a:srgbClr val="FFFFFF"/>
                 </a:solidFill>
                 <a:latin typeface="Yu Gothic"/>
                 <a:ea typeface="Yu Gothic"/>
@@ -12443,7 +12409,7 @@
             <a:r>
               <a:rPr sz="2000" b="0">
                 <a:solidFill>
-                  <a:srgbClr val="101426"/>
+                  <a:srgbClr val="FFFFFF"/>
                 </a:solidFill>
                 <a:latin typeface="Yu Gothic"/>
                 <a:ea typeface="Yu Gothic"/>
@@ -12607,7 +12573,7 @@
                       <a:r>
                         <a:rPr sz="1800" b="0">
                           <a:solidFill>
-                            <a:srgbClr val="101426"/>
+                            <a:srgbClr val="1C3177"/>
                           </a:solidFill>
                           <a:latin typeface="Yu Gothic"/>
                           <a:ea typeface="Yu Gothic"/>
@@ -12629,7 +12595,7 @@
                       <a:r>
                         <a:rPr sz="1800" b="0">
                           <a:solidFill>
-                            <a:srgbClr val="101426"/>
+                            <a:srgbClr val="1C3177"/>
                           </a:solidFill>
                           <a:latin typeface="Yu Gothic"/>
                           <a:ea typeface="Yu Gothic"/>
@@ -12651,7 +12617,7 @@
                       <a:r>
                         <a:rPr sz="1800" b="0">
                           <a:solidFill>
-                            <a:srgbClr val="101426"/>
+                            <a:srgbClr val="1C3177"/>
                           </a:solidFill>
                           <a:latin typeface="Yu Gothic"/>
                           <a:ea typeface="Yu Gothic"/>
@@ -12675,7 +12641,7 @@
                       <a:r>
                         <a:rPr sz="1800" b="0">
                           <a:solidFill>
-                            <a:srgbClr val="101426"/>
+                            <a:srgbClr val="1C3177"/>
                           </a:solidFill>
                           <a:latin typeface="Yu Gothic"/>
                           <a:ea typeface="Yu Gothic"/>
@@ -12697,7 +12663,7 @@
                       <a:r>
                         <a:rPr sz="1800" b="0">
                           <a:solidFill>
-                            <a:srgbClr val="101426"/>
+                            <a:srgbClr val="1C3177"/>
                           </a:solidFill>
                           <a:latin typeface="Yu Gothic"/>
                           <a:ea typeface="Yu Gothic"/>
@@ -12719,7 +12685,7 @@
                       <a:r>
                         <a:rPr sz="1800" b="0">
                           <a:solidFill>
-                            <a:srgbClr val="101426"/>
+                            <a:srgbClr val="1C3177"/>
                           </a:solidFill>
                           <a:latin typeface="Yu Gothic"/>
                           <a:ea typeface="Yu Gothic"/>
@@ -12743,7 +12709,7 @@
                       <a:r>
                         <a:rPr sz="1800" b="0">
                           <a:solidFill>
-                            <a:srgbClr val="101426"/>
+                            <a:srgbClr val="1C3177"/>
                           </a:solidFill>
                           <a:latin typeface="Yu Gothic"/>
                           <a:ea typeface="Yu Gothic"/>
@@ -12765,7 +12731,7 @@
                       <a:r>
                         <a:rPr sz="1800" b="0">
                           <a:solidFill>
-                            <a:srgbClr val="101426"/>
+                            <a:srgbClr val="1C3177"/>
                           </a:solidFill>
                           <a:latin typeface="Yu Gothic"/>
                           <a:ea typeface="Yu Gothic"/>
@@ -12787,7 +12753,7 @@
                       <a:r>
                         <a:rPr sz="1800" b="0">
                           <a:solidFill>
-                            <a:srgbClr val="101426"/>
+                            <a:srgbClr val="1C3177"/>
                           </a:solidFill>
                           <a:latin typeface="Yu Gothic"/>
                           <a:ea typeface="Yu Gothic"/>
@@ -12811,7 +12777,7 @@
                       <a:r>
                         <a:rPr sz="1800" b="0">
                           <a:solidFill>
-                            <a:srgbClr val="101426"/>
+                            <a:srgbClr val="1C3177"/>
                           </a:solidFill>
                           <a:latin typeface="Yu Gothic"/>
                           <a:ea typeface="Yu Gothic"/>
@@ -12833,7 +12799,7 @@
                       <a:r>
                         <a:rPr sz="1800" b="0">
                           <a:solidFill>
-                            <a:srgbClr val="101426"/>
+                            <a:srgbClr val="1C3177"/>
                           </a:solidFill>
                           <a:latin typeface="Yu Gothic"/>
                           <a:ea typeface="Yu Gothic"/>
@@ -12855,7 +12821,7 @@
                       <a:r>
                         <a:rPr sz="1800" b="0">
                           <a:solidFill>
-                            <a:srgbClr val="101426"/>
+                            <a:srgbClr val="1C3177"/>
                           </a:solidFill>
                           <a:latin typeface="Yu Gothic"/>
                           <a:ea typeface="Yu Gothic"/>
@@ -12907,7 +12873,7 @@
             <a:r>
               <a:rPr sz="1800" b="0">
                 <a:solidFill>
-                  <a:srgbClr val="101426"/>
+                  <a:srgbClr val="1C3177"/>
                 </a:solidFill>
                 <a:latin typeface="Yu Gothic"/>
                 <a:ea typeface="Yu Gothic"/>

--- a/slides/odmr_473nm_talk.pptx
+++ b/slides/odmr_473nm_talk.pptx
@@ -9615,12 +9615,10 @@
           <a:prstGeom prst="rect">
             <a:avLst/>
           </a:prstGeom>
-          <a:solidFill>
-            <a:srgbClr val="1C3177"/>
-          </a:solidFill>
+          <a:noFill/>
         </p:spPr>
         <p:txBody>
-          <a:bodyPr wrap="square" lIns="164592" rIns="164592" tIns="82296" bIns="82296" anchor="ctr">
+          <a:bodyPr wrap="square" lIns="0" rIns="0" tIns="0" bIns="0" anchor="ctr">
             <a:spAutoFit/>
           </a:bodyPr>
           <a:lstStyle/>
@@ -9634,37 +9632,37 @@
               </a:spcAft>
             </a:pPr>
             <a:r>
-              <a:rPr sz="2000" b="0">
-                <a:solidFill>
-                  <a:srgbClr val="FFFFFF"/>
+              <a:rPr sz="2800" b="0">
+                <a:solidFill>
+                  <a:srgbClr val="1C3177"/>
                 </a:solidFill>
                 <a:latin typeface="Yu Gothic"/>
                 <a:ea typeface="Yu Gothic"/>
                 <a:cs typeface="Yu Gothic"/>
               </a:rPr>
-              <a:t>既存実験がいる u ≲ 0.3 では 473 nm 固定が ×1.51 になり、</a:t>
-            </a:r>
-            <a:r>
-              <a:rPr sz="2000" b="1">
-                <a:solidFill>
-                  <a:srgbClr val="FFFFFF"/>
+              <a:t xml:space="preserve">既存実験がいる u ≲ 0.3 で </a:t>
+            </a:r>
+            <a:r>
+              <a:rPr sz="2800" b="1">
+                <a:solidFill>
+                  <a:srgbClr val="1C3177"/>
                 </a:solidFill>
                 <a:latin typeface="Yu Gothic"/>
                 <a:ea typeface="Yu Gothic"/>
                 <a:cs typeface="Yu Gothic"/>
               </a:rPr>
-              <a:t>緑への ×2.5 の大半を食う</a:t>
-            </a:r>
-            <a:r>
-              <a:rPr sz="2000" b="0">
-                <a:solidFill>
-                  <a:srgbClr val="FFFFFF"/>
+              <a:t>473 nm 固定は ×1.51</a:t>
+            </a:r>
+            <a:r>
+              <a:rPr sz="2800" b="0">
+                <a:solidFill>
+                  <a:srgbClr val="1C3177"/>
                 </a:solidFill>
                 <a:latin typeface="Yu Gothic"/>
                 <a:ea typeface="Yu Gothic"/>
                 <a:cs typeface="Yu Gothic"/>
               </a:rPr>
-              <a:t>。</a:t>
+              <a:t xml:space="preserve"> になる。</a:t>
             </a:r>
           </a:p>
         </p:txBody>
@@ -11193,12 +11191,10 @@
           <a:prstGeom prst="rect">
             <a:avLst/>
           </a:prstGeom>
-          <a:solidFill>
-            <a:srgbClr val="1C3177"/>
-          </a:solidFill>
+          <a:noFill/>
         </p:spPr>
         <p:txBody>
-          <a:bodyPr wrap="square" lIns="164592" rIns="164592" tIns="82296" bIns="82296" anchor="ctr">
+          <a:bodyPr wrap="square" lIns="0" rIns="0" tIns="0" bIns="0" anchor="ctr">
             <a:spAutoFit/>
           </a:bodyPr>
           <a:lstStyle/>
@@ -11212,20 +11208,20 @@
               </a:spcAft>
             </a:pPr>
             <a:r>
-              <a:rPr sz="2000" b="0">
-                <a:solidFill>
-                  <a:srgbClr val="FFFFFF"/>
+              <a:rPr sz="2800" b="0">
+                <a:solidFill>
+                  <a:srgbClr val="1C3177"/>
                 </a:solidFill>
                 <a:latin typeface="Yu Gothic"/>
                 <a:ea typeface="Yu Gothic"/>
                 <a:cs typeface="Yu Gothic"/>
               </a:rPr>
-              <a:t xml:space="preserve">吸収極大とイオン化端が同時に青へ動き、120 GPa では σ(473) が σ(532) の </a:t>
-            </a:r>
-            <a:r>
-              <a:rPr sz="2000" b="1">
-                <a:solidFill>
-                  <a:srgbClr val="FFFFFF"/>
+              <a:t xml:space="preserve">120 GPa では σ(473) が σ(532) の </a:t>
+            </a:r>
+            <a:r>
+              <a:rPr sz="2800" b="1">
+                <a:solidFill>
+                  <a:srgbClr val="1C3177"/>
                 </a:solidFill>
                 <a:latin typeface="Yu Gothic"/>
                 <a:ea typeface="Yu Gothic"/>
@@ -11234,9 +11230,9 @@
               <a:t>10 倍</a:t>
             </a:r>
             <a:r>
-              <a:rPr sz="2000" b="0">
-                <a:solidFill>
-                  <a:srgbClr val="FFFFFF"/>
+              <a:rPr sz="2800" b="0">
+                <a:solidFill>
+                  <a:srgbClr val="1C3177"/>
                 </a:solidFill>
                 <a:latin typeface="Yu Gothic"/>
                 <a:ea typeface="Yu Gothic"/>
@@ -11740,39 +11736,6 @@
       </p:sp>
       <p:sp>
         <p:nvSpPr>
-          <p:cNvPr id="6" name="TextBox 5"/>
-          <p:cNvSpPr txBox="1"/>
-          <p:nvPr/>
-        </p:nvSpPr>
-        <p:spPr>
-          <a:xfrm>
-            <a:off x="502920" y="6327648"/>
-            <a:ext cx="11192256" cy="411480"/>
-          </a:xfrm>
-          <a:prstGeom prst="rect">
-            <a:avLst/>
-          </a:prstGeom>
-          <a:noFill/>
-        </p:spPr>
-        <p:txBody>
-          <a:bodyPr wrap="square" lIns="0" rIns="0" tIns="0" bIns="0">
-            <a:spAutoFit/>
-          </a:bodyPr>
-          <a:lstStyle/>
-          <a:p>
-            <a:pPr>
-              <a:lnSpc>
-                <a:spcPct val="125000"/>
-              </a:lnSpc>
-              <a:spcAft>
-                <a:spcPts val="0"/>
-              </a:spcAft>
-            </a:pPr>
-          </a:p>
-        </p:txBody>
-      </p:sp>
-      <p:sp>
-        <p:nvSpPr>
           <p:cNvPr id="90" name="BottomNote"/>
           <p:cNvSpPr txBox="1"/>
           <p:nvPr/>
@@ -11785,12 +11748,10 @@
           <a:prstGeom prst="rect">
             <a:avLst/>
           </a:prstGeom>
-          <a:solidFill>
-            <a:srgbClr val="1C3177"/>
-          </a:solidFill>
+          <a:noFill/>
         </p:spPr>
         <p:txBody>
-          <a:bodyPr wrap="square" lIns="164592" rIns="164592" tIns="82296" bIns="82296" anchor="ctr">
+          <a:bodyPr wrap="square" lIns="0" rIns="0" tIns="0" bIns="0" anchor="ctr">
             <a:spAutoFit/>
           </a:bodyPr>
           <a:lstStyle/>
@@ -11800,17 +11761,41 @@
                 <a:spcPct val="125000"/>
               </a:lnSpc>
               <a:spcAft>
-                <a:spcPts val="0"/>
+                <a:spcPts val="1000"/>
               </a:spcAft>
             </a:pPr>
             <a:r>
-              <a:t xml:space="preserve">λopt の不確かさ ±5.5 nm は 5% 許容窓の半分を占める — </a:t>
-            </a:r>
-            <a:r>
-              <a:t>答えは点ではなく窓である</a:t>
-            </a:r>
-            <a:r>
-              <a:t>。</a:t>
+              <a:rPr sz="2800" b="0">
+                <a:solidFill>
+                  <a:srgbClr val="1C3177"/>
+                </a:solidFill>
+                <a:latin typeface="Yu Gothic"/>
+                <a:ea typeface="Yu Gothic"/>
+                <a:cs typeface="Yu Gothic"/>
+              </a:rPr>
+              <a:t>λopt の不確かさ ±5.5 nm は</a:t>
+            </a:r>
+            <a:r>
+              <a:rPr sz="2800" b="1">
+                <a:solidFill>
+                  <a:srgbClr val="1C3177"/>
+                </a:solidFill>
+                <a:latin typeface="Yu Gothic"/>
+                <a:ea typeface="Yu Gothic"/>
+                <a:cs typeface="Yu Gothic"/>
+              </a:rPr>
+              <a:t>許容窓の半分</a:t>
+            </a:r>
+            <a:r>
+              <a:rPr sz="2800" b="0">
+                <a:solidFill>
+                  <a:srgbClr val="1C3177"/>
+                </a:solidFill>
+                <a:latin typeface="Yu Gothic"/>
+                <a:ea typeface="Yu Gothic"/>
+                <a:cs typeface="Yu Gothic"/>
+              </a:rPr>
+              <a:t>を占める。</a:t>
             </a:r>
           </a:p>
         </p:txBody>
@@ -12075,12 +12060,10 @@
           <a:prstGeom prst="rect">
             <a:avLst/>
           </a:prstGeom>
-          <a:solidFill>
-            <a:srgbClr val="1C3177"/>
-          </a:solidFill>
+          <a:noFill/>
         </p:spPr>
         <p:txBody>
-          <a:bodyPr wrap="square" lIns="164592" rIns="164592" tIns="82296" bIns="82296" anchor="ctr">
+          <a:bodyPr wrap="square" lIns="0" rIns="0" tIns="0" bIns="0" anchor="ctr">
             <a:spAutoFit/>
           </a:bodyPr>
           <a:lstStyle/>
@@ -12094,37 +12077,15 @@
               </a:spcAft>
             </a:pPr>
             <a:r>
-              <a:rPr sz="2000" b="0">
-                <a:solidFill>
-                  <a:srgbClr val="FFFFFF"/>
+              <a:rPr sz="2800" b="1">
+                <a:solidFill>
+                  <a:srgbClr val="1C3177"/>
                 </a:solidFill>
                 <a:latin typeface="Yu Gothic"/>
                 <a:ea typeface="Yu Gothic"/>
                 <a:cs typeface="Yu Gothic"/>
               </a:rPr>
-              <a:t>動かすのは光学入力 3 つだけで、</a:t>
-            </a:r>
-            <a:r>
-              <a:rPr sz="2000" b="1">
-                <a:solidFill>
-                  <a:srgbClr val="FFFFFF"/>
-                </a:solidFill>
-                <a:latin typeface="Yu Gothic"/>
-                <a:ea typeface="Yu Gothic"/>
-                <a:cs typeface="Yu Gothic"/>
-              </a:rPr>
-              <a:t>校正でフィットする現象論定数は 1 つも λopt を動かさない</a:t>
-            </a:r>
-            <a:r>
-              <a:rPr sz="2000" b="0">
-                <a:solidFill>
-                  <a:srgbClr val="FFFFFF"/>
-                </a:solidFill>
-                <a:latin typeface="Yu Gothic"/>
-                <a:ea typeface="Yu Gothic"/>
-                <a:cs typeface="Yu Gothic"/>
-              </a:rPr>
-              <a:t>。</a:t>
+              <a:t>校正でフィットする現象論定数は 1 つも λopt を動かさない。</a:t>
             </a:r>
           </a:p>
         </p:txBody>
@@ -12366,12 +12327,10 @@
           <a:prstGeom prst="rect">
             <a:avLst/>
           </a:prstGeom>
-          <a:solidFill>
-            <a:srgbClr val="1C3177"/>
-          </a:solidFill>
+          <a:noFill/>
         </p:spPr>
         <p:txBody>
-          <a:bodyPr wrap="square" lIns="164592" rIns="164592" tIns="82296" bIns="82296" anchor="ctr">
+          <a:bodyPr wrap="square" lIns="0" rIns="0" tIns="0" bIns="0" anchor="ctr">
             <a:spAutoFit/>
           </a:bodyPr>
           <a:lstStyle/>
@@ -12385,37 +12344,26 @@
               </a:spcAft>
             </a:pPr>
             <a:r>
-              <a:rPr sz="2000" b="0">
-                <a:solidFill>
-                  <a:srgbClr val="FFFFFF"/>
+              <a:rPr sz="2800" b="1">
+                <a:solidFill>
+                  <a:srgbClr val="1C3177"/>
                 </a:solidFill>
                 <a:latin typeface="Yu Gothic"/>
                 <a:ea typeface="Yu Gothic"/>
                 <a:cs typeface="Yu Gothic"/>
               </a:rPr>
-              <a:t>50 GPa の既報が</a:t>
-            </a:r>
-            <a:r>
-              <a:rPr sz="2000" b="1">
-                <a:solidFill>
-                  <a:srgbClr val="FFFFFF"/>
+              <a:t>青の優位が見つからなかったこと自体</a:t>
+            </a:r>
+            <a:r>
+              <a:rPr sz="2800" b="0">
+                <a:solidFill>
+                  <a:srgbClr val="1C3177"/>
                 </a:solidFill>
                 <a:latin typeface="Yu Gothic"/>
                 <a:ea typeface="Yu Gothic"/>
                 <a:cs typeface="Yu Gothic"/>
               </a:rPr>
-              <a:t>青の優位を見つけなかったこと自体</a:t>
-            </a:r>
-            <a:r>
-              <a:rPr sz="2000" b="0">
-                <a:solidFill>
-                  <a:srgbClr val="FFFFFF"/>
-                </a:solidFill>
-                <a:latin typeface="Yu Gothic"/>
-                <a:ea typeface="Yu Gothic"/>
-                <a:cs typeface="Yu Gothic"/>
-              </a:rPr>
-              <a:t>が、モデルの再現になっている。</a:t>
+              <a:t>が再現である。</a:t>
             </a:r>
           </a:p>
         </p:txBody>

--- a/slides/odmr_473nm_talk.pptx
+++ b/slides/odmr_473nm_talk.pptx
@@ -9440,123 +9440,14 @@
         </p:blipFill>
         <p:spPr>
           <a:xfrm>
-            <a:off x="411480" y="1298448"/>
-            <a:ext cx="7040880" cy="3931920"/>
+            <a:off x="502920" y="1207008"/>
+            <a:ext cx="10607040" cy="4160520"/>
           </a:xfrm>
           <a:prstGeom prst="rect">
             <a:avLst/>
           </a:prstGeom>
         </p:spPr>
       </p:pic>
-      <p:sp>
-        <p:nvSpPr>
-          <p:cNvPr id="4" name="TextBox 3"/>
-          <p:cNvSpPr txBox="1"/>
-          <p:nvPr/>
-        </p:nvSpPr>
-        <p:spPr>
-          <a:xfrm>
-            <a:off x="7726679" y="1371600"/>
-            <a:ext cx="3977639" cy="4160520"/>
-          </a:xfrm>
-          <a:prstGeom prst="rect">
-            <a:avLst/>
-          </a:prstGeom>
-          <a:noFill/>
-        </p:spPr>
-        <p:txBody>
-          <a:bodyPr wrap="square" lIns="0" rIns="0" tIns="0" bIns="0">
-            <a:spAutoFit/>
-          </a:bodyPr>
-          <a:lstStyle/>
-          <a:p>
-            <a:pPr>
-              <a:lnSpc>
-                <a:spcPct val="125000"/>
-              </a:lnSpc>
-              <a:spcAft>
-                <a:spcPts val="1000"/>
-              </a:spcAft>
-            </a:pPr>
-            <a:r>
-              <a:rPr sz="1800" b="1">
-                <a:solidFill>
-                  <a:srgbClr val="1C3177"/>
-                </a:solidFill>
-                <a:latin typeface="Yu Gothic"/>
-                <a:ea typeface="Yu Gothic"/>
-                <a:cs typeface="Yu Gothic"/>
-              </a:rPr>
-              <a:t>向き</a:t>
-            </a:r>
-            <a:r>
-              <a:rPr sz="1800" b="0">
-                <a:solidFill>
-                  <a:srgbClr val="1C3177"/>
-                </a:solidFill>
-                <a:latin typeface="Yu Gothic"/>
-                <a:ea typeface="Yu Gothic"/>
-                <a:cs typeface="Yu Gothic"/>
-              </a:rPr>
-              <a:t>は 250 ドロー全部で一致するが、</a:t>
-            </a:r>
-            <a:r>
-              <a:rPr sz="1800" b="1">
-                <a:solidFill>
-                  <a:srgbClr val="1C3177"/>
-                </a:solidFill>
-                <a:latin typeface="Yu Gothic"/>
-                <a:ea typeface="Yu Gothic"/>
-                <a:cs typeface="Yu Gothic"/>
-              </a:rPr>
-              <a:t>量は校正前のシナリオである</a:t>
-            </a:r>
-            <a:r>
-              <a:rPr sz="1800" b="0">
-                <a:solidFill>
-                  <a:srgbClr val="1C3177"/>
-                </a:solidFill>
-                <a:latin typeface="Yu Gothic"/>
-                <a:ea typeface="Yu Gothic"/>
-                <a:cs typeface="Yu Gothic"/>
-              </a:rPr>
-              <a:t>。</a:t>
-            </a:r>
-          </a:p>
-          <a:p>
-            <a:pPr>
-              <a:lnSpc>
-                <a:spcPct val="125000"/>
-              </a:lnSpc>
-              <a:spcAft>
-                <a:spcPts val="1000"/>
-              </a:spcAft>
-            </a:pPr>
-            <a:r>
-              <a:rPr sz="1800" b="1">
-                <a:solidFill>
-                  <a:srgbClr val="1C3177"/>
-                </a:solidFill>
-                <a:latin typeface="Yu Gothic"/>
-                <a:ea typeface="Yu Gothic"/>
-                <a:cs typeface="Yu Gothic"/>
-              </a:rPr>
-              <a:t>次の一手：473 nm 単色でパワー掃引 1 本。</a:t>
-            </a:r>
-            <a:r>
-              <a:rPr sz="1800" b="0">
-                <a:solidFill>
-                  <a:srgbClr val="1C3177"/>
-                </a:solidFill>
-                <a:latin typeface="Yu Gothic"/>
-                <a:ea typeface="Yu Gothic"/>
-                <a:cs typeface="Yu Gothic"/>
-              </a:rPr>
-              <a:t>R(I) の線形離脱点が「低励起」を実パワーに換算する。</a:t>
-            </a:r>
-          </a:p>
-        </p:txBody>
-      </p:sp>
       <p:sp>
         <p:nvSpPr>
           <p:cNvPr id="5" name="TextBox 4"/>
@@ -9609,28 +9500,16 @@
         </p:nvSpPr>
         <p:spPr>
           <a:xfrm>
-            <a:off x="502920" y="5650992"/>
+            <a:off x="502920" y="5623560"/>
             <a:ext cx="11192256" cy="566928"/>
           </a:xfrm>
-          <a:prstGeom prst="rect">
-            <a:avLst/>
-          </a:prstGeom>
+          <a:prstGeom prst="rect"/>
           <a:noFill/>
         </p:spPr>
         <p:txBody>
-          <a:bodyPr wrap="square" lIns="0" rIns="0" tIns="0" bIns="0" anchor="ctr">
-            <a:spAutoFit/>
-          </a:bodyPr>
+          <a:bodyPr wrap="square" lIns="0" rIns="0" tIns="0" bIns="0" anchor="ctr"/>
           <a:lstStyle/>
           <a:p>
-            <a:pPr>
-              <a:lnSpc>
-                <a:spcPct val="125000"/>
-              </a:lnSpc>
-              <a:spcAft>
-                <a:spcPts val="0"/>
-              </a:spcAft>
-            </a:pPr>
             <a:r>
               <a:rPr sz="2800" b="0">
                 <a:solidFill>
@@ -9640,7 +9519,7 @@
                 <a:ea typeface="Yu Gothic"/>
                 <a:cs typeface="Yu Gothic"/>
               </a:rPr>
-              <a:t xml:space="preserve">既存実験がいる u ≲ 0.3 で </a:t>
+              <a:t xml:space="preserve">次の一手は </a:t>
             </a:r>
             <a:r>
               <a:rPr sz="2800" b="1">
@@ -9651,7 +9530,7 @@
                 <a:ea typeface="Yu Gothic"/>
                 <a:cs typeface="Yu Gothic"/>
               </a:rPr>
-              <a:t>473 nm 固定は ×1.51</a:t>
+              <a:t>473 nm 単色のパワー掃引 1 本</a:t>
             </a:r>
             <a:r>
               <a:rPr sz="2800" b="0">
@@ -9662,7 +9541,7 @@
                 <a:ea typeface="Yu Gothic"/>
                 <a:cs typeface="Yu Gothic"/>
               </a:rPr>
-              <a:t xml:space="preserve"> になる。</a:t>
+              <a:t>である。</a:t>
             </a:r>
           </a:p>
         </p:txBody>
@@ -9730,58 +9609,14 @@
         </p:blipFill>
         <p:spPr>
           <a:xfrm>
-            <a:off x="822960" y="1188720"/>
-            <a:ext cx="2331720" cy="4309019"/>
+            <a:off x="1188720" y="1234440"/>
+            <a:ext cx="2130552" cy="3931920"/>
           </a:xfrm>
           <a:prstGeom prst="rect">
             <a:avLst/>
           </a:prstGeom>
         </p:spPr>
       </p:pic>
-      <p:sp>
-        <p:nvSpPr>
-          <p:cNvPr id="4" name="TextBox 3"/>
-          <p:cNvSpPr txBox="1"/>
-          <p:nvPr/>
-        </p:nvSpPr>
-        <p:spPr>
-          <a:xfrm>
-            <a:off x="502920" y="5532120"/>
-            <a:ext cx="3200400" cy="566928"/>
-          </a:xfrm>
-          <a:prstGeom prst="rect">
-            <a:avLst/>
-          </a:prstGeom>
-          <a:noFill/>
-        </p:spPr>
-        <p:txBody>
-          <a:bodyPr wrap="square" lIns="0" rIns="0" tIns="0" bIns="0">
-            <a:spAutoFit/>
-          </a:bodyPr>
-          <a:lstStyle/>
-          <a:p>
-            <a:pPr>
-              <a:lnSpc>
-                <a:spcPct val="125000"/>
-              </a:lnSpc>
-              <a:spcAft>
-                <a:spcPts val="1000"/>
-              </a:spcAft>
-            </a:pPr>
-            <a:r>
-              <a:rPr sz="1800" b="0">
-                <a:solidFill>
-                  <a:srgbClr val="1C3177"/>
-                </a:solidFill>
-                <a:latin typeface="Yu Gothic"/>
-                <a:ea typeface="Yu Gothic"/>
-                <a:cs typeface="Yu Gothic"/>
-              </a:rPr>
-              <a:t>キュレット径 ~100 µm、試料は pL。</a:t>
-            </a:r>
-          </a:p>
-        </p:txBody>
-      </p:sp>
       <p:graphicFrame>
         <p:nvGraphicFramePr>
           <p:cNvPr id="5" name="Table 4"/>
@@ -9791,8 +9626,8 @@
           <p:nvPr/>
         </p:nvGraphicFramePr>
         <p:xfrm>
-          <a:off x="4069080" y="1188720"/>
-          <a:ext cx="4206240" cy="2103120"/>
+          <a:off x="4663440" y="1463040"/>
+          <a:ext cx="5669280" cy="2103120"/>
         </p:xfrm>
         <a:graphic>
           <a:graphicData uri="http://schemas.openxmlformats.org/drawingml/2006/table">
@@ -9801,9 +9636,9 @@
                 <a:tableStyleId>{5C22544A-7EE6-4342-B048-85BDC9FD1C3A}</a:tableStyleId>
               </a:tblPr>
               <a:tblGrid>
-                <a:gridCol w="1460500"/>
-                <a:gridCol w="1308100"/>
-                <a:gridCol w="1435100"/>
+                <a:gridCol w="2032000"/>
+                <a:gridCol w="1778000"/>
+                <a:gridCol w="1854200"/>
               </a:tblGrid>
               <a:tr h="420624">
                 <a:tc>
@@ -10163,223 +9998,6 @@
       </p:graphicFrame>
       <p:sp>
         <p:nvSpPr>
-          <p:cNvPr id="6" name="TextBox 5"/>
-          <p:cNvSpPr txBox="1"/>
-          <p:nvPr/>
-        </p:nvSpPr>
-        <p:spPr>
-          <a:xfrm>
-            <a:off x="4069080" y="3611880"/>
-            <a:ext cx="3977639" cy="1828800"/>
-          </a:xfrm>
-          <a:prstGeom prst="rect">
-            <a:avLst/>
-          </a:prstGeom>
-          <a:noFill/>
-        </p:spPr>
-        <p:txBody>
-          <a:bodyPr wrap="square" lIns="0" rIns="0" tIns="0" bIns="0">
-            <a:spAutoFit/>
-          </a:bodyPr>
-          <a:lstStyle/>
-          <a:p>
-            <a:pPr>
-              <a:lnSpc>
-                <a:spcPct val="125000"/>
-              </a:lnSpc>
-              <a:spcAft>
-                <a:spcPts val="1000"/>
-              </a:spcAft>
-            </a:pPr>
-            <a:r>
-              <a:rPr sz="1800" b="0">
-                <a:solidFill>
-                  <a:srgbClr val="1C3177"/>
-                </a:solidFill>
-                <a:latin typeface="Yu Gothic"/>
-                <a:ea typeface="Yu Gothic"/>
-                <a:cs typeface="Yu Gothic"/>
-              </a:rPr>
-              <a:t>最高の T</a:t>
-            </a:r>
-            <a:r>
-              <a:rPr sz="1800" b="0" baseline="-25000">
-                <a:solidFill>
-                  <a:srgbClr val="1C3177"/>
-                </a:solidFill>
-                <a:latin typeface="Yu Gothic"/>
-                <a:ea typeface="Yu Gothic"/>
-                <a:cs typeface="Yu Gothic"/>
-              </a:rPr>
-              <a:t>c</a:t>
-            </a:r>
-            <a:r>
-              <a:rPr sz="1800" b="1">
-                <a:solidFill>
-                  <a:srgbClr val="1C3177"/>
-                </a:solidFill>
-                <a:latin typeface="Yu Gothic"/>
-                <a:ea typeface="Yu Gothic"/>
-                <a:cs typeface="Yu Gothic"/>
-              </a:rPr>
-              <a:t> は最高の圧力にはない。</a:t>
-            </a:r>
-          </a:p>
-          <a:p>
-            <a:pPr>
-              <a:lnSpc>
-                <a:spcPct val="125000"/>
-              </a:lnSpc>
-              <a:spcAft>
-                <a:spcPts val="1000"/>
-              </a:spcAft>
-            </a:pPr>
-            <a:r>
-              <a:rPr sz="1800" b="0">
-                <a:solidFill>
-                  <a:srgbClr val="1C3177"/>
-                </a:solidFill>
-                <a:latin typeface="Yu Gothic"/>
-                <a:ea typeface="Yu Gothic"/>
-                <a:cs typeface="Yu Gothic"/>
-              </a:rPr>
-              <a:t>実験の現実味がある超水素化物は 100 GPa 前後に集中する。よく特性の分かった DAC で届く圧力帯である。</a:t>
-            </a:r>
-          </a:p>
-        </p:txBody>
-      </p:sp>
-      <p:sp>
-        <p:nvSpPr>
-          <p:cNvPr id="7" name="TextBox 6"/>
-          <p:cNvSpPr txBox="1"/>
-          <p:nvPr/>
-        </p:nvSpPr>
-        <p:spPr>
-          <a:xfrm>
-            <a:off x="8366760" y="1188720"/>
-            <a:ext cx="3337560" cy="4572000"/>
-          </a:xfrm>
-          <a:prstGeom prst="rect">
-            <a:avLst/>
-          </a:prstGeom>
-          <a:noFill/>
-        </p:spPr>
-        <p:txBody>
-          <a:bodyPr wrap="square" lIns="0" rIns="0" tIns="0" bIns="0">
-            <a:spAutoFit/>
-          </a:bodyPr>
-          <a:lstStyle/>
-          <a:p>
-            <a:pPr>
-              <a:lnSpc>
-                <a:spcPct val="125000"/>
-              </a:lnSpc>
-              <a:spcAft>
-                <a:spcPts val="1000"/>
-              </a:spcAft>
-            </a:pPr>
-            <a:r>
-              <a:rPr sz="1800" b="1">
-                <a:solidFill>
-                  <a:srgbClr val="1C3177"/>
-                </a:solidFill>
-                <a:latin typeface="Yu Gothic"/>
-                <a:ea typeface="Yu Gothic"/>
-                <a:cs typeface="Yu Gothic"/>
-              </a:rPr>
-              <a:t>試料が小さすぎる。</a:t>
-            </a:r>
-            <a:r>
-              <a:rPr sz="1800" b="0">
-                <a:solidFill>
-                  <a:srgbClr val="1C3177"/>
-                </a:solidFill>
-                <a:latin typeface="Yu Gothic"/>
-                <a:ea typeface="Yu Gothic"/>
-                <a:cs typeface="Yu Gothic"/>
-              </a:rPr>
-              <a:t>数十 µm・pL の試料の磁化を、バルク測定でアンビルとガスケットの背景から分離することはできない。</a:t>
-            </a:r>
-          </a:p>
-          <a:p>
-            <a:pPr>
-              <a:lnSpc>
-                <a:spcPct val="125000"/>
-              </a:lnSpc>
-              <a:spcAft>
-                <a:spcPts val="1000"/>
-              </a:spcAft>
-            </a:pPr>
-            <a:r>
-              <a:rPr sz="1800" b="1">
-                <a:solidFill>
-                  <a:srgbClr val="1C3177"/>
-                </a:solidFill>
-                <a:latin typeface="Yu Gothic"/>
-                <a:ea typeface="Yu Gothic"/>
-                <a:cs typeface="Yu Gothic"/>
-              </a:rPr>
-              <a:t>抵抗の落下だけでは決着しない。</a:t>
-            </a:r>
-            <a:r>
-              <a:rPr sz="1800" b="0">
-                <a:solidFill>
-                  <a:srgbClr val="1C3177"/>
-                </a:solidFill>
-                <a:latin typeface="Yu Gothic"/>
-                <a:ea typeface="Yu Gothic"/>
-                <a:cs typeface="Yu Gothic"/>
-              </a:rPr>
-              <a:t>この分野は繰り返しそれを経験してきた。必要なのは磁束排除そのものの観測である。</a:t>
-            </a:r>
-          </a:p>
-          <a:p>
-            <a:pPr>
-              <a:lnSpc>
-                <a:spcPct val="125000"/>
-              </a:lnSpc>
-              <a:spcAft>
-                <a:spcPts val="1000"/>
-              </a:spcAft>
-            </a:pPr>
-            <a:r>
-              <a:rPr sz="1800" b="0">
-                <a:solidFill>
-                  <a:srgbClr val="1C3177"/>
-                </a:solidFill>
-                <a:latin typeface="Yu Gothic"/>
-                <a:ea typeface="Yu Gothic"/>
-                <a:cs typeface="Yu Gothic"/>
-              </a:rPr>
-              <a:t>だから決着をつける測定は、</a:t>
-            </a:r>
-            <a:r>
-              <a:rPr sz="1800" b="1">
-                <a:solidFill>
-                  <a:srgbClr val="1C3177"/>
-                </a:solidFill>
-                <a:latin typeface="Yu Gothic"/>
-                <a:ea typeface="Yu Gothic"/>
-                <a:cs typeface="Yu Gothic"/>
-              </a:rPr>
-              <a:t>局所・空間分解された磁気測定</a:t>
-            </a:r>
-            <a:r>
-              <a:rPr sz="1800" b="0">
-                <a:solidFill>
-                  <a:srgbClr val="1C3177"/>
-                </a:solidFill>
-                <a:latin typeface="Yu Gothic"/>
-                <a:ea typeface="Yu Gothic"/>
-                <a:cs typeface="Yu Gothic"/>
-              </a:rPr>
-              <a:t>になった。</a:t>
-            </a:r>
-          </a:p>
-        </p:txBody>
-      </p:sp>
-      <p:sp>
-        <p:nvSpPr>
           <p:cNvPr id="8" name="TextBox 7"/>
           <p:cNvSpPr txBox="1"/>
           <p:nvPr/>
@@ -10418,6 +10036,60 @@
                 <a:cs typeface="Yu Gothic"/>
               </a:rPr>
               <a:t>Bhattacharyya, PhD thesis (2022) Fig. 2.2; Drozdov, Nature 525, 73 (2015); 569, 528 (2019); Salke, Nat. Commun. 10, 4453 (2019); Bi, ibid. 13, 5952 (2022).</a:t>
+            </a:r>
+          </a:p>
+        </p:txBody>
+      </p:sp>
+      <p:sp>
+        <p:nvSpPr>
+          <p:cNvPr id="90" name="BottomNote"/>
+          <p:cNvSpPr txBox="1"/>
+          <p:nvPr/>
+        </p:nvSpPr>
+        <p:spPr>
+          <a:xfrm>
+            <a:off x="502920" y="5623560"/>
+            <a:ext cx="11192256" cy="566928"/>
+          </a:xfrm>
+          <a:prstGeom prst="rect"/>
+          <a:noFill/>
+        </p:spPr>
+        <p:txBody>
+          <a:bodyPr wrap="square" lIns="0" rIns="0" tIns="0" bIns="0" anchor="ctr"/>
+          <a:lstStyle/>
+          <a:p>
+            <a:r>
+              <a:rPr sz="2600" b="0">
+                <a:solidFill>
+                  <a:srgbClr val="1C3177"/>
+                </a:solidFill>
+                <a:latin typeface="Yu Gothic"/>
+                <a:ea typeface="Yu Gothic"/>
+                <a:cs typeface="Yu Gothic"/>
+              </a:rPr>
+              <a:t>pL の試料の決着をつけるのは、</a:t>
+            </a:r>
+            <a:r>
+              <a:rPr sz="2600" b="1">
+                <a:solidFill>
+                  <a:srgbClr val="1C3177"/>
+                </a:solidFill>
+                <a:latin typeface="Yu Gothic"/>
+                <a:ea typeface="Yu Gothic"/>
+                <a:cs typeface="Yu Gothic"/>
+              </a:rPr>
+              <a:t>局所・空間分解された磁気測定</a:t>
+            </a:r>
+            <a:r>
+              <a:rPr sz="2600" b="0">
+                <a:solidFill>
+                  <a:srgbClr val="1C3177"/>
+                </a:solidFill>
+                <a:latin typeface="Yu Gothic"/>
+                <a:ea typeface="Yu Gothic"/>
+                <a:cs typeface="Yu Gothic"/>
+              </a:rPr>
+              <a:t>である。</a:t>
             </a:r>
           </a:p>
         </p:txBody>
@@ -10485,8 +10157,8 @@
         </p:blipFill>
         <p:spPr>
           <a:xfrm>
-            <a:off x="640080" y="1188720"/>
-            <a:ext cx="1783080" cy="2026623"/>
+            <a:off x="548640" y="1325880"/>
+            <a:ext cx="2404872" cy="2743200"/>
           </a:xfrm>
           <a:prstGeom prst="rect">
             <a:avLst/>
@@ -10509,8 +10181,8 @@
         </p:blipFill>
         <p:spPr>
           <a:xfrm>
-            <a:off x="2606040" y="1298448"/>
-            <a:ext cx="5257800" cy="1983744"/>
+            <a:off x="3154680" y="1371600"/>
+            <a:ext cx="7095744" cy="2679192"/>
           </a:xfrm>
           <a:prstGeom prst="rect">
             <a:avLst/>
@@ -10519,79 +10191,13 @@
       </p:pic>
       <p:sp>
         <p:nvSpPr>
-          <p:cNvPr id="5" name="TextBox 4"/>
-          <p:cNvSpPr txBox="1"/>
-          <p:nvPr/>
-        </p:nvSpPr>
-        <p:spPr>
-          <a:xfrm>
-            <a:off x="502920" y="3520440"/>
-            <a:ext cx="7406640" cy="868680"/>
-          </a:xfrm>
-          <a:prstGeom prst="rect">
-            <a:avLst/>
-          </a:prstGeom>
-          <a:noFill/>
-        </p:spPr>
-        <p:txBody>
-          <a:bodyPr wrap="square" lIns="0" rIns="0" tIns="0" bIns="0">
-            <a:spAutoFit/>
-          </a:bodyPr>
-          <a:lstStyle/>
-          <a:p>
-            <a:pPr>
-              <a:lnSpc>
-                <a:spcPct val="125000"/>
-              </a:lnSpc>
-              <a:spcAft>
-                <a:spcPts val="1000"/>
-              </a:spcAft>
-            </a:pPr>
-            <a:r>
-              <a:rPr sz="1800" b="0">
-                <a:solidFill>
-                  <a:srgbClr val="1C3177"/>
-                </a:solidFill>
-                <a:latin typeface="Yu Gothic"/>
-                <a:ea typeface="Yu Gothic"/>
-                <a:cs typeface="Yu Gothic"/>
-              </a:rPr>
-              <a:t xml:space="preserve">キュレット面の 50 nm 下の NV が、CeH₉ 上で </a:t>
-            </a:r>
-            <a:r>
-              <a:rPr sz="1800" b="1">
-                <a:solidFill>
-                  <a:srgbClr val="1C3177"/>
-                </a:solidFill>
-                <a:latin typeface="Yu Gothic"/>
-                <a:ea typeface="Yu Gothic"/>
-                <a:cs typeface="Yu Gothic"/>
-              </a:rPr>
-              <a:t>B/H = 0.67</a:t>
-            </a:r>
-            <a:r>
-              <a:rPr sz="1800" b="0">
-                <a:solidFill>
-                  <a:srgbClr val="1C3177"/>
-                </a:solidFill>
-                <a:latin typeface="Yu Gothic"/>
-                <a:ea typeface="Yu Gothic"/>
-                <a:cs typeface="Yu Gothic"/>
-              </a:rPr>
-              <a:t xml:space="preserve"> の局所磁束排除を ~10 µm の不均一まで捉えている。</a:t>
-            </a:r>
-          </a:p>
-        </p:txBody>
-      </p:sp>
-      <p:sp>
-        <p:nvSpPr>
           <p:cNvPr id="6" name="Rectangle 5"/>
           <p:cNvSpPr/>
           <p:nvPr/>
         </p:nvSpPr>
         <p:spPr>
           <a:xfrm>
-            <a:off x="502920" y="4526280"/>
+            <a:off x="548640" y="4297680"/>
             <a:ext cx="4846320" cy="868680"/>
           </a:xfrm>
           <a:prstGeom prst="rect">
@@ -10662,14 +10268,14 @@
       </p:sp>
       <p:sp>
         <p:nvSpPr>
-          <p:cNvPr id="7" name="TextBox 6"/>
+          <p:cNvPr id="8" name="TextBox 7"/>
           <p:cNvSpPr txBox="1"/>
           <p:nvPr/>
         </p:nvSpPr>
         <p:spPr>
           <a:xfrm>
-            <a:off x="5669280" y="4526280"/>
-            <a:ext cx="2194560" cy="914400"/>
+            <a:off x="5760720" y="4069080"/>
+            <a:ext cx="5120640" cy="1325880"/>
           </a:xfrm>
           <a:prstGeom prst="rect">
             <a:avLst/>
@@ -10691,7 +10297,7 @@
               </a:spcAft>
             </a:pPr>
             <a:r>
-              <a:rPr sz="1800" b="0">
+              <a:rPr sz="3400" b="1">
                 <a:solidFill>
                   <a:srgbClr val="1C3177"/>
                 </a:solidFill>
@@ -10699,32 +10305,20 @@
                 <a:ea typeface="Yu Gothic"/>
                 <a:cs typeface="Yu Gothic"/>
               </a:rPr>
-              <a:t>マップは ODMR スペクトルのラスタである。</a:t>
-            </a:r>
-          </a:p>
-        </p:txBody>
-      </p:sp>
-      <p:sp>
-        <p:nvSpPr>
-          <p:cNvPr id="8" name="TextBox 7"/>
-          <p:cNvSpPr txBox="1"/>
-          <p:nvPr/>
-        </p:nvSpPr>
-        <p:spPr>
-          <a:xfrm>
-            <a:off x="8138159" y="1325880"/>
-            <a:ext cx="3977639" cy="4572000"/>
-          </a:xfrm>
-          <a:prstGeom prst="rect">
-            <a:avLst/>
-          </a:prstGeom>
-          <a:noFill/>
-        </p:spPr>
-        <p:txBody>
-          <a:bodyPr wrap="square" lIns="0" rIns="0" tIns="0" bIns="0">
-            <a:spAutoFit/>
-          </a:bodyPr>
-          <a:lstStyle/>
+              <a:t>×2.5</a:t>
+            </a:r>
+            <a:r>
+              <a:rPr sz="1800" b="0">
+                <a:solidFill>
+                  <a:srgbClr val="1C3177"/>
+                </a:solidFill>
+                <a:latin typeface="Yu Gothic"/>
+                <a:ea typeface="Yu Gothic"/>
+                <a:cs typeface="Yu Gothic"/>
+              </a:rPr>
+              <a:t>  感度</a:t>
+            </a:r>
+          </a:p>
           <a:p>
             <a:pPr>
               <a:lnSpc>
@@ -10735,135 +10329,6 @@
               </a:spcAft>
             </a:pPr>
             <a:r>
-              <a:rPr sz="1800" b="1">
-                <a:solidFill>
-                  <a:srgbClr val="1C3177"/>
-                </a:solidFill>
-                <a:latin typeface="Yu Gothic"/>
-                <a:ea typeface="Yu Gothic"/>
-                <a:cs typeface="Yu Gothic"/>
-              </a:rPr>
-              <a:t>科学的な中身はマップにある。</a:t>
-            </a:r>
-            <a:r>
-              <a:rPr sz="1800" b="0">
-                <a:solidFill>
-                  <a:srgbClr val="1C3177"/>
-                </a:solidFill>
-                <a:latin typeface="Yu Gothic"/>
-                <a:ea typeface="Yu Gothic"/>
-                <a:cs typeface="Yu Gothic"/>
-              </a:rPr>
-              <a:t>遮蔽場のテクスチャ、捕捉磁束の幾何、そしてその T</a:t>
-            </a:r>
-            <a:r>
-              <a:rPr sz="1800" b="0" baseline="-25000">
-                <a:solidFill>
-                  <a:srgbClr val="1C3177"/>
-                </a:solidFill>
-                <a:latin typeface="Yu Gothic"/>
-                <a:ea typeface="Yu Gothic"/>
-                <a:cs typeface="Yu Gothic"/>
-              </a:rPr>
-              <a:t>c</a:t>
-            </a:r>
-            <a:r>
-              <a:rPr sz="1800" b="0">
-                <a:solidFill>
-                  <a:srgbClr val="1C3177"/>
-                </a:solidFill>
-                <a:latin typeface="Yu Gothic"/>
-                <a:ea typeface="Yu Gothic"/>
-                <a:cs typeface="Yu Gothic"/>
-              </a:rPr>
-              <a:t> 近傍・圧力に沿った発展。</a:t>
-            </a:r>
-          </a:p>
-          <a:p>
-            <a:pPr>
-              <a:lnSpc>
-                <a:spcPct val="125000"/>
-              </a:lnSpc>
-              <a:spcAft>
-                <a:spcPts val="1000"/>
-              </a:spcAft>
-            </a:pPr>
-            <a:r>
-              <a:rPr sz="1800" b="0">
-                <a:solidFill>
-                  <a:srgbClr val="1C3177"/>
-                </a:solidFill>
-                <a:latin typeface="Yu Gothic"/>
-                <a:ea typeface="Yu Gothic"/>
-                <a:cs typeface="Yu Gothic"/>
-              </a:rPr>
-              <a:t>1 回のロードに数週間、1 回のアンビル破損で全損する領域では、</a:t>
-            </a:r>
-            <a:r>
-              <a:rPr sz="1800" b="1">
-                <a:solidFill>
-                  <a:srgbClr val="1C3177"/>
-                </a:solidFill>
-                <a:latin typeface="Yu Gothic"/>
-                <a:ea typeface="Yu Gothic"/>
-                <a:cs typeface="Yu Gothic"/>
-              </a:rPr>
-              <a:t>感度は空間分解能・視野・到達できる (P, T) 点数を買う通貨</a:t>
-            </a:r>
-            <a:r>
-              <a:rPr sz="1800" b="0">
-                <a:solidFill>
-                  <a:srgbClr val="1C3177"/>
-                </a:solidFill>
-                <a:latin typeface="Yu Gothic"/>
-                <a:ea typeface="Yu Gothic"/>
-                <a:cs typeface="Yu Gothic"/>
-              </a:rPr>
-              <a:t>である。</a:t>
-            </a:r>
-          </a:p>
-          <a:p>
-            <a:pPr>
-              <a:lnSpc>
-                <a:spcPct val="125000"/>
-              </a:lnSpc>
-              <a:spcAft>
-                <a:spcPts val="1000"/>
-              </a:spcAft>
-            </a:pPr>
-            <a:r>
-              <a:rPr sz="3400" b="1">
-                <a:solidFill>
-                  <a:srgbClr val="1C3177"/>
-                </a:solidFill>
-                <a:latin typeface="Yu Gothic"/>
-                <a:ea typeface="Yu Gothic"/>
-                <a:cs typeface="Yu Gothic"/>
-              </a:rPr>
-              <a:t>×2.5</a:t>
-            </a:r>
-            <a:r>
-              <a:rPr sz="1800" b="0">
-                <a:solidFill>
-                  <a:srgbClr val="1C3177"/>
-                </a:solidFill>
-                <a:latin typeface="Yu Gothic"/>
-                <a:ea typeface="Yu Gothic"/>
-                <a:cs typeface="Yu Gothic"/>
-              </a:rPr>
-              <a:t>  感度</a:t>
-            </a:r>
-          </a:p>
-          <a:p>
-            <a:pPr>
-              <a:lnSpc>
-                <a:spcPct val="125000"/>
-              </a:lnSpc>
-              <a:spcAft>
-                <a:spcPts val="1000"/>
-              </a:spcAft>
-            </a:pPr>
-            <a:r>
               <a:rPr sz="3400" b="1">
                 <a:solidFill>
                   <a:srgbClr val="1C3177"/>
@@ -10883,7 +10348,7 @@
                 <a:ea typeface="Yu Gothic"/>
                 <a:cs typeface="Yu Gothic"/>
               </a:rPr>
-              <a:t>  マップ 1 枚の取得時間</a:t>
+              <a:t>  マップ取得時間</a:t>
             </a:r>
           </a:p>
         </p:txBody>
@@ -10928,6 +10393,60 @@
                 <a:cs typeface="Yu Gothic"/>
               </a:rPr>
               <a:t>Bhattacharyya, PhD thesis (2022) Fig. 7.2, 7.8; Bhattacharyya et al., Nature 627, 73 (2024); Barry et al., Rev. Mod. Phys. 92, 015004 (2020).</a:t>
+            </a:r>
+          </a:p>
+        </p:txBody>
+      </p:sp>
+      <p:sp>
+        <p:nvSpPr>
+          <p:cNvPr id="90" name="BottomNote"/>
+          <p:cNvSpPr txBox="1"/>
+          <p:nvPr/>
+        </p:nvSpPr>
+        <p:spPr>
+          <a:xfrm>
+            <a:off x="502920" y="5623560"/>
+            <a:ext cx="11192256" cy="566928"/>
+          </a:xfrm>
+          <a:prstGeom prst="rect"/>
+          <a:noFill/>
+        </p:spPr>
+        <p:txBody>
+          <a:bodyPr wrap="square" lIns="0" rIns="0" tIns="0" bIns="0" anchor="ctr"/>
+          <a:lstStyle/>
+          <a:p>
+            <a:r>
+              <a:rPr sz="2600" b="0">
+                <a:solidFill>
+                  <a:srgbClr val="1C3177"/>
+                </a:solidFill>
+                <a:latin typeface="Yu Gothic"/>
+                <a:ea typeface="Yu Gothic"/>
+                <a:cs typeface="Yu Gothic"/>
+              </a:rPr>
+              <a:t>感度は、</a:t>
+            </a:r>
+            <a:r>
+              <a:rPr sz="2600" b="1">
+                <a:solidFill>
+                  <a:srgbClr val="1C3177"/>
+                </a:solidFill>
+                <a:latin typeface="Yu Gothic"/>
+                <a:ea typeface="Yu Gothic"/>
+                <a:cs typeface="Yu Gothic"/>
+              </a:rPr>
+              <a:t>分解能・視野・到達できる (P, T) 点数を買う通貨</a:t>
+            </a:r>
+            <a:r>
+              <a:rPr sz="2600" b="0">
+                <a:solidFill>
+                  <a:srgbClr val="1C3177"/>
+                </a:solidFill>
+                <a:latin typeface="Yu Gothic"/>
+                <a:ea typeface="Yu Gothic"/>
+                <a:cs typeface="Yu Gothic"/>
+              </a:rPr>
+              <a:t>である。</a:t>
             </a:r>
           </a:p>
         </p:txBody>
@@ -10995,144 +10514,14 @@
         </p:blipFill>
         <p:spPr>
           <a:xfrm>
-            <a:off x="411480" y="1298448"/>
-            <a:ext cx="7040880" cy="3931920"/>
+            <a:off x="502920" y="1207008"/>
+            <a:ext cx="10607040" cy="4160520"/>
           </a:xfrm>
           <a:prstGeom prst="rect">
             <a:avLst/>
           </a:prstGeom>
         </p:spPr>
       </p:pic>
-      <p:sp>
-        <p:nvSpPr>
-          <p:cNvPr id="4" name="TextBox 3"/>
-          <p:cNvSpPr txBox="1"/>
-          <p:nvPr/>
-        </p:nvSpPr>
-        <p:spPr>
-          <a:xfrm>
-            <a:off x="7726679" y="1371600"/>
-            <a:ext cx="3977639" cy="4160520"/>
-          </a:xfrm>
-          <a:prstGeom prst="rect">
-            <a:avLst/>
-          </a:prstGeom>
-          <a:noFill/>
-        </p:spPr>
-        <p:txBody>
-          <a:bodyPr wrap="square" lIns="0" rIns="0" tIns="0" bIns="0">
-            <a:spAutoFit/>
-          </a:bodyPr>
-          <a:lstStyle/>
-          <a:p>
-            <a:pPr>
-              <a:lnSpc>
-                <a:spcPct val="125000"/>
-              </a:lnSpc>
-              <a:spcAft>
-                <a:spcPts val="1000"/>
-              </a:spcAft>
-            </a:pPr>
-            <a:r>
-              <a:rPr sz="1800" b="0">
-                <a:solidFill>
-                  <a:srgbClr val="1C3177"/>
-                </a:solidFill>
-                <a:latin typeface="Yu Gothic"/>
-                <a:ea typeface="Yu Gothic"/>
-                <a:cs typeface="Yu Gothic"/>
-              </a:rPr>
-              <a:t xml:space="preserve">ZPL が </a:t>
-            </a:r>
-            <a:r>
-              <a:rPr sz="1800" b="1">
-                <a:solidFill>
-                  <a:srgbClr val="1C3177"/>
-                </a:solidFill>
-                <a:latin typeface="Yu Gothic"/>
-                <a:ea typeface="Yu Gothic"/>
-                <a:cs typeface="Yu Gothic"/>
-              </a:rPr>
-              <a:t>+0.40 eV</a:t>
-            </a:r>
-            <a:r>
-              <a:rPr sz="1800" b="0">
-                <a:solidFill>
-                  <a:srgbClr val="1C3177"/>
-                </a:solidFill>
-                <a:latin typeface="Yu Gothic"/>
-                <a:ea typeface="Yu Gothic"/>
-                <a:cs typeface="Yu Gothic"/>
-              </a:rPr>
-              <a:t xml:space="preserve"> 青方偏移し、Huang–Rhys 因子が 3.08 → 4.61 に増える。</a:t>
-            </a:r>
-          </a:p>
-          <a:p>
-            <a:pPr>
-              <a:lnSpc>
-                <a:spcPct val="125000"/>
-              </a:lnSpc>
-              <a:spcAft>
-                <a:spcPts val="1000"/>
-              </a:spcAft>
-            </a:pPr>
-            <a:r>
-              <a:rPr sz="1800" b="0">
-                <a:solidFill>
-                  <a:srgbClr val="1C3177"/>
-                </a:solidFill>
-                <a:latin typeface="Yu Gothic"/>
-                <a:ea typeface="Yu Gothic"/>
-                <a:cs typeface="Yu Gothic"/>
-              </a:rPr>
-              <a:t xml:space="preserve">IP(³A₂) は </a:t>
-            </a:r>
-            <a:r>
-              <a:rPr sz="1800" b="1">
-                <a:solidFill>
-                  <a:srgbClr val="1C3177"/>
-                </a:solidFill>
-                <a:latin typeface="Yu Gothic"/>
-                <a:ea typeface="Yu Gothic"/>
-                <a:cs typeface="Yu Gothic"/>
-              </a:rPr>
-              <a:t>3.06 eV = 405 nm</a:t>
-            </a:r>
-            <a:r>
-              <a:rPr sz="1800" b="0">
-                <a:solidFill>
-                  <a:srgbClr val="1C3177"/>
-                </a:solidFill>
-                <a:latin typeface="Yu Gothic"/>
-                <a:ea typeface="Yu Gothic"/>
-                <a:cs typeface="Yu Gothic"/>
-              </a:rPr>
-              <a:t>。これより青は NV⁻ を NV⁰ に変える。</a:t>
-            </a:r>
-          </a:p>
-          <a:p>
-            <a:pPr>
-              <a:lnSpc>
-                <a:spcPct val="125000"/>
-              </a:lnSpc>
-              <a:spcAft>
-                <a:spcPts val="1000"/>
-              </a:spcAft>
-            </a:pPr>
-            <a:r>
-              <a:rPr sz="1800" b="0">
-                <a:solidFill>
-                  <a:srgbClr val="1C3177"/>
-                </a:solidFill>
-                <a:latin typeface="Yu Gothic"/>
-                <a:ea typeface="Yu Gothic"/>
-                <a:cs typeface="Yu Gothic"/>
-              </a:rPr>
-              <a:t>η ∝ Δν/(C√R)。C に線形、光子レートに √。</a:t>
-            </a:r>
-          </a:p>
-        </p:txBody>
-      </p:sp>
       <p:sp>
         <p:nvSpPr>
           <p:cNvPr id="5" name="TextBox 4"/>
@@ -11185,28 +10574,16 @@
         </p:nvSpPr>
         <p:spPr>
           <a:xfrm>
-            <a:off x="502920" y="5650992"/>
+            <a:off x="502920" y="5623560"/>
             <a:ext cx="11192256" cy="566928"/>
           </a:xfrm>
-          <a:prstGeom prst="rect">
-            <a:avLst/>
-          </a:prstGeom>
+          <a:prstGeom prst="rect"/>
           <a:noFill/>
         </p:spPr>
         <p:txBody>
-          <a:bodyPr wrap="square" lIns="0" rIns="0" tIns="0" bIns="0" anchor="ctr">
-            <a:spAutoFit/>
-          </a:bodyPr>
+          <a:bodyPr wrap="square" lIns="0" rIns="0" tIns="0" bIns="0" anchor="ctr"/>
           <a:lstStyle/>
           <a:p>
-            <a:pPr>
-              <a:lnSpc>
-                <a:spcPct val="125000"/>
-              </a:lnSpc>
-              <a:spcAft>
-                <a:spcPts val="0"/>
-              </a:spcAft>
-            </a:pPr>
             <a:r>
               <a:rPr sz="2800" b="0">
                 <a:solidFill>
@@ -11306,464 +10683,32 @@
         </p:blipFill>
         <p:spPr>
           <a:xfrm>
-            <a:off x="411480" y="1298448"/>
-            <a:ext cx="7040880" cy="3931920"/>
+            <a:off x="502920" y="1207008"/>
+            <a:ext cx="10607040" cy="4160520"/>
           </a:xfrm>
           <a:prstGeom prst="rect">
             <a:avLst/>
           </a:prstGeom>
         </p:spPr>
       </p:pic>
-      <p:graphicFrame>
-        <p:nvGraphicFramePr>
-          <p:cNvPr id="4" name="Table 3"/>
-          <p:cNvGraphicFramePr>
-            <a:graphicFrameLocks noGrp="1"/>
-          </p:cNvGraphicFramePr>
-          <p:nvPr/>
-        </p:nvGraphicFramePr>
-        <p:xfrm>
-          <a:off x="7726679" y="1298448"/>
-          <a:ext cx="3977640" cy="1737360"/>
-        </p:xfrm>
-        <a:graphic>
-          <a:graphicData uri="http://schemas.openxmlformats.org/drawingml/2006/table">
-            <a:tbl>
-              <a:tblPr firstRow="1">
-                <a:tableStyleId>{5C22544A-7EE6-4342-B048-85BDC9FD1C3A}</a:tableStyleId>
-              </a:tblPr>
-              <a:tblGrid>
-                <a:gridCol w="1234440"/>
-                <a:gridCol w="1051560"/>
-                <a:gridCol w="1691640"/>
-              </a:tblGrid>
-              <a:tr h="434340">
-                <a:tc>
-                  <a:txBody>
-                    <a:bodyPr wrap="square"/>
-                    <a:lstStyle/>
-                    <a:p>
-                      <a:r>
-                        <a:rPr sz="1800" b="1">
-                          <a:solidFill>
-                            <a:srgbClr val="FFFFFF"/>
-                          </a:solidFill>
-                          <a:latin typeface="Yu Gothic"/>
-                          <a:ea typeface="Yu Gothic"/>
-                          <a:cs typeface="Yu Gothic"/>
-                        </a:rPr>
-                        <a:t>励起線</a:t>
-                      </a:r>
-                    </a:p>
-                  </a:txBody>
-                  <a:tcPr anchor="ctr" marL="73152" marR="73152" marT="36576" marB="36576">
-                    <a:solidFill>
-                      <a:srgbClr val="1C3177"/>
-                    </a:solidFill>
-                  </a:tcPr>
-                </a:tc>
-                <a:tc>
-                  <a:txBody>
-                    <a:bodyPr wrap="square"/>
-                    <a:lstStyle/>
-                    <a:p>
-                      <a:r>
-                        <a:rPr sz="1800" b="0">
-                          <a:solidFill>
-                            <a:srgbClr val="FFFFFF"/>
-                          </a:solidFill>
-                          <a:latin typeface="Yu Gothic"/>
-                          <a:ea typeface="Yu Gothic"/>
-                          <a:cs typeface="Yu Gothic"/>
-                        </a:rPr>
-                        <a:t>感度比</a:t>
-                      </a:r>
-                    </a:p>
-                  </a:txBody>
-                  <a:tcPr anchor="ctr" marL="73152" marR="73152" marT="36576" marB="36576">
-                    <a:solidFill>
-                      <a:srgbClr val="1C3177"/>
-                    </a:solidFill>
-                  </a:tcPr>
-                </a:tc>
-                <a:tc>
-                  <a:txBody>
-                    <a:bodyPr wrap="square"/>
-                    <a:lstStyle/>
-                    <a:p>
-                      <a:r>
-                        <a:rPr sz="1800" b="1">
-                          <a:solidFill>
-                            <a:srgbClr val="FFFFFF"/>
-                          </a:solidFill>
-                          <a:latin typeface="Yu Gothic"/>
-                          <a:ea typeface="Yu Gothic"/>
-                          <a:cs typeface="Yu Gothic"/>
-                        </a:rPr>
-                        <a:t/>
-                      </a:r>
-                    </a:p>
-                  </a:txBody>
-                  <a:tcPr anchor="ctr" marL="73152" marR="73152" marT="36576" marB="36576">
-                    <a:solidFill>
-                      <a:srgbClr val="1C3177"/>
-                    </a:solidFill>
-                  </a:tcPr>
-                </a:tc>
-              </a:tr>
-              <a:tr h="434340">
-                <a:tc>
-                  <a:txBody>
-                    <a:bodyPr wrap="square"/>
-                    <a:lstStyle/>
-                    <a:p>
-                      <a:r>
-                        <a:rPr sz="1800" b="0">
-                          <a:solidFill>
-                            <a:srgbClr val="1C3177"/>
-                          </a:solidFill>
-                          <a:latin typeface="Yu Gothic"/>
-                          <a:ea typeface="Yu Gothic"/>
-                          <a:cs typeface="Yu Gothic"/>
-                        </a:rPr>
-                        <a:t>405 nm</a:t>
-                      </a:r>
-                    </a:p>
-                  </a:txBody>
-                  <a:tcPr anchor="ctr" marL="73152" marR="73152" marT="36576" marB="36576">
-                    <a:noFill/>
-                  </a:tcPr>
-                </a:tc>
-                <a:tc>
-                  <a:txBody>
-                    <a:bodyPr wrap="square"/>
-                    <a:lstStyle/>
-                    <a:p>
-                      <a:r>
-                        <a:rPr sz="1800" b="0">
-                          <a:solidFill>
-                            <a:srgbClr val="1C3177"/>
-                          </a:solidFill>
-                          <a:latin typeface="Yu Gothic"/>
-                          <a:ea typeface="Yu Gothic"/>
-                          <a:cs typeface="Yu Gothic"/>
-                        </a:rPr>
-                        <a:t>3.76</a:t>
-                      </a:r>
-                    </a:p>
-                  </a:txBody>
-                  <a:tcPr anchor="ctr" marL="73152" marR="73152" marT="36576" marB="36576">
-                    <a:noFill/>
-                  </a:tcPr>
-                </a:tc>
-                <a:tc>
-                  <a:txBody>
-                    <a:bodyPr wrap="square"/>
-                    <a:lstStyle/>
-                    <a:p>
-                      <a:r>
-                        <a:rPr sz="1800" b="0">
-                          <a:solidFill>
-                            <a:srgbClr val="1C3177"/>
-                          </a:solidFill>
-                          <a:latin typeface="Yu Gothic"/>
-                          <a:ea typeface="Yu Gothic"/>
-                          <a:cs typeface="Yu Gothic"/>
-                        </a:rPr>
-                        <a:t>イオン化端</a:t>
-                      </a:r>
-                    </a:p>
-                  </a:txBody>
-                  <a:tcPr anchor="ctr" marL="73152" marR="73152" marT="36576" marB="36576">
-                    <a:noFill/>
-                  </a:tcPr>
-                </a:tc>
-              </a:tr>
-              <a:tr h="434340">
-                <a:tc>
-                  <a:txBody>
-                    <a:bodyPr wrap="square"/>
-                    <a:lstStyle/>
-                    <a:p>
-                      <a:r>
-                        <a:rPr sz="1800" b="1">
-                          <a:solidFill>
-                            <a:srgbClr val="1C3177"/>
-                          </a:solidFill>
-                          <a:latin typeface="Yu Gothic"/>
-                          <a:ea typeface="Yu Gothic"/>
-                          <a:cs typeface="Yu Gothic"/>
-                        </a:rPr>
-                        <a:t>473 nm</a:t>
-                      </a:r>
-                    </a:p>
-                  </a:txBody>
-                  <a:tcPr anchor="ctr" marL="73152" marR="73152" marT="36576" marB="36576">
-                    <a:solidFill>
-                      <a:srgbClr val="E8EAF1"/>
-                    </a:solidFill>
-                  </a:tcPr>
-                </a:tc>
-                <a:tc>
-                  <a:txBody>
-                    <a:bodyPr wrap="square"/>
-                    <a:lstStyle/>
-                    <a:p>
-                      <a:r>
-                        <a:rPr sz="1800" b="0">
-                          <a:solidFill>
-                            <a:srgbClr val="1C3177"/>
-                          </a:solidFill>
-                          <a:latin typeface="Yu Gothic"/>
-                          <a:ea typeface="Yu Gothic"/>
-                          <a:cs typeface="Yu Gothic"/>
-                        </a:rPr>
-                        <a:t>1.002</a:t>
-                      </a:r>
-                    </a:p>
-                  </a:txBody>
-                  <a:tcPr anchor="ctr" marL="73152" marR="73152" marT="36576" marB="36576">
-                    <a:solidFill>
-                      <a:srgbClr val="E8EAF1"/>
-                    </a:solidFill>
-                  </a:tcPr>
-                </a:tc>
-                <a:tc>
-                  <a:txBody>
-                    <a:bodyPr wrap="square"/>
-                    <a:lstStyle/>
-                    <a:p>
-                      <a:r>
-                        <a:rPr sz="1800" b="0">
-                          <a:solidFill>
-                            <a:srgbClr val="1C3177"/>
-                          </a:solidFill>
-                          <a:latin typeface="Yu Gothic"/>
-                          <a:ea typeface="Yu Gothic"/>
-                          <a:cs typeface="Yu Gothic"/>
-                        </a:rPr>
-                        <a:t>市販 DPSS</a:t>
-                      </a:r>
-                    </a:p>
-                  </a:txBody>
-                  <a:tcPr anchor="ctr" marL="73152" marR="73152" marT="36576" marB="36576">
-                    <a:solidFill>
-                      <a:srgbClr val="E8EAF1"/>
-                    </a:solidFill>
-                  </a:tcPr>
-                </a:tc>
-              </a:tr>
-              <a:tr h="434340">
-                <a:tc>
-                  <a:txBody>
-                    <a:bodyPr wrap="square"/>
-                    <a:lstStyle/>
-                    <a:p>
-                      <a:r>
-                        <a:rPr sz="1800" b="0">
-                          <a:solidFill>
-                            <a:srgbClr val="1C3177"/>
-                          </a:solidFill>
-                          <a:latin typeface="Yu Gothic"/>
-                          <a:ea typeface="Yu Gothic"/>
-                          <a:cs typeface="Yu Gothic"/>
-                        </a:rPr>
-                        <a:t>532 nm</a:t>
-                      </a:r>
-                    </a:p>
-                  </a:txBody>
-                  <a:tcPr anchor="ctr" marL="73152" marR="73152" marT="36576" marB="36576">
-                    <a:noFill/>
-                  </a:tcPr>
-                </a:tc>
-                <a:tc>
-                  <a:txBody>
-                    <a:bodyPr wrap="square"/>
-                    <a:lstStyle/>
-                    <a:p>
-                      <a:r>
-                        <a:rPr sz="1800" b="0">
-                          <a:solidFill>
-                            <a:srgbClr val="1C3177"/>
-                          </a:solidFill>
-                          <a:latin typeface="Yu Gothic"/>
-                          <a:ea typeface="Yu Gothic"/>
-                          <a:cs typeface="Yu Gothic"/>
-                        </a:rPr>
-                        <a:t>2.53</a:t>
-                      </a:r>
-                    </a:p>
-                  </a:txBody>
-                  <a:tcPr anchor="ctr" marL="73152" marR="73152" marT="36576" marB="36576">
-                    <a:noFill/>
-                  </a:tcPr>
-                </a:tc>
-                <a:tc>
-                  <a:txBody>
-                    <a:bodyPr wrap="square"/>
-                    <a:lstStyle/>
-                    <a:p>
-                      <a:r>
-                        <a:rPr sz="1800" b="0">
-                          <a:solidFill>
-                            <a:srgbClr val="1C3177"/>
-                          </a:solidFill>
-                          <a:latin typeface="Yu Gothic"/>
-                          <a:ea typeface="Yu Gothic"/>
-                          <a:cs typeface="Yu Gothic"/>
-                        </a:rPr>
-                        <a:t>従来の既定</a:t>
-                      </a:r>
-                    </a:p>
-                  </a:txBody>
-                  <a:tcPr anchor="ctr" marL="73152" marR="73152" marT="36576" marB="36576">
-                    <a:noFill/>
-                  </a:tcPr>
-                </a:tc>
-              </a:tr>
-            </a:tbl>
-          </a:graphicData>
-        </a:graphic>
-      </p:graphicFrame>
-      <p:sp>
-        <p:nvSpPr>
-          <p:cNvPr id="5" name="TextBox 4"/>
+      <p:sp>
+        <p:nvSpPr>
+          <p:cNvPr id="90" name="BottomNote"/>
           <p:cNvSpPr txBox="1"/>
           <p:nvPr/>
         </p:nvSpPr>
         <p:spPr>
           <a:xfrm>
-            <a:off x="7726679" y="3246120"/>
-            <a:ext cx="3977639" cy="2286000"/>
+            <a:off x="502920" y="5623560"/>
+            <a:ext cx="11192256" cy="566928"/>
           </a:xfrm>
-          <a:prstGeom prst="rect">
-            <a:avLst/>
-          </a:prstGeom>
+          <a:prstGeom prst="rect"/>
           <a:noFill/>
         </p:spPr>
         <p:txBody>
-          <a:bodyPr wrap="square" lIns="0" rIns="0" tIns="0" bIns="0">
-            <a:spAutoFit/>
-          </a:bodyPr>
+          <a:bodyPr wrap="square" lIns="0" rIns="0" tIns="0" bIns="0" anchor="ctr"/>
           <a:lstStyle/>
           <a:p>
-            <a:pPr>
-              <a:lnSpc>
-                <a:spcPct val="125000"/>
-              </a:lnSpc>
-              <a:spcAft>
-                <a:spcPts val="1000"/>
-              </a:spcAft>
-            </a:pPr>
-            <a:r>
-              <a:rPr sz="1800" b="0">
-                <a:solidFill>
-                  <a:srgbClr val="1C3177"/>
-                </a:solidFill>
-                <a:latin typeface="Yu Gothic"/>
-                <a:ea typeface="Yu Gothic"/>
-                <a:cs typeface="Yu Gothic"/>
-              </a:rPr>
-              <a:t>窓の中に市販線が 3 本 — 457 nm ×1.11、488 nm ×1.05。</a:t>
-            </a:r>
-          </a:p>
-          <a:p>
-            <a:pPr>
-              <a:lnSpc>
-                <a:spcPct val="125000"/>
-              </a:lnSpc>
-              <a:spcAft>
-                <a:spcPts val="1000"/>
-              </a:spcAft>
-            </a:pPr>
-            <a:r>
-              <a:rPr sz="1800" b="0">
-                <a:solidFill>
-                  <a:srgbClr val="1C3177"/>
-                </a:solidFill>
-                <a:latin typeface="Yu Gothic"/>
-                <a:ea typeface="Yu Gothic"/>
-                <a:cs typeface="Yu Gothic"/>
-              </a:rPr>
-              <a:t>λ</a:t>
-            </a:r>
-            <a:r>
-              <a:rPr sz="1800" b="0" baseline="-25000">
-                <a:solidFill>
-                  <a:srgbClr val="1C3177"/>
-                </a:solidFill>
-                <a:latin typeface="Yu Gothic"/>
-                <a:ea typeface="Yu Gothic"/>
-                <a:cs typeface="Yu Gothic"/>
-              </a:rPr>
-              <a:t>opt</a:t>
-            </a:r>
-            <a:r>
-              <a:rPr sz="1800" b="0">
-                <a:solidFill>
-                  <a:srgbClr val="1C3177"/>
-                </a:solidFill>
-                <a:latin typeface="Yu Gothic"/>
-                <a:ea typeface="Yu Gothic"/>
-                <a:cs typeface="Yu Gothic"/>
-              </a:rPr>
-              <a:t xml:space="preserve"> は </a:t>
-            </a:r>
-            <a:r>
-              <a:rPr sz="1800" b="1">
-                <a:solidFill>
-                  <a:srgbClr val="1C3177"/>
-                </a:solidFill>
-                <a:latin typeface="Yu Gothic"/>
-                <a:ea typeface="Yu Gothic"/>
-                <a:cs typeface="Yu Gothic"/>
-              </a:rPr>
-              <a:t>0.4–0.6 nm/GPa</a:t>
-            </a:r>
-            <a:r>
-              <a:rPr sz="1800" b="0">
-                <a:solidFill>
-                  <a:srgbClr val="1C3177"/>
-                </a:solidFill>
-                <a:latin typeface="Yu Gothic"/>
-                <a:ea typeface="Yu Gothic"/>
-                <a:cs typeface="Yu Gothic"/>
-              </a:rPr>
-              <a:t xml:space="preserve"> で動く。100 GPa では 486 nm。</a:t>
-            </a:r>
-          </a:p>
-        </p:txBody>
-      </p:sp>
-      <p:sp>
-        <p:nvSpPr>
-          <p:cNvPr id="90" name="BottomNote"/>
-          <p:cNvSpPr txBox="1"/>
-          <p:nvPr/>
-        </p:nvSpPr>
-        <p:spPr>
-          <a:xfrm>
-            <a:off x="502920" y="5650992"/>
-            <a:ext cx="11192256" cy="566928"/>
-          </a:xfrm>
-          <a:prstGeom prst="rect">
-            <a:avLst/>
-          </a:prstGeom>
-          <a:noFill/>
-        </p:spPr>
-        <p:txBody>
-          <a:bodyPr wrap="square" lIns="0" rIns="0" tIns="0" bIns="0" anchor="ctr">
-            <a:spAutoFit/>
-          </a:bodyPr>
-          <a:lstStyle/>
-          <a:p>
-            <a:pPr>
-              <a:lnSpc>
-                <a:spcPct val="125000"/>
-              </a:lnSpc>
-              <a:spcAft>
-                <a:spcPts val="1000"/>
-              </a:spcAft>
-            </a:pPr>
             <a:r>
               <a:rPr sz="2800" b="0">
                 <a:solidFill>
@@ -11863,145 +10808,14 @@
         </p:blipFill>
         <p:spPr>
           <a:xfrm>
-            <a:off x="411480" y="1225296"/>
-            <a:ext cx="7040880" cy="4069080"/>
+            <a:off x="502920" y="1207008"/>
+            <a:ext cx="10607040" cy="4160520"/>
           </a:xfrm>
           <a:prstGeom prst="rect">
             <a:avLst/>
           </a:prstGeom>
         </p:spPr>
       </p:pic>
-      <p:sp>
-        <p:nvSpPr>
-          <p:cNvPr id="4" name="TextBox 3"/>
-          <p:cNvSpPr txBox="1"/>
-          <p:nvPr/>
-        </p:nvSpPr>
-        <p:spPr>
-          <a:xfrm>
-            <a:off x="7726679" y="1371600"/>
-            <a:ext cx="3977639" cy="4160520"/>
-          </a:xfrm>
-          <a:prstGeom prst="rect">
-            <a:avLst/>
-          </a:prstGeom>
-          <a:noFill/>
-        </p:spPr>
-        <p:txBody>
-          <a:bodyPr wrap="square" lIns="0" rIns="0" tIns="0" bIns="0">
-            <a:spAutoFit/>
-          </a:bodyPr>
-          <a:lstStyle/>
-          <a:p>
-            <a:pPr>
-              <a:lnSpc>
-                <a:spcPct val="125000"/>
-              </a:lnSpc>
-              <a:spcAft>
-                <a:spcPts val="1000"/>
-              </a:spcAft>
-            </a:pPr>
-            <a:r>
-              <a:rPr sz="1800" b="0">
-                <a:solidFill>
-                  <a:srgbClr val="1C3177"/>
-                </a:solidFill>
-                <a:latin typeface="Yu Gothic"/>
-                <a:ea typeface="Yu Gothic"/>
-                <a:cs typeface="Yu Gothic"/>
-              </a:rPr>
-              <a:t>イオン化と再結合はどちらも σ</a:t>
-            </a:r>
-            <a:r>
-              <a:rPr sz="1800" b="0" baseline="-25000">
-                <a:solidFill>
-                  <a:srgbClr val="1C3177"/>
-                </a:solidFill>
-                <a:latin typeface="Yu Gothic"/>
-                <a:ea typeface="Yu Gothic"/>
-                <a:cs typeface="Yu Gothic"/>
-              </a:rPr>
-              <a:t>abs</a:t>
-            </a:r>
-            <a:r>
-              <a:rPr sz="1800" b="0">
-                <a:solidFill>
-                  <a:srgbClr val="1C3177"/>
-                </a:solidFill>
-                <a:latin typeface="Yu Gothic"/>
-                <a:ea typeface="Yu Gothic"/>
-                <a:cs typeface="Yu Gothic"/>
-              </a:rPr>
-              <a:t xml:space="preserve"> に比例し、f₋ から相殺する。f₋ は窓の中で </a:t>
-            </a:r>
-            <a:r>
-              <a:rPr sz="1800" b="1">
-                <a:solidFill>
-                  <a:srgbClr val="1C3177"/>
-                </a:solidFill>
-                <a:latin typeface="Yu Gothic"/>
-                <a:ea typeface="Yu Gothic"/>
-                <a:cs typeface="Yu Gothic"/>
-              </a:rPr>
-              <a:t>0.2% しか動かない</a:t>
-            </a:r>
-            <a:r>
-              <a:rPr sz="1800" b="0">
-                <a:solidFill>
-                  <a:srgbClr val="1C3177"/>
-                </a:solidFill>
-                <a:latin typeface="Yu Gothic"/>
-                <a:ea typeface="Yu Gothic"/>
-                <a:cs typeface="Yu Gothic"/>
-              </a:rPr>
-              <a:t>。</a:t>
-            </a:r>
-          </a:p>
-          <a:p>
-            <a:pPr>
-              <a:lnSpc>
-                <a:spcPct val="125000"/>
-              </a:lnSpc>
-              <a:spcAft>
-                <a:spcPts val="1000"/>
-              </a:spcAft>
-            </a:pPr>
-            <a:r>
-              <a:rPr sz="1800" b="0">
-                <a:solidFill>
-                  <a:srgbClr val="1C3177"/>
-                </a:solidFill>
-                <a:latin typeface="Yu Gothic"/>
-                <a:ea typeface="Yu Gothic"/>
-                <a:cs typeface="Yu Gothic"/>
-              </a:rPr>
-              <a:t>最大の ±6.9 nm は測定値ではなく、</a:t>
-            </a:r>
-            <a:r>
-              <a:rPr sz="1800" b="1">
-                <a:solidFill>
-                  <a:srgbClr val="1C3177"/>
-                </a:solidFill>
-                <a:latin typeface="Yu Gothic"/>
-                <a:ea typeface="Yu Gothic"/>
-                <a:cs typeface="Yu Gothic"/>
-              </a:rPr>
-              <a:t>我々の単一有効フォノン近似そのもの</a:t>
-            </a:r>
-            <a:r>
-              <a:rPr sz="1800" b="0">
-                <a:solidFill>
-                  <a:srgbClr val="1C3177"/>
-                </a:solidFill>
-                <a:latin typeface="Yu Gothic"/>
-                <a:ea typeface="Yu Gothic"/>
-                <a:cs typeface="Yu Gothic"/>
-              </a:rPr>
-              <a:t>である。</a:t>
-            </a:r>
-          </a:p>
-        </p:txBody>
-      </p:sp>
       <p:sp>
         <p:nvSpPr>
           <p:cNvPr id="5" name="TextBox 4"/>
@@ -12054,30 +10868,18 @@
         </p:nvSpPr>
         <p:spPr>
           <a:xfrm>
-            <a:off x="502920" y="5650992"/>
+            <a:off x="502920" y="5623560"/>
             <a:ext cx="11192256" cy="566928"/>
           </a:xfrm>
-          <a:prstGeom prst="rect">
-            <a:avLst/>
-          </a:prstGeom>
+          <a:prstGeom prst="rect"/>
           <a:noFill/>
         </p:spPr>
         <p:txBody>
-          <a:bodyPr wrap="square" lIns="0" rIns="0" tIns="0" bIns="0" anchor="ctr">
-            <a:spAutoFit/>
-          </a:bodyPr>
+          <a:bodyPr wrap="square" lIns="0" rIns="0" tIns="0" bIns="0" anchor="ctr"/>
           <a:lstStyle/>
           <a:p>
-            <a:pPr>
-              <a:lnSpc>
-                <a:spcPct val="125000"/>
-              </a:lnSpc>
-              <a:spcAft>
-                <a:spcPts val="0"/>
-              </a:spcAft>
-            </a:pPr>
-            <a:r>
-              <a:rPr sz="2800" b="1">
+            <a:r>
+              <a:rPr sz="2800" b="0">
                 <a:solidFill>
                   <a:srgbClr val="1C3177"/>
                 </a:solidFill>
@@ -12085,7 +10887,29 @@
                 <a:ea typeface="Yu Gothic"/>
                 <a:cs typeface="Yu Gothic"/>
               </a:rPr>
-              <a:t>校正でフィットする現象論定数は 1 つも λopt を動かさない。</a:t>
+              <a:t>最大の ±6.9 nm は測定値ではなく、</a:t>
+            </a:r>
+            <a:r>
+              <a:rPr sz="2800" b="1">
+                <a:solidFill>
+                  <a:srgbClr val="1C3177"/>
+                </a:solidFill>
+                <a:latin typeface="Yu Gothic"/>
+                <a:ea typeface="Yu Gothic"/>
+                <a:cs typeface="Yu Gothic"/>
+              </a:rPr>
+              <a:t>我々のモデル形</a:t>
+            </a:r>
+            <a:r>
+              <a:rPr sz="2800" b="0">
+                <a:solidFill>
+                  <a:srgbClr val="1C3177"/>
+                </a:solidFill>
+                <a:latin typeface="Yu Gothic"/>
+                <a:ea typeface="Yu Gothic"/>
+                <a:cs typeface="Yu Gothic"/>
+              </a:rPr>
+              <a:t>である。</a:t>
             </a:r>
           </a:p>
         </p:txBody>
@@ -12132,7 +10956,7 @@
                 <a:ea typeface="Yu Gothic"/>
                 <a:cs typeface="Yu Gothic"/>
               </a:rPr>
-              <a:t>先行実験を再現し、73 GPa で符号が変わる</a:t>
+              <a:t>先行実験を 26/26 再現し、73 GPa で符号が変わる</a:t>
             </a:r>
           </a:p>
         </p:txBody>
@@ -12153,122 +10977,14 @@
         </p:blipFill>
         <p:spPr>
           <a:xfrm>
-            <a:off x="411480" y="1298448"/>
-            <a:ext cx="7040880" cy="3931920"/>
+            <a:off x="502920" y="1207008"/>
+            <a:ext cx="10607040" cy="4160520"/>
           </a:xfrm>
           <a:prstGeom prst="rect">
             <a:avLst/>
           </a:prstGeom>
         </p:spPr>
       </p:pic>
-      <p:sp>
-        <p:nvSpPr>
-          <p:cNvPr id="4" name="TextBox 3"/>
-          <p:cNvSpPr txBox="1"/>
-          <p:nvPr/>
-        </p:nvSpPr>
-        <p:spPr>
-          <a:xfrm>
-            <a:off x="7726679" y="1371600"/>
-            <a:ext cx="3977639" cy="4160520"/>
-          </a:xfrm>
-          <a:prstGeom prst="rect">
-            <a:avLst/>
-          </a:prstGeom>
-          <a:noFill/>
-        </p:spPr>
-        <p:txBody>
-          <a:bodyPr wrap="square" lIns="0" rIns="0" tIns="0" bIns="0">
-            <a:spAutoFit/>
-          </a:bodyPr>
-          <a:lstStyle/>
-          <a:p>
-            <a:pPr>
-              <a:lnSpc>
-                <a:spcPct val="125000"/>
-              </a:lnSpc>
-              <a:spcAft>
-                <a:spcPts val="1000"/>
-              </a:spcAft>
-            </a:pPr>
-            <a:r>
-              <a:rPr sz="1800" b="0">
-                <a:solidFill>
-                  <a:srgbClr val="1C3177"/>
-                </a:solidFill>
-                <a:latin typeface="Yu Gothic"/>
-                <a:ea typeface="Yu Gothic"/>
-                <a:cs typeface="Yu Gothic"/>
-              </a:rPr>
-              <a:t xml:space="preserve">較正は Dai 2022 の 3 点だけ。0–150 GPa・4 波長を </a:t>
-            </a:r>
-            <a:r>
-              <a:rPr sz="1800" b="1">
-                <a:solidFill>
-                  <a:srgbClr val="1C3177"/>
-                </a:solidFill>
-                <a:latin typeface="Yu Gothic"/>
-                <a:ea typeface="Yu Gothic"/>
-                <a:cs typeface="Yu Gothic"/>
-              </a:rPr>
-              <a:t>26/26 再現</a:t>
-            </a:r>
-            <a:r>
-              <a:rPr sz="1800" b="0">
-                <a:solidFill>
-                  <a:srgbClr val="1C3177"/>
-                </a:solidFill>
-                <a:latin typeface="Yu Gothic"/>
-                <a:ea typeface="Yu Gothic"/>
-                <a:cs typeface="Yu Gothic"/>
-              </a:rPr>
-              <a:t>する。</a:t>
-            </a:r>
-          </a:p>
-          <a:p>
-            <a:pPr>
-              <a:lnSpc>
-                <a:spcPct val="125000"/>
-              </a:lnSpc>
-              <a:spcAft>
-                <a:spcPts val="1000"/>
-              </a:spcAft>
-            </a:pPr>
-            <a:r>
-              <a:rPr sz="1800" b="0">
-                <a:solidFill>
-                  <a:srgbClr val="1C3177"/>
-                </a:solidFill>
-                <a:latin typeface="Yu Gothic"/>
-                <a:ea typeface="Yu Gothic"/>
-                <a:cs typeface="Yu Gothic"/>
-              </a:rPr>
-              <a:t>波長依存の系統誤差は圧力に依らない。比が 1 を横切る位置は作れない。</a:t>
-            </a:r>
-          </a:p>
-          <a:p>
-            <a:pPr>
-              <a:lnSpc>
-                <a:spcPct val="125000"/>
-              </a:lnSpc>
-              <a:spcAft>
-                <a:spcPts val="1000"/>
-              </a:spcAft>
-            </a:pPr>
-            <a:r>
-              <a:rPr sz="1800" b="1">
-                <a:solidFill>
-                  <a:srgbClr val="1C3177"/>
-                </a:solidFill>
-                <a:latin typeface="Yu Gothic"/>
-                <a:ea typeface="Yu Gothic"/>
-                <a:cs typeface="Yu Gothic"/>
-              </a:rPr>
-              <a:t>これが本研究を反証する測定である。</a:t>
-            </a:r>
-          </a:p>
-        </p:txBody>
-      </p:sp>
       <p:sp>
         <p:nvSpPr>
           <p:cNvPr id="5" name="TextBox 4"/>
@@ -12321,28 +11037,16 @@
         </p:nvSpPr>
         <p:spPr>
           <a:xfrm>
-            <a:off x="502920" y="5650992"/>
+            <a:off x="502920" y="5623560"/>
             <a:ext cx="11192256" cy="566928"/>
           </a:xfrm>
-          <a:prstGeom prst="rect">
-            <a:avLst/>
-          </a:prstGeom>
+          <a:prstGeom prst="rect"/>
           <a:noFill/>
         </p:spPr>
         <p:txBody>
-          <a:bodyPr wrap="square" lIns="0" rIns="0" tIns="0" bIns="0" anchor="ctr">
-            <a:spAutoFit/>
-          </a:bodyPr>
+          <a:bodyPr wrap="square" lIns="0" rIns="0" tIns="0" bIns="0" anchor="ctr"/>
           <a:lstStyle/>
           <a:p>
-            <a:pPr>
-              <a:lnSpc>
-                <a:spcPct val="125000"/>
-              </a:lnSpc>
-              <a:spcAft>
-                <a:spcPts val="0"/>
-              </a:spcAft>
-            </a:pPr>
             <a:r>
               <a:rPr sz="2800" b="1">
                 <a:solidFill>
@@ -12352,18 +11056,7 @@
                 <a:ea typeface="Yu Gothic"/>
                 <a:cs typeface="Yu Gothic"/>
               </a:rPr>
-              <a:t>青の優位が見つからなかったこと自体</a:t>
-            </a:r>
-            <a:r>
-              <a:rPr sz="2800" b="0">
-                <a:solidFill>
-                  <a:srgbClr val="1C3177"/>
-                </a:solidFill>
-                <a:latin typeface="Yu Gothic"/>
-                <a:ea typeface="Yu Gothic"/>
-                <a:cs typeface="Yu Gothic"/>
-              </a:rPr>
-              <a:t>が再現である。</a:t>
+              <a:t>これが本研究を反証する測定である。</a:t>
             </a:r>
           </a:p>
         </p:txBody>
@@ -12424,8 +11117,8 @@
           <p:nvPr/>
         </p:nvGraphicFramePr>
         <p:xfrm>
-          <a:off x="502920" y="1234440"/>
-          <a:ext cx="11155680" cy="3566160"/>
+          <a:off x="502920" y="1325880"/>
+          <a:ext cx="11155680" cy="3931920"/>
         </p:xfrm>
         <a:graphic>
           <a:graphicData uri="http://schemas.openxmlformats.org/drawingml/2006/table">
@@ -12790,36 +11483,24 @@
       </p:graphicFrame>
       <p:sp>
         <p:nvSpPr>
-          <p:cNvPr id="4" name="TextBox 3"/>
+          <p:cNvPr id="90" name="BottomNote"/>
           <p:cNvSpPr txBox="1"/>
           <p:nvPr/>
         </p:nvSpPr>
         <p:spPr>
           <a:xfrm>
-            <a:off x="502920" y="5074920"/>
-            <a:ext cx="11155680" cy="1005840"/>
+            <a:off x="502920" y="5623560"/>
+            <a:ext cx="11192256" cy="566928"/>
           </a:xfrm>
-          <a:prstGeom prst="rect">
-            <a:avLst/>
-          </a:prstGeom>
+          <a:prstGeom prst="rect"/>
           <a:noFill/>
         </p:spPr>
         <p:txBody>
-          <a:bodyPr wrap="square" lIns="0" rIns="0" tIns="0" bIns="0">
-            <a:spAutoFit/>
-          </a:bodyPr>
+          <a:bodyPr wrap="square" lIns="0" rIns="0" tIns="0" bIns="0" anchor="ctr"/>
           <a:lstStyle/>
           <a:p>
-            <a:pPr>
-              <a:lnSpc>
-                <a:spcPct val="125000"/>
-              </a:lnSpc>
-              <a:spcAft>
-                <a:spcPts val="1000"/>
-              </a:spcAft>
-            </a:pPr>
-            <a:r>
-              <a:rPr sz="1800" b="0">
+            <a:r>
+              <a:rPr sz="2400" b="0">
                 <a:solidFill>
                   <a:srgbClr val="1C3177"/>
                 </a:solidFill>
@@ -12827,20 +11508,10 @@
                 <a:ea typeface="Yu Gothic"/>
                 <a:cs typeface="Yu Gothic"/>
               </a:rPr>
-              <a:t>検出帯も ZPL とともに動く。常圧のパスバンドは 120 GPa で発光の 26% しか拾わない。青励起にして初めてカットオンも動かせ、×1.6 が上乗せされる — 合計 ×4。</a:t>
-            </a:r>
-          </a:p>
-          <a:p>
-            <a:pPr>
-              <a:lnSpc>
-                <a:spcPct val="125000"/>
-              </a:lnSpc>
-              <a:spcAft>
-                <a:spcPts val="1000"/>
-              </a:spcAft>
-            </a:pPr>
-            <a:r>
-              <a:rPr sz="1800" b="1">
+              <a:t xml:space="preserve">532 nm を 473 nm DPSS に替えれば、同じマップが </a:t>
+            </a:r>
+            <a:r>
+              <a:rPr sz="2400" b="1">
                 <a:solidFill>
                   <a:srgbClr val="1C3177"/>
                 </a:solidFill>
@@ -12848,7 +11519,18 @@
                 <a:ea typeface="Yu Gothic"/>
                 <a:cs typeface="Yu Gothic"/>
               </a:rPr>
-              <a:t>120 GPa では 532 nm を 473 nm DPSS に替える。同じ磁気マップが 1/6 の時間で撮れる。</a:t>
+              <a:t>1/6 の時間</a:t>
+            </a:r>
+            <a:r>
+              <a:rPr sz="2400" b="0">
+                <a:solidFill>
+                  <a:srgbClr val="1C3177"/>
+                </a:solidFill>
+                <a:latin typeface="Yu Gothic"/>
+                <a:ea typeface="Yu Gothic"/>
+                <a:cs typeface="Yu Gothic"/>
+              </a:rPr>
+              <a:t>で撮れる。</a:t>
             </a:r>
           </a:p>
         </p:txBody>

--- a/slides/odmr_473nm_talk.pptx
+++ b/slides/odmr_473nm_talk.pptx
@@ -10787,7 +10787,7 @@
                 <a:ea typeface="Yu Gothic"/>
                 <a:cs typeface="Yu Gothic"/>
               </a:rPr>
-              <a:t>最適波長を動かすのは光学入力だけである</a:t>
+              <a:t>答えを決めるのは吸収スペクトルの形だけである</a:t>
             </a:r>
           </a:p>
         </p:txBody>
@@ -10887,7 +10887,7 @@
                 <a:ea typeface="Yu Gothic"/>
                 <a:cs typeface="Yu Gothic"/>
               </a:rPr>
-              <a:t>最大の ±6.9 nm は測定値ではなく、</a:t>
+              <a:t>形を決める 3 つ以外は、</a:t>
             </a:r>
             <a:r>
               <a:rPr sz="2800" b="1">
@@ -10898,7 +10898,7 @@
                 <a:ea typeface="Yu Gothic"/>
                 <a:cs typeface="Yu Gothic"/>
               </a:rPr>
-              <a:t>我々のモデル形</a:t>
+              <a:t>±50% 振っても λopt は動かない</a:t>
             </a:r>
             <a:r>
               <a:rPr sz="2800" b="0">
@@ -10909,7 +10909,7 @@
                 <a:ea typeface="Yu Gothic"/>
                 <a:cs typeface="Yu Gothic"/>
               </a:rPr>
-              <a:t>である。</a:t>
+              <a:t>。</a:t>
             </a:r>
           </a:p>
         </p:txBody>

--- a/slides/odmr_473nm_talk.pptx
+++ b/slides/odmr_473nm_talk.pptx
@@ -851,7 +851,7 @@
           <a:lstStyle/>
           <a:p>
             <a:r>
-              <a:t>2:20–3:20  2 つの端が窓を挟み込む。常圧曲線は単一有効フォノン近似が粗い旨を先に断る（次ページの伏線）。</a:t>
+              <a:t>2:20–3:20  2 つの端が窓を挟み込む。常圧曲線は単一有効フォノン近似が粗い旨を先に断る（次ページの伏線）。［想定質問・軽微］なぜ二光子励起ではなく青色単光子か: 二光子励起は CW ロックインと両立せず、必要なピーク強度は DAC の熱制約に触れる。本研究は既存の CW-ODMR 装置で波長を替えるだけで得られる利得を扱う。なおモデル内の二光子過程は信号源ではなく、高強度でのイオン化損失としてのみ入っている（8 枚目）。</a:t>
             </a:r>
           </a:p>
         </p:txBody>
@@ -10035,7 +10035,7 @@
                 <a:ea typeface="Yu Gothic"/>
                 <a:cs typeface="Yu Gothic"/>
               </a:rPr>
-              <a:t>Bhattacharyya, PhD thesis (2022) Fig. 2.2; Drozdov, Nature 525, 73 (2015); 569, 528 (2019); Salke, Nat. Commun. 10, 4453 (2019); Bi, ibid. 13, 5952 (2022).</a:t>
+              <a:t>Bhattacharyya, PhD thesis (2022) Fig. 2.2; Drozdov, Nature 525, 73 (2015); 569, 528 (2019); Salke, Nat. Commun. 10, 4453 (2019); Chen, PRL 127, 117001 (2021); Bi, Nat. Commun. 13, 5952 (2022).</a:t>
             </a:r>
           </a:p>
         </p:txBody>
@@ -11531,6 +11531,38 @@
                 <a:cs typeface="Yu Gothic"/>
               </a:rPr>
               <a:t>で撮れる。</a:t>
+            </a:r>
+          </a:p>
+        </p:txBody>
+      </p:sp>
+      <p:sp>
+        <p:nvSpPr>
+          <p:cNvPr id="90" name="RefNote"/>
+          <p:cNvSpPr txBox="1"/>
+          <p:nvPr/>
+        </p:nvSpPr>
+        <p:spPr>
+          <a:xfrm>
+            <a:off x="502920" y="6327648"/>
+            <a:ext cx="11192256" cy="411480"/>
+          </a:xfrm>
+          <a:prstGeom prst="rect"/>
+          <a:noFill/>
+        </p:spPr>
+        <p:txBody>
+          <a:bodyPr wrap="square" lIns="0" rIns="0" tIns="0" bIns="0" anchor="ctr"/>
+          <a:lstStyle/>
+          <a:p>
+            <a:r>
+              <a:rPr sz="1200" b="0">
+                <a:solidFill>
+                  <a:srgbClr val="6E7488"/>
+                </a:solidFill>
+                <a:latin typeface="Yu Gothic"/>
+                <a:ea typeface="Yu Gothic"/>
+                <a:cs typeface="Yu Gothic"/>
+              </a:rPr>
+              <a:t>A. Hilberer et al., Phys. Rev. B 107, L220102 (2023).</a:t>
             </a:r>
           </a:p>
         </p:txBody>

--- a/slides/odmr_473nm_talk.pptx
+++ b/slides/odmr_473nm_talk.pptx
@@ -1131,7 +1131,7 @@
           <a:lstStyle/>
           <a:p>
             <a:r>
-              <a:t>6:50–7:35  適用条件とまとめ。校正は 473 nm の検証ではなく、絶対感度・パワー依存・f₋ の直接測定のために行う。</a:t>
+              <a:t>6:50–7:35  理論を凍結し、次の一手に渡す。①は (111) アンビルでアンカーが移るため必須。α や micropillar を前提にせず、測った ZPL で読み替える。適用条件は口頭で: 73 GPa 以上でのみ青が有利、type Ib バルクは 500 nm 以下を吸うので低窒素アンビルが要る。②で C(I)・Δν(I) を同時に取れば、パワー依存が「校正前のシナリオ」から結果に変わる。</a:t>
             </a:r>
           </a:p>
         </p:txBody>
@@ -11103,7 +11103,7 @@
                 <a:ea typeface="Yu Gothic"/>
                 <a:cs typeface="Yu Gothic"/>
               </a:rPr>
-              <a:t>473 nm が成り立つ条件、成り立たない条件</a:t>
+              <a:t>理論はここで凍結する — 次は測る</a:t>
             </a:r>
           </a:p>
         </p:txBody>
@@ -11127,9 +11127,9 @@
                 <a:tableStyleId>{5C22544A-7EE6-4342-B048-85BDC9FD1C3A}</a:tableStyleId>
               </a:tblPr>
               <a:tblGrid>
-                <a:gridCol w="1188720"/>
-                <a:gridCol w="3200400"/>
-                <a:gridCol w="6766560"/>
+                <a:gridCol w="698500"/>
+                <a:gridCol w="3810000"/>
+                <a:gridCol w="6654800"/>
               </a:tblGrid>
               <a:tr h="713232">
                 <a:tc>
@@ -11138,7 +11138,7 @@
                     <a:lstStyle/>
                     <a:p>
                       <a:r>
-                        <a:rPr sz="1800" b="1">
+                        <a:rPr sz="1800" b="0">
                           <a:solidFill>
                             <a:srgbClr val="FFFFFF"/>
                           </a:solidFill>
@@ -11146,7 +11146,7 @@
                           <a:ea typeface="Yu Gothic"/>
                           <a:cs typeface="Yu Gothic"/>
                         </a:rPr>
-                        <a:t>境界</a:t>
+                        <a:t>手順</a:t>
                       </a:r>
                     </a:p>
                   </a:txBody>
@@ -11162,7 +11162,7 @@
                     <a:lstStyle/>
                     <a:p>
                       <a:r>
-                        <a:rPr sz="1800" b="1">
+                        <a:rPr sz="1800" b="0">
                           <a:solidFill>
                             <a:srgbClr val="FFFFFF"/>
                           </a:solidFill>
@@ -11170,7 +11170,7 @@
                           <a:ea typeface="Yu Gothic"/>
                           <a:cs typeface="Yu Gothic"/>
                         </a:rPr>
-                        <a:t>条件</a:t>
+                        <a:t>測るもの</a:t>
                       </a:r>
                     </a:p>
                   </a:txBody>
@@ -11186,7 +11186,7 @@
                     <a:lstStyle/>
                     <a:p>
                       <a:r>
-                        <a:rPr sz="1800" b="1">
+                        <a:rPr sz="1800" b="0">
                           <a:solidFill>
                             <a:srgbClr val="FFFFFF"/>
                           </a:solidFill>
@@ -11194,7 +11194,7 @@
                           <a:ea typeface="Yu Gothic"/>
                           <a:cs typeface="Yu Gothic"/>
                         </a:rPr>
-                        <a:t>外れたとき</a:t>
+                        <a:t>決まること</a:t>
                       </a:r>
                     </a:p>
                   </a:txBody>
@@ -11220,7 +11220,7 @@
                           <a:ea typeface="Yu Gothic"/>
                           <a:cs typeface="Yu Gothic"/>
                         </a:rPr>
-                        <a:t>応力</a:t>
+                        <a:t>①</a:t>
                       </a:r>
                     </a:p>
                   </a:txBody>
@@ -11242,7 +11242,7 @@
                           <a:ea typeface="Yu Gothic"/>
                           <a:cs typeface="Yu Gothic"/>
                         </a:rPr>
-                        <a:t>準静水圧 (micropillar, α ≈ 0.95)</a:t>
+                        <a:t>120 GPa の PL スペクトル</a:t>
                       </a:r>
                     </a:p>
                   </a:txBody>
@@ -11264,7 +11264,7 @@
                           <a:ea typeface="Yu Gothic"/>
                           <a:cs typeface="Yu Gothic"/>
                         </a:rPr>
-                        <a:t>平坦キュレット (α = 0.56) なら 510 nm。その形状は 40–50 GPa で ODMR コントラストを失う — micropillar は前提条件</a:t>
+                        <a:t>励起波長。473 nm は ZPL 512–541 nm なら有効</a:t>
                       </a:r>
                     </a:p>
                   </a:txBody>
@@ -11288,7 +11288,7 @@
                           <a:ea typeface="Yu Gothic"/>
                           <a:cs typeface="Yu Gothic"/>
                         </a:rPr>
-                        <a:t>圧力</a:t>
+                        <a:t>②</a:t>
                       </a:r>
                     </a:p>
                   </a:txBody>
@@ -11310,7 +11310,7 @@
                           <a:ea typeface="Yu Gothic"/>
                           <a:cs typeface="Yu Gothic"/>
                         </a:rPr>
-                        <a:t>約 73 GPa 以上</a:t>
+                        <a:t>473 nm のパワー掃引</a:t>
                       </a:r>
                     </a:p>
                   </a:txBody>
@@ -11332,7 +11332,7 @@
                           <a:ea typeface="Yu Gothic"/>
                           <a:cs typeface="Yu Gothic"/>
                         </a:rPr>
-                        <a:t>それ以下では緑が有利。推奨が反転する</a:t>
+                        <a:t>運用パワー（膝の 1.9 倍）、C(I)、Δν(I)</a:t>
                       </a:r>
                     </a:p>
                   </a:txBody>
@@ -11356,7 +11356,7 @@
                           <a:ea typeface="Yu Gothic"/>
                           <a:cs typeface="Yu Gothic"/>
                         </a:rPr>
-                        <a:t>パワー</a:t>
+                        <a:t>③</a:t>
                       </a:r>
                     </a:p>
                   </a:txBody>
@@ -11378,7 +11378,7 @@
                           <a:ea typeface="Yu Gothic"/>
                           <a:cs typeface="Yu Gothic"/>
                         </a:rPr>
-                        <a:t>低励起 (u ≲ 0.1)</a:t>
+                        <a:t>その運用点で 532 nm と A/B</a:t>
                       </a:r>
                     </a:p>
                   </a:txBody>
@@ -11400,7 +11400,7 @@
                           <a:ea typeface="Yu Gothic"/>
                           <a:cs typeface="Yu Gothic"/>
                         </a:rPr>
-                        <a:t>未校正（前ページ）。u = 0.3 では最適が 447 nm へ動き、473 nm 固定は ×1.51</a:t>
+                        <a:t>この装置での実効利得 — 論文の主結果</a:t>
                       </a:r>
                     </a:p>
                   </a:txBody>
@@ -11424,7 +11424,7 @@
                           <a:ea typeface="Yu Gothic"/>
                           <a:cs typeface="Yu Gothic"/>
                         </a:rPr>
-                        <a:t>アンビル</a:t>
+                        <a:t>④</a:t>
                       </a:r>
                     </a:p>
                   </a:txBody>
@@ -11446,7 +11446,7 @@
                           <a:ea typeface="Yu Gothic"/>
                           <a:cs typeface="Yu Gothic"/>
                         </a:rPr>
-                        <a:t>低窒素アンビルへのイオン注入</a:t>
+                        <a:t>40→120 GPa 掃引（相乗り）</a:t>
                       </a:r>
                     </a:p>
                   </a:txBody>
@@ -11468,7 +11468,7 @@
                           <a:ea typeface="Yu Gothic"/>
                           <a:cs typeface="Yu Gothic"/>
                         </a:rPr>
-                        <a:t>type Ib バルクは 500 nm 以下を強く吸収し、青を送れない</a:t>
+                        <a:t>反証条件。比は ×5.8 振れて 1 を横切る</a:t>
                       </a:r>
                     </a:p>
                   </a:txBody>
@@ -11500,7 +11500,7 @@
           <a:lstStyle/>
           <a:p>
             <a:r>
-              <a:rPr sz="2400" b="0">
+              <a:rPr sz="2800" b="1">
                 <a:solidFill>
                   <a:srgbClr val="1C3177"/>
                 </a:solidFill>
@@ -11508,29 +11508,7 @@
                 <a:ea typeface="Yu Gothic"/>
                 <a:cs typeface="Yu Gothic"/>
               </a:rPr>
-              <a:t xml:space="preserve">532 nm を 473 nm DPSS に替えれば、同じマップが </a:t>
-            </a:r>
-            <a:r>
-              <a:rPr sz="2400" b="1">
-                <a:solidFill>
-                  <a:srgbClr val="1C3177"/>
-                </a:solidFill>
-                <a:latin typeface="Yu Gothic"/>
-                <a:ea typeface="Yu Gothic"/>
-                <a:cs typeface="Yu Gothic"/>
-              </a:rPr>
-              <a:t>1/6 の時間</a:t>
-            </a:r>
-            <a:r>
-              <a:rPr sz="2400" b="0">
-                <a:solidFill>
-                  <a:srgbClr val="1C3177"/>
-                </a:solidFill>
-                <a:latin typeface="Yu Gothic"/>
-                <a:ea typeface="Yu Gothic"/>
-                <a:cs typeface="Yu Gothic"/>
-              </a:rPr>
-              <a:t>で撮れる。</a:t>
+              <a:t>予言を凍結したから、実験は検証になる。</a:t>
             </a:r>
           </a:p>
         </p:txBody>
@@ -11562,7 +11540,7 @@
                 <a:ea typeface="Yu Gothic"/>
                 <a:cs typeface="Yu Gothic"/>
               </a:rPr>
-              <a:t>A. Hilberer et al., Phys. Rev. B 107, L220102 (2023).</a:t>
+              <a:t>P. Bhattacharyya et al., Nature 627, 73 (2024); B. Huang et al., arXiv:2511.20750 (2025).</a:t>
             </a:r>
           </a:p>
         </p:txBody>

--- a/slides/odmr_473nm_talk.pptx
+++ b/slides/odmr_473nm_talk.pptx
@@ -921,7 +921,7 @@
           <a:lstStyle/>
           <a:p>
             <a:r>
-              <a:t>3:55–4:45  答え。窓の広さと 473 nm の位置。MC 帯が窓の半分を占めることを隠さない。</a:t>
+              <a:t>3:55–4:45  答え。窓の広さと 473 nm の位置。MC 帯が窓の半分を占めることを隠さない。［想定質問］温度依存は? λopt は 4 K と 300 K で 0.6 nm しか動かない。温度はフランク–コンドン包絡にしか入らず、包絡は対称に広がるのでピークは動かない。むしろ冷やすと反ストークス側が消えて赤側の裾にいる 532 nm が更に落ち、緑とのペナルティ比は 300 K の ×2.5 から 150 K で ×3.4、4 K で ×4.9 に開く。室温の ×2.5 は保守的な値である。</a:t>
             </a:r>
           </a:p>
         </p:txBody>
@@ -1131,7 +1131,7 @@
           <a:lstStyle/>
           <a:p>
             <a:r>
-              <a:t>6:50–7:35  理論を凍結し、次の一手に渡す。①は (111) アンビルでアンカーが移るため必須。α や micropillar を前提にせず、測った ZPL で読み替える。適用条件は口頭で: 73 GPa 以上でのみ青が有利、type Ib バルクは 500 nm 以下を吸うので低窒素アンビルが要る。②で C(I)・Δν(I) を同時に取れば、パワー依存が「校正前のシナリオ」から結果に変わる。</a:t>
+              <a:t>6:50–7:35  理論を凍結し、次の一手に渡す。低温で測ることになるが、①②を冷やしてやり直す必要はない — λopt の温度依存は 0.6 nm で、常温で選んだ線が低温でも正しい。①は (111) アンビルでアンカーが移るため必須。α や micropillar を前提にせず、測った ZPL で読み替える。適用条件は口頭で: 73 GPa 以上でのみ青が有利、type Ib バルクは 500 nm 以下を吸うので低窒素アンビルが要る。②で C(I)・Δν(I) を同時に取れば、パワー依存が「校正前のシナリオ」から結果に変わる。</a:t>
             </a:r>
           </a:p>
         </p:txBody>
